--- a/slides/anti_vishing_proposal.pptx
+++ b/slides/anti_vishing_proposal.pptx
@@ -2505,35 +2505,14 @@
               <a:buNone/>
             </a:pPr>
             <a:r>
-              <a:rPr lang="en-US" sz="1600" dirty="0">
+              <a:rPr sz="1600">
                 <a:solidFill>
                   <a:srgbClr val="CADCFC"/>
                 </a:solidFill>
-                <a:latin typeface="Calibri" pitchFamily="34" charset="0"/>
-                <a:ea typeface="Calibri" pitchFamily="34" charset="-122"/>
-                <a:cs typeface="Calibri" pitchFamily="34" charset="-120"/>
-              </a:rPr>
-              <a:t>A real-time, generalizable Presentation Attack Detection architecture</a:t>
-            </a:r>
-            <a:endParaRPr lang="en-US" sz="1600" dirty="0"/>
-          </a:p>
-          <a:p>
-            <a:pPr indent="0" marL="0">
-              <a:lnSpc>
-                <a:spcPct val="130000"/>
-              </a:lnSpc>
-              <a:buNone/>
-            </a:pPr>
-            <a:r>
-              <a:rPr lang="en-US" sz="1600" dirty="0">
-                <a:solidFill>
-                  <a:srgbClr val="CADCFC"/>
-                </a:solidFill>
-                <a:latin typeface="Calibri" pitchFamily="34" charset="0"/>
-                <a:ea typeface="Calibri" pitchFamily="34" charset="-122"/>
-                <a:cs typeface="Calibri" pitchFamily="34" charset="-120"/>
-              </a:rPr>
-              <a:t>for voice authentication and multi-layer phishing defense</a:t>
+                <a:latin typeface="Calibri"/>
+              </a:rPr>
+              <a:t>A real-time, generalizable Presentation Attack Detection architecture
+that runs on the callee's phone and feeds a multi-layer phishing defense</a:t>
             </a:r>
             <a:endParaRPr lang="en-US" sz="1600" dirty="0"/>
           </a:p>
@@ -2561,6 +2540,10 @@
             <a:prstDash val="solid"/>
           </a:ln>
         </p:spPr>
+        <p:txBody>
+          <a:bodyPr/>
+          <a:p/>
+        </p:txBody>
       </p:sp>
       <p:sp>
         <p:nvSpPr>
@@ -2610,6 +2593,1574 @@
 </file>
 
 <file path=ppt/slides/slide10.xml><?xml version="1.0" encoding="utf-8"?>
+<p:sld xmlns:a="http://schemas.openxmlformats.org/drawingml/2006/main" xmlns:r="http://schemas.openxmlformats.org/officeDocument/2006/relationships" xmlns:p="http://schemas.openxmlformats.org/presentationml/2006/main">
+  <p:cSld name="Slide 8">
+    <p:bg>
+      <p:bgPr>
+        <a:solidFill>
+          <a:srgbClr val="FFFFFF"/>
+        </a:solidFill>
+      </p:bgPr>
+    </p:bg>
+    <p:spTree>
+      <p:nvGrpSpPr>
+        <p:cNvPr id="1" name=""/>
+        <p:cNvGrpSpPr/>
+        <p:nvPr/>
+      </p:nvGrpSpPr>
+      <p:grpSpPr>
+        <a:xfrm>
+          <a:off x="0" y="0"/>
+          <a:ext cx="0" cy="0"/>
+          <a:chOff x="0" y="0"/>
+          <a:chExt cx="0" cy="0"/>
+        </a:xfrm>
+      </p:grpSpPr>
+      <p:sp>
+        <p:nvSpPr>
+          <p:cNvPr id="2" name="Text 0"/>
+          <p:cNvSpPr txBox="1"/>
+          <p:nvPr/>
+        </p:nvSpPr>
+        <p:spPr>
+          <a:xfrm>
+            <a:off x="548640" y="365760"/>
+            <a:ext cx="9144000" cy="274320"/>
+          </a:xfrm>
+          <a:prstGeom prst="rect">
+            <a:avLst/>
+          </a:prstGeom>
+          <a:noFill/>
+          <a:ln/>
+        </p:spPr>
+        <p:txBody>
+          <a:bodyPr wrap="square" lIns="0" tIns="0" rIns="0" bIns="0" rtlCol="0" anchor="ctr"/>
+          <a:lstStyle/>
+          <a:p>
+            <a:pPr indent="0" marL="0">
+              <a:buNone/>
+            </a:pPr>
+            <a:r>
+              <a:rPr lang="en-US" sz="1200" b="1" spc="200" kern="0" dirty="0">
+                <a:solidFill>
+                  <a:srgbClr val="E94F37"/>
+                </a:solidFill>
+                <a:latin typeface="Calibri" pitchFamily="34" charset="0"/>
+                <a:ea typeface="Calibri" pitchFamily="34" charset="-122"/>
+                <a:cs typeface="Calibri" pitchFamily="34" charset="-120"/>
+              </a:rPr>
+              <a:t>EVALUATION PLAN</a:t>
+            </a:r>
+            <a:endParaRPr lang="en-US" sz="1200" dirty="0"/>
+          </a:p>
+        </p:txBody>
+      </p:sp>
+      <p:sp>
+        <p:nvSpPr>
+          <p:cNvPr id="3" name="Text 1"/>
+          <p:cNvSpPr txBox="1"/>
+          <p:nvPr/>
+        </p:nvSpPr>
+        <p:spPr>
+          <a:xfrm>
+            <a:off x="548640" y="621792"/>
+            <a:ext cx="11155680" cy="685800"/>
+          </a:xfrm>
+          <a:prstGeom prst="rect">
+            <a:avLst/>
+          </a:prstGeom>
+          <a:noFill/>
+          <a:ln/>
+        </p:spPr>
+        <p:txBody>
+          <a:bodyPr wrap="square" lIns="0" tIns="0" rIns="0" bIns="0" rtlCol="0" anchor="ctr"/>
+          <a:lstStyle/>
+          <a:p>
+            <a:pPr indent="0" marL="0">
+              <a:buNone/>
+            </a:pPr>
+            <a:r>
+              <a:rPr lang="en-US" sz="3000" b="1" dirty="0">
+                <a:solidFill>
+                  <a:srgbClr val="1B1F3B"/>
+                </a:solidFill>
+                <a:latin typeface="Cambria" pitchFamily="34" charset="0"/>
+                <a:ea typeface="Cambria" pitchFamily="34" charset="-122"/>
+                <a:cs typeface="Cambria" pitchFamily="34" charset="-120"/>
+              </a:rPr>
+              <a:t>Proving generalization, not just accuracy</a:t>
+            </a:r>
+            <a:endParaRPr lang="en-US" sz="3000" dirty="0"/>
+          </a:p>
+        </p:txBody>
+      </p:sp>
+      <p:sp>
+        <p:nvSpPr>
+          <p:cNvPr id="4" name="Shape 2"/>
+          <p:cNvSpPr/>
+          <p:nvPr/>
+        </p:nvSpPr>
+        <p:spPr>
+          <a:xfrm>
+            <a:off x="548640" y="1600200"/>
+            <a:ext cx="5349240" cy="1353312"/>
+          </a:xfrm>
+          <a:prstGeom prst="roundRect">
+            <a:avLst>
+              <a:gd name="adj" fmla="val 5405"/>
+            </a:avLst>
+          </a:prstGeom>
+          <a:solidFill>
+            <a:srgbClr val="F4F6FC"/>
+          </a:solidFill>
+          <a:ln/>
+        </p:spPr>
+        <p:txBody>
+          <a:bodyPr/>
+          <a:p/>
+        </p:txBody>
+      </p:sp>
+      <p:pic>
+        <p:nvPicPr>
+          <p:cNvPr id="5" name="Image 0" descr="/home/claude/deck/icons/chart_1E2761.png">    </p:cNvPr>
+          <p:cNvPicPr>
+            <a:picLocks noChangeAspect="1"/>
+          </p:cNvPicPr>
+          <p:nvPr/>
+        </p:nvPicPr>
+        <p:blipFill>
+          <a:blip r:embed="rId1"/>
+          <a:stretch>
+            <a:fillRect/>
+          </a:stretch>
+        </p:blipFill>
+        <p:spPr>
+          <a:xfrm>
+            <a:off x="822960" y="1819656"/>
+            <a:ext cx="438912" cy="438912"/>
+          </a:xfrm>
+          <a:prstGeom prst="rect">
+            <a:avLst/>
+          </a:prstGeom>
+        </p:spPr>
+      </p:pic>
+      <p:sp>
+        <p:nvSpPr>
+          <p:cNvPr id="6" name="Text 3"/>
+          <p:cNvSpPr txBox="1"/>
+          <p:nvPr/>
+        </p:nvSpPr>
+        <p:spPr>
+          <a:xfrm>
+            <a:off x="1463040" y="1764792"/>
+            <a:ext cx="4206240" cy="365760"/>
+          </a:xfrm>
+          <a:prstGeom prst="rect">
+            <a:avLst/>
+          </a:prstGeom>
+          <a:noFill/>
+          <a:ln/>
+        </p:spPr>
+        <p:txBody>
+          <a:bodyPr wrap="square" lIns="0" tIns="0" rIns="0" bIns="0" rtlCol="0" anchor="ctr"/>
+          <a:lstStyle/>
+          <a:p>
+            <a:pPr indent="0" marL="0">
+              <a:buNone/>
+            </a:pPr>
+            <a:r>
+              <a:rPr sz="1400" b="1">
+                <a:solidFill>
+                  <a:srgbClr val="1B1F3B"/>
+                </a:solidFill>
+                <a:latin typeface="Calibri"/>
+              </a:rPr>
+              <a:t>EER, min t-DCF, per call-minute</a:t>
+            </a:r>
+            <a:endParaRPr lang="en-US" sz="1400" dirty="0"/>
+          </a:p>
+        </p:txBody>
+      </p:sp>
+      <p:sp>
+        <p:nvSpPr>
+          <p:cNvPr id="7" name="Text 4"/>
+          <p:cNvSpPr txBox="1"/>
+          <p:nvPr/>
+        </p:nvSpPr>
+        <p:spPr>
+          <a:xfrm>
+            <a:off x="1463040" y="2130552"/>
+            <a:ext cx="4206240" cy="777240"/>
+          </a:xfrm>
+          <a:prstGeom prst="rect">
+            <a:avLst/>
+          </a:prstGeom>
+          <a:noFill/>
+          <a:ln/>
+        </p:spPr>
+        <p:txBody>
+          <a:bodyPr wrap="square" lIns="0" tIns="0" rIns="0" bIns="0" rtlCol="0" anchor="ctr"/>
+          <a:lstStyle/>
+          <a:p>
+            <a:pPr indent="0" marL="0">
+              <a:lnSpc>
+                <a:spcPct val="120000"/>
+              </a:lnSpc>
+              <a:buNone/>
+            </a:pPr>
+            <a:r>
+              <a:rPr sz="1150">
+                <a:solidFill>
+                  <a:srgbClr val="44506B"/>
+                </a:solidFill>
+                <a:latin typeface="Calibri"/>
+              </a:rPr>
+              <a:t>Standard PAD metrics on held-out splits. And a streaming detector is judged per call, not per window: at 5% per-window error a 60-second call false-alarms 79% of the time.</a:t>
+            </a:r>
+            <a:endParaRPr lang="en-US" sz="1150" dirty="0"/>
+          </a:p>
+        </p:txBody>
+      </p:sp>
+      <p:sp>
+        <p:nvSpPr>
+          <p:cNvPr id="8" name="Shape 5"/>
+          <p:cNvSpPr/>
+          <p:nvPr/>
+        </p:nvSpPr>
+        <p:spPr>
+          <a:xfrm>
+            <a:off x="548640" y="3118104"/>
+            <a:ext cx="5349240" cy="1353312"/>
+          </a:xfrm>
+          <a:prstGeom prst="roundRect">
+            <a:avLst>
+              <a:gd name="adj" fmla="val 5405"/>
+            </a:avLst>
+          </a:prstGeom>
+          <a:solidFill>
+            <a:srgbClr val="F4F6FC"/>
+          </a:solidFill>
+          <a:ln/>
+        </p:spPr>
+        <p:txBody>
+          <a:bodyPr/>
+          <a:p/>
+        </p:txBody>
+      </p:sp>
+      <p:pic>
+        <p:nvPicPr>
+          <p:cNvPr id="9" name="Image 1" descr="/home/claude/deck/icons/target_1E2761.png">    </p:cNvPr>
+          <p:cNvPicPr>
+            <a:picLocks noChangeAspect="1"/>
+          </p:cNvPicPr>
+          <p:nvPr/>
+        </p:nvPicPr>
+        <p:blipFill>
+          <a:blip r:embed="rId2"/>
+          <a:stretch>
+            <a:fillRect/>
+          </a:stretch>
+        </p:blipFill>
+        <p:spPr>
+          <a:xfrm>
+            <a:off x="822960" y="3337560"/>
+            <a:ext cx="438912" cy="438912"/>
+          </a:xfrm>
+          <a:prstGeom prst="rect">
+            <a:avLst/>
+          </a:prstGeom>
+        </p:spPr>
+      </p:pic>
+      <p:sp>
+        <p:nvSpPr>
+          <p:cNvPr id="10" name="Text 6"/>
+          <p:cNvSpPr txBox="1"/>
+          <p:nvPr/>
+        </p:nvSpPr>
+        <p:spPr>
+          <a:xfrm>
+            <a:off x="1463040" y="3282696"/>
+            <a:ext cx="4206240" cy="365760"/>
+          </a:xfrm>
+          <a:prstGeom prst="rect">
+            <a:avLst/>
+          </a:prstGeom>
+          <a:noFill/>
+          <a:ln/>
+        </p:spPr>
+        <p:txBody>
+          <a:bodyPr wrap="square" lIns="0" tIns="0" rIns="0" bIns="0" rtlCol="0" anchor="ctr"/>
+          <a:lstStyle/>
+          <a:p>
+            <a:pPr indent="0" marL="0">
+              <a:buNone/>
+            </a:pPr>
+            <a:r>
+              <a:rPr lang="en-US" sz="1400" b="1" dirty="0">
+                <a:solidFill>
+                  <a:srgbClr val="1B1F3B"/>
+                </a:solidFill>
+                <a:latin typeface="Calibri" pitchFamily="34" charset="0"/>
+                <a:ea typeface="Calibri" pitchFamily="34" charset="-122"/>
+                <a:cs typeface="Calibri" pitchFamily="34" charset="-120"/>
+              </a:rPr>
+              <a:t>Leave-one-generator-out</a:t>
+            </a:r>
+            <a:endParaRPr lang="en-US" sz="1400" dirty="0"/>
+          </a:p>
+        </p:txBody>
+      </p:sp>
+      <p:sp>
+        <p:nvSpPr>
+          <p:cNvPr id="11" name="Text 7"/>
+          <p:cNvSpPr txBox="1"/>
+          <p:nvPr/>
+        </p:nvSpPr>
+        <p:spPr>
+          <a:xfrm>
+            <a:off x="1463040" y="3648456"/>
+            <a:ext cx="4206240" cy="777240"/>
+          </a:xfrm>
+          <a:prstGeom prst="rect">
+            <a:avLst/>
+          </a:prstGeom>
+          <a:noFill/>
+          <a:ln/>
+        </p:spPr>
+        <p:txBody>
+          <a:bodyPr wrap="square" lIns="0" tIns="0" rIns="0" bIns="0" rtlCol="0" anchor="ctr"/>
+          <a:lstStyle/>
+          <a:p>
+            <a:pPr indent="0" marL="0">
+              <a:lnSpc>
+                <a:spcPct val="120000"/>
+              </a:lnSpc>
+              <a:buNone/>
+            </a:pPr>
+            <a:r>
+              <a:rPr lang="en-US" sz="1150" dirty="0">
+                <a:solidFill>
+                  <a:srgbClr val="44506B"/>
+                </a:solidFill>
+                <a:latin typeface="Calibri" pitchFamily="34" charset="0"/>
+                <a:ea typeface="Calibri" pitchFamily="34" charset="-122"/>
+                <a:cs typeface="Calibri" pitchFamily="34" charset="-120"/>
+              </a:rPr>
+              <a:t>Entire vocoder / TTS families held out of training to directly test cross-generator generalization.</a:t>
+            </a:r>
+            <a:endParaRPr lang="en-US" sz="1150" dirty="0"/>
+          </a:p>
+        </p:txBody>
+      </p:sp>
+      <p:sp>
+        <p:nvSpPr>
+          <p:cNvPr id="12" name="Shape 8"/>
+          <p:cNvSpPr/>
+          <p:nvPr/>
+        </p:nvSpPr>
+        <p:spPr>
+          <a:xfrm>
+            <a:off x="548640" y="4636008"/>
+            <a:ext cx="5349240" cy="1353312"/>
+          </a:xfrm>
+          <a:prstGeom prst="roundRect">
+            <a:avLst>
+              <a:gd name="adj" fmla="val 5405"/>
+            </a:avLst>
+          </a:prstGeom>
+          <a:solidFill>
+            <a:srgbClr val="F4F6FC"/>
+          </a:solidFill>
+          <a:ln/>
+        </p:spPr>
+        <p:txBody>
+          <a:bodyPr/>
+          <a:p/>
+        </p:txBody>
+      </p:sp>
+      <p:pic>
+        <p:nvPicPr>
+          <p:cNvPr id="13" name="Image 2" descr="/home/claude/deck/icons/layers_1E2761.png">    </p:cNvPr>
+          <p:cNvPicPr>
+            <a:picLocks noChangeAspect="1"/>
+          </p:cNvPicPr>
+          <p:nvPr/>
+        </p:nvPicPr>
+        <p:blipFill>
+          <a:blip r:embed="rId3"/>
+          <a:stretch>
+            <a:fillRect/>
+          </a:stretch>
+        </p:blipFill>
+        <p:spPr>
+          <a:xfrm>
+            <a:off x="822960" y="4855464"/>
+            <a:ext cx="438912" cy="438912"/>
+          </a:xfrm>
+          <a:prstGeom prst="rect">
+            <a:avLst/>
+          </a:prstGeom>
+        </p:spPr>
+      </p:pic>
+      <p:sp>
+        <p:nvSpPr>
+          <p:cNvPr id="14" name="Text 9"/>
+          <p:cNvSpPr txBox="1"/>
+          <p:nvPr/>
+        </p:nvSpPr>
+        <p:spPr>
+          <a:xfrm>
+            <a:off x="1463040" y="4800600"/>
+            <a:ext cx="4206240" cy="365760"/>
+          </a:xfrm>
+          <a:prstGeom prst="rect">
+            <a:avLst/>
+          </a:prstGeom>
+          <a:noFill/>
+          <a:ln/>
+        </p:spPr>
+        <p:txBody>
+          <a:bodyPr wrap="square" lIns="0" tIns="0" rIns="0" bIns="0" rtlCol="0" anchor="ctr"/>
+          <a:lstStyle/>
+          <a:p>
+            <a:pPr indent="0" marL="0">
+              <a:buNone/>
+            </a:pPr>
+            <a:r>
+              <a:rPr lang="en-US" sz="1400" b="1" dirty="0">
+                <a:solidFill>
+                  <a:srgbClr val="1B1F3B"/>
+                </a:solidFill>
+                <a:latin typeface="Calibri" pitchFamily="34" charset="0"/>
+                <a:ea typeface="Calibri" pitchFamily="34" charset="-122"/>
+                <a:cs typeface="Calibri" pitchFamily="34" charset="-120"/>
+              </a:rPr>
+              <a:t>Cross-lingual robustness (stretch)</a:t>
+            </a:r>
+            <a:endParaRPr lang="en-US" sz="1400" dirty="0"/>
+          </a:p>
+        </p:txBody>
+      </p:sp>
+      <p:sp>
+        <p:nvSpPr>
+          <p:cNvPr id="15" name="Text 10"/>
+          <p:cNvSpPr txBox="1"/>
+          <p:nvPr/>
+        </p:nvSpPr>
+        <p:spPr>
+          <a:xfrm>
+            <a:off x="1463040" y="5166360"/>
+            <a:ext cx="4206240" cy="777240"/>
+          </a:xfrm>
+          <a:prstGeom prst="rect">
+            <a:avLst/>
+          </a:prstGeom>
+          <a:noFill/>
+          <a:ln/>
+        </p:spPr>
+        <p:txBody>
+          <a:bodyPr wrap="square" lIns="0" tIns="0" rIns="0" bIns="0" rtlCol="0" anchor="ctr"/>
+          <a:lstStyle/>
+          <a:p>
+            <a:pPr indent="0" marL="0">
+              <a:lnSpc>
+                <a:spcPct val="120000"/>
+              </a:lnSpc>
+              <a:buNone/>
+            </a:pPr>
+            <a:r>
+              <a:rPr lang="en-US" sz="1150" dirty="0">
+                <a:solidFill>
+                  <a:srgbClr val="44506B"/>
+                </a:solidFill>
+                <a:latin typeface="Calibri" pitchFamily="34" charset="0"/>
+                <a:ea typeface="Calibri" pitchFamily="34" charset="-122"/>
+                <a:cs typeface="Calibri" pitchFamily="34" charset="-120"/>
+              </a:rPr>
+              <a:t>Spot-check performance on non-English speech with no language-specific fine-tuning.</a:t>
+            </a:r>
+            <a:endParaRPr lang="en-US" sz="1150" dirty="0"/>
+          </a:p>
+        </p:txBody>
+      </p:sp>
+      <p:sp>
+        <p:nvSpPr>
+          <p:cNvPr id="16" name="Text 11"/>
+          <p:cNvSpPr txBox="1"/>
+          <p:nvPr/>
+        </p:nvSpPr>
+        <p:spPr>
+          <a:xfrm>
+            <a:off x="6263640" y="1627632"/>
+            <a:ext cx="5349240" cy="274320"/>
+          </a:xfrm>
+          <a:prstGeom prst="rect">
+            <a:avLst/>
+          </a:prstGeom>
+          <a:noFill/>
+          <a:ln/>
+        </p:spPr>
+        <p:txBody>
+          <a:bodyPr wrap="square" lIns="0" tIns="0" rIns="0" bIns="0" rtlCol="0" anchor="ctr"/>
+          <a:lstStyle/>
+          <a:p>
+            <a:pPr indent="0" marL="0">
+              <a:buNone/>
+            </a:pPr>
+            <a:r>
+              <a:rPr sz="1050" b="1">
+                <a:solidFill>
+                  <a:srgbClr val="8792AC"/>
+                </a:solidFill>
+                <a:latin typeface="Calibri"/>
+              </a:rPr>
+              <a:t>WHERE THE TIME GOES  ·  MS PER 2-SECOND CHUNK</a:t>
+            </a:r>
+            <a:endParaRPr lang="en-US" sz="1050" dirty="0"/>
+          </a:p>
+        </p:txBody>
+      </p:sp>
+      <p:graphicFrame>
+        <p:nvGraphicFramePr>
+          <p:cNvPr id="17" name="Chart 0" descr=""/>
+          <p:cNvGraphicFramePr/>
+          <p:nvPr/>
+        </p:nvGraphicFramePr>
+        <p:xfrm>
+          <a:off x="6263640" y="1965960"/>
+          <a:ext cx="5349240" cy="3291840"/>
+        </p:xfrm>
+        <a:graphic xmlns:a="http://schemas.openxmlformats.org/drawingml/2006/main">
+          <a:graphicData uri="http://schemas.openxmlformats.org/drawingml/2006/chart">
+            <c:chart xmlns:c="http://schemas.openxmlformats.org/drawingml/2006/chart" r:id="rId4"/>
+          </a:graphicData>
+        </a:graphic>
+      </p:graphicFrame>
+      <p:sp>
+        <p:nvSpPr>
+          <p:cNvPr id="18" name="Text 12"/>
+          <p:cNvSpPr txBox="1"/>
+          <p:nvPr/>
+        </p:nvSpPr>
+        <p:spPr>
+          <a:xfrm>
+            <a:off x="6263640" y="5349240"/>
+            <a:ext cx="5349240" cy="502920"/>
+          </a:xfrm>
+          <a:prstGeom prst="rect">
+            <a:avLst/>
+          </a:prstGeom>
+          <a:noFill/>
+          <a:ln/>
+        </p:spPr>
+        <p:txBody>
+          <a:bodyPr wrap="square" lIns="0" tIns="0" rIns="0" bIns="0" rtlCol="0" anchor="ctr"/>
+          <a:lstStyle/>
+          <a:p>
+            <a:pPr indent="0" marL="0">
+              <a:lnSpc>
+                <a:spcPct val="120000"/>
+              </a:lnSpc>
+              <a:buNone/>
+            </a:pPr>
+            <a:r>
+              <a:rPr sz="1050">
+                <a:solidFill>
+                  <a:srgbClr val="8792AC"/>
+                </a:solidFill>
+                <a:latin typeface="Calibri"/>
+              </a:rPr>
+              <a:t>The alarm is read by a person, so the real budget is seconds. Per chunk we only have to keep up with the stream, which is what compression on slide 7 buys us.</a:t>
+            </a:r>
+            <a:endParaRPr lang="en-US" sz="1050" dirty="0"/>
+          </a:p>
+        </p:txBody>
+      </p:sp>
+      <p:sp>
+        <p:nvSpPr>
+          <p:cNvPr id="19" name="Text 13"/>
+          <p:cNvSpPr txBox="1"/>
+          <p:nvPr/>
+        </p:nvSpPr>
+        <p:spPr>
+          <a:xfrm>
+            <a:off x="457200" y="6537960"/>
+            <a:ext cx="8229600" cy="274320"/>
+          </a:xfrm>
+          <a:prstGeom prst="rect">
+            <a:avLst/>
+          </a:prstGeom>
+          <a:noFill/>
+          <a:ln/>
+        </p:spPr>
+        <p:txBody>
+          <a:bodyPr wrap="square" lIns="0" tIns="0" rIns="0" bIns="0" rtlCol="0" anchor="ctr"/>
+          <a:lstStyle/>
+          <a:p>
+            <a:pPr indent="0" marL="0">
+              <a:buNone/>
+            </a:pPr>
+            <a:r>
+              <a:rPr lang="en-US" sz="900" dirty="0">
+                <a:solidFill>
+                  <a:srgbClr val="8792AC"/>
+                </a:solidFill>
+                <a:latin typeface="Calibri" pitchFamily="34" charset="0"/>
+                <a:ea typeface="Calibri" pitchFamily="34" charset="-122"/>
+                <a:cs typeface="Calibri" pitchFamily="34" charset="-120"/>
+              </a:rPr>
+              <a:t>Vishing Challenge  |  Deepfake Voice Detection for Anti-Vishing Systems</a:t>
+            </a:r>
+            <a:endParaRPr lang="en-US" sz="900" dirty="0"/>
+          </a:p>
+        </p:txBody>
+      </p:sp>
+      <p:sp>
+        <p:nvSpPr>
+          <p:cNvPr id="20" name="Text 14"/>
+          <p:cNvSpPr txBox="1"/>
+          <p:nvPr/>
+        </p:nvSpPr>
+        <p:spPr>
+          <a:xfrm>
+            <a:off x="11430000" y="6537960"/>
+            <a:ext cx="457200" cy="274320"/>
+          </a:xfrm>
+          <a:prstGeom prst="rect">
+            <a:avLst/>
+          </a:prstGeom>
+          <a:noFill/>
+          <a:ln/>
+        </p:spPr>
+        <p:txBody>
+          <a:bodyPr wrap="square" lIns="0" tIns="0" rIns="0" bIns="0" rtlCol="0" anchor="ctr"/>
+          <a:lstStyle/>
+          <a:p>
+            <a:pPr algn="r" indent="0" marL="0">
+              <a:buNone/>
+            </a:pPr>
+            <a:r>
+              <a:rPr sz="900">
+                <a:solidFill>
+                  <a:srgbClr val="8792AC"/>
+                </a:solidFill>
+                <a:latin typeface="Calibri"/>
+              </a:rPr>
+              <a:t>10</a:t>
+            </a:r>
+            <a:endParaRPr lang="en-US" sz="900" dirty="0"/>
+          </a:p>
+        </p:txBody>
+      </p:sp>
+    </p:spTree>
+  </p:cSld>
+  <p:clrMapOvr>
+    <a:masterClrMapping/>
+  </p:clrMapOvr>
+</p:sld>
+</file>
+
+<file path=ppt/slides/slide11.xml><?xml version="1.0" encoding="utf-8"?>
+<p:sld xmlns:a="http://schemas.openxmlformats.org/drawingml/2006/main" xmlns:r="http://schemas.openxmlformats.org/officeDocument/2006/relationships" xmlns:p="http://schemas.openxmlformats.org/presentationml/2006/main">
+  <p:cSld name="Slide 9">
+    <p:bg>
+      <p:bgPr>
+        <a:solidFill>
+          <a:srgbClr val="FFFFFF"/>
+        </a:solidFill>
+      </p:bgPr>
+    </p:bg>
+    <p:spTree>
+      <p:nvGrpSpPr>
+        <p:cNvPr id="1" name=""/>
+        <p:cNvGrpSpPr/>
+        <p:nvPr/>
+      </p:nvGrpSpPr>
+      <p:grpSpPr>
+        <a:xfrm>
+          <a:off x="0" y="0"/>
+          <a:ext cx="0" cy="0"/>
+          <a:chOff x="0" y="0"/>
+          <a:chExt cx="0" cy="0"/>
+        </a:xfrm>
+      </p:grpSpPr>
+      <p:sp>
+        <p:nvSpPr>
+          <p:cNvPr id="2" name="Text 0"/>
+          <p:cNvSpPr txBox="1"/>
+          <p:nvPr/>
+        </p:nvSpPr>
+        <p:spPr>
+          <a:xfrm>
+            <a:off x="548640" y="365760"/>
+            <a:ext cx="9144000" cy="274320"/>
+          </a:xfrm>
+          <a:prstGeom prst="rect">
+            <a:avLst/>
+          </a:prstGeom>
+          <a:noFill/>
+          <a:ln/>
+        </p:spPr>
+        <p:txBody>
+          <a:bodyPr wrap="square" lIns="0" tIns="0" rIns="0" bIns="0" rtlCol="0" anchor="ctr"/>
+          <a:lstStyle/>
+          <a:p>
+            <a:pPr indent="0" marL="0">
+              <a:buNone/>
+            </a:pPr>
+            <a:r>
+              <a:rPr lang="en-US" sz="1200" b="1" spc="200" kern="0" dirty="0">
+                <a:solidFill>
+                  <a:srgbClr val="E94F37"/>
+                </a:solidFill>
+                <a:latin typeface="Calibri" pitchFamily="34" charset="0"/>
+                <a:ea typeface="Calibri" pitchFamily="34" charset="-122"/>
+                <a:cs typeface="Calibri" pitchFamily="34" charset="-120"/>
+              </a:rPr>
+              <a:t>EXECUTION PLAN</a:t>
+            </a:r>
+            <a:endParaRPr lang="en-US" sz="1200" dirty="0"/>
+          </a:p>
+        </p:txBody>
+      </p:sp>
+      <p:sp>
+        <p:nvSpPr>
+          <p:cNvPr id="3" name="Text 1"/>
+          <p:cNvSpPr txBox="1"/>
+          <p:nvPr/>
+        </p:nvSpPr>
+        <p:spPr>
+          <a:xfrm>
+            <a:off x="548640" y="621792"/>
+            <a:ext cx="11155680" cy="685800"/>
+          </a:xfrm>
+          <a:prstGeom prst="rect">
+            <a:avLst/>
+          </a:prstGeom>
+          <a:noFill/>
+          <a:ln/>
+        </p:spPr>
+        <p:txBody>
+          <a:bodyPr wrap="square" lIns="0" tIns="0" rIns="0" bIns="0" rtlCol="0" anchor="ctr"/>
+          <a:lstStyle/>
+          <a:p>
+            <a:pPr indent="0" marL="0">
+              <a:buNone/>
+            </a:pPr>
+            <a:r>
+              <a:rPr sz="3000" b="1">
+                <a:solidFill>
+                  <a:srgbClr val="1B1F3B"/>
+                </a:solidFill>
+                <a:latin typeface="Cambria"/>
+              </a:rPr>
+              <a:t>From proposal to a working detector</a:t>
+            </a:r>
+            <a:endParaRPr lang="en-US" sz="3000" dirty="0"/>
+          </a:p>
+        </p:txBody>
+      </p:sp>
+      <p:sp>
+        <p:nvSpPr>
+          <p:cNvPr id="4" name="Shape 2"/>
+          <p:cNvSpPr/>
+          <p:nvPr/>
+        </p:nvSpPr>
+        <p:spPr>
+          <a:xfrm>
+            <a:off x="548640" y="2011680"/>
+            <a:ext cx="2560320" cy="3291840"/>
+          </a:xfrm>
+          <a:prstGeom prst="roundRect">
+            <a:avLst>
+              <a:gd name="adj" fmla="val 2857"/>
+            </a:avLst>
+          </a:prstGeom>
+          <a:solidFill>
+            <a:srgbClr val="1E2761"/>
+          </a:solidFill>
+          <a:ln/>
+        </p:spPr>
+        <p:txBody>
+          <a:bodyPr/>
+          <a:p/>
+        </p:txBody>
+      </p:sp>
+      <p:sp>
+        <p:nvSpPr>
+          <p:cNvPr id="5" name="Text 3"/>
+          <p:cNvSpPr txBox="1"/>
+          <p:nvPr/>
+        </p:nvSpPr>
+        <p:spPr>
+          <a:xfrm>
+            <a:off x="731520" y="2194560"/>
+            <a:ext cx="914400" cy="640080"/>
+          </a:xfrm>
+          <a:prstGeom prst="rect">
+            <a:avLst/>
+          </a:prstGeom>
+          <a:noFill/>
+          <a:ln/>
+        </p:spPr>
+        <p:txBody>
+          <a:bodyPr wrap="square" lIns="0" tIns="0" rIns="0" bIns="0" rtlCol="0" anchor="ctr"/>
+          <a:lstStyle/>
+          <a:p>
+            <a:pPr indent="0" marL="0">
+              <a:buNone/>
+            </a:pPr>
+            <a:r>
+              <a:rPr lang="en-US" sz="3400" b="1" dirty="0">
+                <a:solidFill>
+                  <a:srgbClr val="CADCFC"/>
+                </a:solidFill>
+                <a:latin typeface="Cambria" pitchFamily="34" charset="0"/>
+                <a:ea typeface="Cambria" pitchFamily="34" charset="-122"/>
+                <a:cs typeface="Cambria" pitchFamily="34" charset="-120"/>
+              </a:rPr>
+              <a:t>1</a:t>
+            </a:r>
+            <a:endParaRPr lang="en-US" sz="3400" dirty="0"/>
+          </a:p>
+        </p:txBody>
+      </p:sp>
+      <p:sp>
+        <p:nvSpPr>
+          <p:cNvPr id="6" name="Text 4"/>
+          <p:cNvSpPr txBox="1"/>
+          <p:nvPr/>
+        </p:nvSpPr>
+        <p:spPr>
+          <a:xfrm>
+            <a:off x="731520" y="2880360"/>
+            <a:ext cx="2194560" cy="274320"/>
+          </a:xfrm>
+          <a:prstGeom prst="rect">
+            <a:avLst/>
+          </a:prstGeom>
+          <a:noFill/>
+          <a:ln/>
+        </p:spPr>
+        <p:txBody>
+          <a:bodyPr wrap="square" lIns="0" tIns="0" rIns="0" bIns="0" rtlCol="0" anchor="ctr"/>
+          <a:lstStyle/>
+          <a:p>
+            <a:pPr indent="0" marL="0">
+              <a:buNone/>
+            </a:pPr>
+            <a:r>
+              <a:rPr sz="1000" b="1">
+                <a:solidFill>
+                  <a:srgbClr val="E94F37"/>
+                </a:solidFill>
+                <a:latin typeface="Calibri"/>
+              </a:rPr>
+              <a:t>2-DAY SPRINT</a:t>
+            </a:r>
+            <a:endParaRPr lang="en-US" sz="1000" dirty="0"/>
+          </a:p>
+        </p:txBody>
+      </p:sp>
+      <p:sp>
+        <p:nvSpPr>
+          <p:cNvPr id="7" name="Text 5"/>
+          <p:cNvSpPr txBox="1"/>
+          <p:nvPr/>
+        </p:nvSpPr>
+        <p:spPr>
+          <a:xfrm>
+            <a:off x="731520" y="3182112"/>
+            <a:ext cx="2194560" cy="502920"/>
+          </a:xfrm>
+          <a:prstGeom prst="rect">
+            <a:avLst/>
+          </a:prstGeom>
+          <a:noFill/>
+          <a:ln/>
+        </p:spPr>
+        <p:txBody>
+          <a:bodyPr wrap="square" lIns="0" tIns="0" rIns="0" bIns="0" rtlCol="0" anchor="ctr"/>
+          <a:lstStyle/>
+          <a:p>
+            <a:pPr indent="0" marL="0">
+              <a:buNone/>
+            </a:pPr>
+            <a:r>
+              <a:rPr sz="1400" b="1">
+                <a:solidFill>
+                  <a:srgbClr val="FFFFFF"/>
+                </a:solidFill>
+                <a:latin typeface="Calibri"/>
+              </a:rPr>
+              <a:t>Literature &amp; proposal</a:t>
+            </a:r>
+            <a:endParaRPr lang="en-US" sz="1400" dirty="0"/>
+          </a:p>
+        </p:txBody>
+      </p:sp>
+      <p:sp>
+        <p:nvSpPr>
+          <p:cNvPr id="8" name="Text 6"/>
+          <p:cNvSpPr txBox="1"/>
+          <p:nvPr/>
+        </p:nvSpPr>
+        <p:spPr>
+          <a:xfrm>
+            <a:off x="731520" y="3703320"/>
+            <a:ext cx="2194560" cy="1463040"/>
+          </a:xfrm>
+          <a:prstGeom prst="rect">
+            <a:avLst/>
+          </a:prstGeom>
+          <a:noFill/>
+          <a:ln/>
+        </p:spPr>
+        <p:txBody>
+          <a:bodyPr wrap="square" lIns="0" tIns="0" rIns="0" bIns="0" rtlCol="0" anchor="ctr"/>
+          <a:lstStyle/>
+          <a:p>
+            <a:pPr indent="0" marL="0">
+              <a:lnSpc>
+                <a:spcPct val="125000"/>
+              </a:lnSpc>
+              <a:buNone/>
+            </a:pPr>
+            <a:r>
+              <a:rPr sz="1100">
+                <a:solidFill>
+                  <a:srgbClr val="CADCFC"/>
+                </a:solidFill>
+                <a:latin typeface="Calibri"/>
+              </a:rPr>
+              <a:t>Survey the generalization failure, fix the evaluation protocol, and commit to an architecture. This deck.</a:t>
+            </a:r>
+            <a:endParaRPr lang="en-US" sz="1100" dirty="0"/>
+          </a:p>
+        </p:txBody>
+      </p:sp>
+      <p:sp>
+        <p:nvSpPr>
+          <p:cNvPr id="9" name="Shape 7"/>
+          <p:cNvSpPr/>
+          <p:nvPr/>
+        </p:nvSpPr>
+        <p:spPr>
+          <a:xfrm>
+            <a:off x="3337560" y="2011680"/>
+            <a:ext cx="2560320" cy="3291840"/>
+          </a:xfrm>
+          <a:prstGeom prst="roundRect">
+            <a:avLst>
+              <a:gd name="adj" fmla="val 2857"/>
+            </a:avLst>
+          </a:prstGeom>
+          <a:solidFill>
+            <a:srgbClr val="F4F6FC"/>
+          </a:solidFill>
+          <a:ln/>
+        </p:spPr>
+        <p:txBody>
+          <a:bodyPr/>
+          <a:p/>
+        </p:txBody>
+      </p:sp>
+      <p:sp>
+        <p:nvSpPr>
+          <p:cNvPr id="10" name="Text 8"/>
+          <p:cNvSpPr txBox="1"/>
+          <p:nvPr/>
+        </p:nvSpPr>
+        <p:spPr>
+          <a:xfrm>
+            <a:off x="3520440" y="2194560"/>
+            <a:ext cx="914400" cy="640080"/>
+          </a:xfrm>
+          <a:prstGeom prst="rect">
+            <a:avLst/>
+          </a:prstGeom>
+          <a:noFill/>
+          <a:ln/>
+        </p:spPr>
+        <p:txBody>
+          <a:bodyPr wrap="square" lIns="0" tIns="0" rIns="0" bIns="0" rtlCol="0" anchor="ctr"/>
+          <a:lstStyle/>
+          <a:p>
+            <a:pPr indent="0" marL="0">
+              <a:buNone/>
+            </a:pPr>
+            <a:r>
+              <a:rPr lang="en-US" sz="3400" b="1" dirty="0">
+                <a:solidFill>
+                  <a:srgbClr val="1E2761"/>
+                </a:solidFill>
+                <a:latin typeface="Cambria" pitchFamily="34" charset="0"/>
+                <a:ea typeface="Cambria" pitchFamily="34" charset="-122"/>
+                <a:cs typeface="Cambria" pitchFamily="34" charset="-120"/>
+              </a:rPr>
+              <a:t>2</a:t>
+            </a:r>
+            <a:endParaRPr lang="en-US" sz="3400" dirty="0"/>
+          </a:p>
+        </p:txBody>
+      </p:sp>
+      <p:sp>
+        <p:nvSpPr>
+          <p:cNvPr id="11" name="Text 9"/>
+          <p:cNvSpPr txBox="1"/>
+          <p:nvPr/>
+        </p:nvSpPr>
+        <p:spPr>
+          <a:xfrm>
+            <a:off x="3520440" y="2880360"/>
+            <a:ext cx="2194560" cy="274320"/>
+          </a:xfrm>
+          <a:prstGeom prst="rect">
+            <a:avLst/>
+          </a:prstGeom>
+          <a:noFill/>
+          <a:ln/>
+        </p:spPr>
+        <p:txBody>
+          <a:bodyPr wrap="square" lIns="0" tIns="0" rIns="0" bIns="0" rtlCol="0" anchor="ctr"/>
+          <a:lstStyle/>
+          <a:p>
+            <a:pPr indent="0" marL="0">
+              <a:buNone/>
+            </a:pPr>
+            <a:r>
+              <a:rPr sz="1000" b="1">
+                <a:solidFill>
+                  <a:srgbClr val="E94F37"/>
+                </a:solidFill>
+                <a:latin typeface="Calibri"/>
+              </a:rPr>
+              <a:t>WEEKS 2-4</a:t>
+            </a:r>
+            <a:endParaRPr lang="en-US" sz="1000" dirty="0"/>
+          </a:p>
+        </p:txBody>
+      </p:sp>
+      <p:sp>
+        <p:nvSpPr>
+          <p:cNvPr id="12" name="Text 10"/>
+          <p:cNvSpPr txBox="1"/>
+          <p:nvPr/>
+        </p:nvSpPr>
+        <p:spPr>
+          <a:xfrm>
+            <a:off x="3520440" y="3182112"/>
+            <a:ext cx="2194560" cy="502920"/>
+          </a:xfrm>
+          <a:prstGeom prst="rect">
+            <a:avLst/>
+          </a:prstGeom>
+          <a:noFill/>
+          <a:ln/>
+        </p:spPr>
+        <p:txBody>
+          <a:bodyPr wrap="square" lIns="0" tIns="0" rIns="0" bIns="0" rtlCol="0" anchor="ctr"/>
+          <a:lstStyle/>
+          <a:p>
+            <a:pPr indent="0" marL="0">
+              <a:buNone/>
+            </a:pPr>
+            <a:r>
+              <a:rPr sz="1400" b="1">
+                <a:solidFill>
+                  <a:srgbClr val="1B1F3B"/>
+                </a:solidFill>
+                <a:latin typeface="Calibri"/>
+              </a:rPr>
+              <a:t>Baseline</a:t>
+            </a:r>
+            <a:endParaRPr lang="en-US" sz="1400" dirty="0"/>
+          </a:p>
+        </p:txBody>
+      </p:sp>
+      <p:sp>
+        <p:nvSpPr>
+          <p:cNvPr id="13" name="Text 11"/>
+          <p:cNvSpPr txBox="1"/>
+          <p:nvPr/>
+        </p:nvSpPr>
+        <p:spPr>
+          <a:xfrm>
+            <a:off x="3520440" y="3703320"/>
+            <a:ext cx="2194560" cy="1463040"/>
+          </a:xfrm>
+          <a:prstGeom prst="rect">
+            <a:avLst/>
+          </a:prstGeom>
+          <a:noFill/>
+          <a:ln/>
+        </p:spPr>
+        <p:txBody>
+          <a:bodyPr wrap="square" lIns="0" tIns="0" rIns="0" bIns="0" rtlCol="0" anchor="ctr"/>
+          <a:lstStyle/>
+          <a:p>
+            <a:pPr indent="0" marL="0">
+              <a:lnSpc>
+                <a:spcPct val="125000"/>
+              </a:lnSpc>
+              <a:buNone/>
+            </a:pPr>
+            <a:r>
+              <a:rPr sz="1100">
+                <a:solidFill>
+                  <a:srgbClr val="44506B"/>
+                </a:solidFill>
+                <a:latin typeface="Calibri"/>
+              </a:rPr>
+              <a:t>Reproduce published clean-condition EER and validate against the official challenge baseline scores.</a:t>
+            </a:r>
+            <a:endParaRPr lang="en-US" sz="1100" dirty="0"/>
+          </a:p>
+        </p:txBody>
+      </p:sp>
+      <p:sp>
+        <p:nvSpPr>
+          <p:cNvPr id="14" name="Shape 12"/>
+          <p:cNvSpPr/>
+          <p:nvPr/>
+        </p:nvSpPr>
+        <p:spPr>
+          <a:xfrm>
+            <a:off x="6126480" y="2011680"/>
+            <a:ext cx="2560320" cy="3291840"/>
+          </a:xfrm>
+          <a:prstGeom prst="roundRect">
+            <a:avLst>
+              <a:gd name="adj" fmla="val 2857"/>
+            </a:avLst>
+          </a:prstGeom>
+          <a:solidFill>
+            <a:srgbClr val="1E2761"/>
+          </a:solidFill>
+          <a:ln/>
+        </p:spPr>
+        <p:txBody>
+          <a:bodyPr/>
+          <a:p/>
+        </p:txBody>
+      </p:sp>
+      <p:sp>
+        <p:nvSpPr>
+          <p:cNvPr id="15" name="Text 13"/>
+          <p:cNvSpPr txBox="1"/>
+          <p:nvPr/>
+        </p:nvSpPr>
+        <p:spPr>
+          <a:xfrm>
+            <a:off x="6309360" y="2194560"/>
+            <a:ext cx="914400" cy="640080"/>
+          </a:xfrm>
+          <a:prstGeom prst="rect">
+            <a:avLst/>
+          </a:prstGeom>
+          <a:noFill/>
+          <a:ln/>
+        </p:spPr>
+        <p:txBody>
+          <a:bodyPr wrap="square" lIns="0" tIns="0" rIns="0" bIns="0" rtlCol="0" anchor="ctr"/>
+          <a:lstStyle/>
+          <a:p>
+            <a:pPr indent="0" marL="0">
+              <a:buNone/>
+            </a:pPr>
+            <a:r>
+              <a:rPr lang="en-US" sz="3400" b="1" dirty="0">
+                <a:solidFill>
+                  <a:srgbClr val="CADCFC"/>
+                </a:solidFill>
+                <a:latin typeface="Cambria" pitchFamily="34" charset="0"/>
+                <a:ea typeface="Cambria" pitchFamily="34" charset="-122"/>
+                <a:cs typeface="Cambria" pitchFamily="34" charset="-120"/>
+              </a:rPr>
+              <a:t>3</a:t>
+            </a:r>
+            <a:endParaRPr lang="en-US" sz="3400" dirty="0"/>
+          </a:p>
+        </p:txBody>
+      </p:sp>
+      <p:sp>
+        <p:nvSpPr>
+          <p:cNvPr id="16" name="Text 14"/>
+          <p:cNvSpPr txBox="1"/>
+          <p:nvPr/>
+        </p:nvSpPr>
+        <p:spPr>
+          <a:xfrm>
+            <a:off x="6309360" y="2880360"/>
+            <a:ext cx="2194560" cy="274320"/>
+          </a:xfrm>
+          <a:prstGeom prst="rect">
+            <a:avLst/>
+          </a:prstGeom>
+          <a:noFill/>
+          <a:ln/>
+        </p:spPr>
+        <p:txBody>
+          <a:bodyPr wrap="square" lIns="0" tIns="0" rIns="0" bIns="0" rtlCol="0" anchor="ctr"/>
+          <a:lstStyle/>
+          <a:p>
+            <a:pPr indent="0" marL="0">
+              <a:buNone/>
+            </a:pPr>
+            <a:r>
+              <a:rPr sz="1000" b="1">
+                <a:solidFill>
+                  <a:srgbClr val="E94F37"/>
+                </a:solidFill>
+                <a:latin typeface="Calibri"/>
+              </a:rPr>
+              <a:t>WEEKS 5-9</a:t>
+            </a:r>
+            <a:endParaRPr lang="en-US" sz="1000" dirty="0"/>
+          </a:p>
+        </p:txBody>
+      </p:sp>
+      <p:sp>
+        <p:nvSpPr>
+          <p:cNvPr id="17" name="Text 15"/>
+          <p:cNvSpPr txBox="1"/>
+          <p:nvPr/>
+        </p:nvSpPr>
+        <p:spPr>
+          <a:xfrm>
+            <a:off x="6309360" y="3182112"/>
+            <a:ext cx="2194560" cy="502920"/>
+          </a:xfrm>
+          <a:prstGeom prst="rect">
+            <a:avLst/>
+          </a:prstGeom>
+          <a:noFill/>
+          <a:ln/>
+        </p:spPr>
+        <p:txBody>
+          <a:bodyPr wrap="square" lIns="0" tIns="0" rIns="0" bIns="0" rtlCol="0" anchor="ctr"/>
+          <a:lstStyle/>
+          <a:p>
+            <a:pPr indent="0" marL="0">
+              <a:buNone/>
+            </a:pPr>
+            <a:r>
+              <a:rPr sz="1400" b="1">
+                <a:solidFill>
+                  <a:srgbClr val="FFFFFF"/>
+                </a:solidFill>
+                <a:latin typeface="Calibri"/>
+              </a:rPr>
+              <a:t>Generalization</a:t>
+            </a:r>
+            <a:endParaRPr lang="en-US" sz="1400" dirty="0"/>
+          </a:p>
+        </p:txBody>
+      </p:sp>
+      <p:sp>
+        <p:nvSpPr>
+          <p:cNvPr id="18" name="Text 16"/>
+          <p:cNvSpPr txBox="1"/>
+          <p:nvPr/>
+        </p:nvSpPr>
+        <p:spPr>
+          <a:xfrm>
+            <a:off x="6309360" y="3703320"/>
+            <a:ext cx="2194560" cy="1463040"/>
+          </a:xfrm>
+          <a:prstGeom prst="rect">
+            <a:avLst/>
+          </a:prstGeom>
+          <a:noFill/>
+          <a:ln/>
+        </p:spPr>
+        <p:txBody>
+          <a:bodyPr wrap="square" lIns="0" tIns="0" rIns="0" bIns="0" rtlCol="0" anchor="ctr"/>
+          <a:lstStyle/>
+          <a:p>
+            <a:pPr indent="0" marL="0">
+              <a:lnSpc>
+                <a:spcPct val="125000"/>
+              </a:lnSpc>
+              <a:buNone/>
+            </a:pPr>
+            <a:r>
+              <a:rPr sz="1100">
+                <a:solidFill>
+                  <a:srgbClr val="CADCFC"/>
+                </a:solidFill>
+                <a:latin typeface="Calibri"/>
+              </a:rPr>
+              <a:t>Degraded-channel and silence augmentation, foundation-model front-end, leave-one-generator-out. The core work.</a:t>
+            </a:r>
+            <a:endParaRPr lang="en-US" sz="1100" dirty="0"/>
+          </a:p>
+        </p:txBody>
+      </p:sp>
+      <p:sp>
+        <p:nvSpPr>
+          <p:cNvPr id="19" name="Shape 17"/>
+          <p:cNvSpPr/>
+          <p:nvPr/>
+        </p:nvSpPr>
+        <p:spPr>
+          <a:xfrm>
+            <a:off x="8915400" y="2011680"/>
+            <a:ext cx="2560320" cy="3291840"/>
+          </a:xfrm>
+          <a:prstGeom prst="roundRect">
+            <a:avLst>
+              <a:gd name="adj" fmla="val 2857"/>
+            </a:avLst>
+          </a:prstGeom>
+          <a:solidFill>
+            <a:srgbClr val="F4F6FC"/>
+          </a:solidFill>
+          <a:ln/>
+        </p:spPr>
+        <p:txBody>
+          <a:bodyPr/>
+          <a:p/>
+        </p:txBody>
+      </p:sp>
+      <p:sp>
+        <p:nvSpPr>
+          <p:cNvPr id="20" name="Text 18"/>
+          <p:cNvSpPr txBox="1"/>
+          <p:nvPr/>
+        </p:nvSpPr>
+        <p:spPr>
+          <a:xfrm>
+            <a:off x="9098280" y="2194560"/>
+            <a:ext cx="914400" cy="640080"/>
+          </a:xfrm>
+          <a:prstGeom prst="rect">
+            <a:avLst/>
+          </a:prstGeom>
+          <a:noFill/>
+          <a:ln/>
+        </p:spPr>
+        <p:txBody>
+          <a:bodyPr wrap="square" lIns="0" tIns="0" rIns="0" bIns="0" rtlCol="0" anchor="ctr"/>
+          <a:lstStyle/>
+          <a:p>
+            <a:pPr indent="0" marL="0">
+              <a:buNone/>
+            </a:pPr>
+            <a:r>
+              <a:rPr lang="en-US" sz="3400" b="1" dirty="0">
+                <a:solidFill>
+                  <a:srgbClr val="1E2761"/>
+                </a:solidFill>
+                <a:latin typeface="Cambria" pitchFamily="34" charset="0"/>
+                <a:ea typeface="Cambria" pitchFamily="34" charset="-122"/>
+                <a:cs typeface="Cambria" pitchFamily="34" charset="-120"/>
+              </a:rPr>
+              <a:t>4</a:t>
+            </a:r>
+            <a:endParaRPr lang="en-US" sz="3400" dirty="0"/>
+          </a:p>
+        </p:txBody>
+      </p:sp>
+      <p:sp>
+        <p:nvSpPr>
+          <p:cNvPr id="21" name="Text 19"/>
+          <p:cNvSpPr txBox="1"/>
+          <p:nvPr/>
+        </p:nvSpPr>
+        <p:spPr>
+          <a:xfrm>
+            <a:off x="9098280" y="2880360"/>
+            <a:ext cx="2194560" cy="274320"/>
+          </a:xfrm>
+          <a:prstGeom prst="rect">
+            <a:avLst/>
+          </a:prstGeom>
+          <a:noFill/>
+          <a:ln/>
+        </p:spPr>
+        <p:txBody>
+          <a:bodyPr wrap="square" lIns="0" tIns="0" rIns="0" bIns="0" rtlCol="0" anchor="ctr"/>
+          <a:lstStyle/>
+          <a:p>
+            <a:pPr indent="0" marL="0">
+              <a:buNone/>
+            </a:pPr>
+            <a:r>
+              <a:rPr sz="1000" b="1">
+                <a:solidFill>
+                  <a:srgbClr val="E94F37"/>
+                </a:solidFill>
+                <a:latin typeface="Calibri"/>
+              </a:rPr>
+              <a:t>WEEKS 10-12</a:t>
+            </a:r>
+            <a:endParaRPr lang="en-US" sz="1000" dirty="0"/>
+          </a:p>
+        </p:txBody>
+      </p:sp>
+      <p:sp>
+        <p:nvSpPr>
+          <p:cNvPr id="22" name="Text 20"/>
+          <p:cNvSpPr txBox="1"/>
+          <p:nvPr/>
+        </p:nvSpPr>
+        <p:spPr>
+          <a:xfrm>
+            <a:off x="9098280" y="3182112"/>
+            <a:ext cx="2194560" cy="502920"/>
+          </a:xfrm>
+          <a:prstGeom prst="rect">
+            <a:avLst/>
+          </a:prstGeom>
+          <a:noFill/>
+          <a:ln/>
+        </p:spPr>
+        <p:txBody>
+          <a:bodyPr wrap="square" lIns="0" tIns="0" rIns="0" bIns="0" rtlCol="0" anchor="ctr"/>
+          <a:lstStyle/>
+          <a:p>
+            <a:pPr indent="0" marL="0">
+              <a:buNone/>
+            </a:pPr>
+            <a:r>
+              <a:rPr sz="1400" b="1">
+                <a:solidFill>
+                  <a:srgbClr val="1B1F3B"/>
+                </a:solidFill>
+                <a:latin typeface="Calibri"/>
+              </a:rPr>
+              <a:t>Real-time &amp; write-up</a:t>
+            </a:r>
+            <a:endParaRPr lang="en-US" sz="1400" dirty="0"/>
+          </a:p>
+        </p:txBody>
+      </p:sp>
+      <p:sp>
+        <p:nvSpPr>
+          <p:cNvPr id="23" name="Text 21"/>
+          <p:cNvSpPr txBox="1"/>
+          <p:nvPr/>
+        </p:nvSpPr>
+        <p:spPr>
+          <a:xfrm>
+            <a:off x="9098280" y="3703320"/>
+            <a:ext cx="2194560" cy="1463040"/>
+          </a:xfrm>
+          <a:prstGeom prst="rect">
+            <a:avLst/>
+          </a:prstGeom>
+          <a:noFill/>
+          <a:ln/>
+        </p:spPr>
+        <p:txBody>
+          <a:bodyPr wrap="square" lIns="0" tIns="0" rIns="0" bIns="0" rtlCol="0" anchor="ctr"/>
+          <a:lstStyle/>
+          <a:p>
+            <a:pPr indent="0" marL="0">
+              <a:lnSpc>
+                <a:spcPct val="125000"/>
+              </a:lnSpc>
+              <a:buNone/>
+            </a:pPr>
+            <a:r>
+              <a:rPr sz="1100">
+                <a:solidFill>
+                  <a:srgbClr val="44506B"/>
+                </a:solidFill>
+                <a:latin typeface="Calibri"/>
+              </a:rPr>
+              <a:t>Streaming inference, compression, latency on device, then the report and defence.</a:t>
+            </a:r>
+            <a:endParaRPr lang="en-US" sz="1100" dirty="0"/>
+          </a:p>
+        </p:txBody>
+      </p:sp>
+      <p:sp>
+        <p:nvSpPr>
+          <p:cNvPr id="24" name="Text 22"/>
+          <p:cNvSpPr txBox="1"/>
+          <p:nvPr/>
+        </p:nvSpPr>
+        <p:spPr>
+          <a:xfrm>
+            <a:off x="457200" y="6537960"/>
+            <a:ext cx="8229600" cy="274320"/>
+          </a:xfrm>
+          <a:prstGeom prst="rect">
+            <a:avLst/>
+          </a:prstGeom>
+          <a:noFill/>
+          <a:ln/>
+        </p:spPr>
+        <p:txBody>
+          <a:bodyPr wrap="square" lIns="0" tIns="0" rIns="0" bIns="0" rtlCol="0" anchor="ctr"/>
+          <a:lstStyle/>
+          <a:p>
+            <a:pPr indent="0" marL="0">
+              <a:buNone/>
+            </a:pPr>
+            <a:r>
+              <a:rPr lang="en-US" sz="900" dirty="0">
+                <a:solidFill>
+                  <a:srgbClr val="8792AC"/>
+                </a:solidFill>
+                <a:latin typeface="Calibri" pitchFamily="34" charset="0"/>
+                <a:ea typeface="Calibri" pitchFamily="34" charset="-122"/>
+                <a:cs typeface="Calibri" pitchFamily="34" charset="-120"/>
+              </a:rPr>
+              <a:t>Vishing Challenge  |  Deepfake Voice Detection for Anti-Vishing Systems</a:t>
+            </a:r>
+            <a:endParaRPr lang="en-US" sz="900" dirty="0"/>
+          </a:p>
+        </p:txBody>
+      </p:sp>
+      <p:sp>
+        <p:nvSpPr>
+          <p:cNvPr id="25" name="Text 23"/>
+          <p:cNvSpPr txBox="1"/>
+          <p:nvPr/>
+        </p:nvSpPr>
+        <p:spPr>
+          <a:xfrm>
+            <a:off x="11430000" y="6537960"/>
+            <a:ext cx="457200" cy="274320"/>
+          </a:xfrm>
+          <a:prstGeom prst="rect">
+            <a:avLst/>
+          </a:prstGeom>
+          <a:noFill/>
+          <a:ln/>
+        </p:spPr>
+        <p:txBody>
+          <a:bodyPr wrap="square" lIns="0" tIns="0" rIns="0" bIns="0" rtlCol="0" anchor="ctr"/>
+          <a:lstStyle/>
+          <a:p>
+            <a:pPr algn="r" indent="0" marL="0">
+              <a:buNone/>
+            </a:pPr>
+            <a:r>
+              <a:rPr sz="900">
+                <a:solidFill>
+                  <a:srgbClr val="8792AC"/>
+                </a:solidFill>
+                <a:latin typeface="Calibri"/>
+              </a:rPr>
+              <a:t>11</a:t>
+            </a:r>
+            <a:endParaRPr lang="en-US" sz="900" dirty="0"/>
+          </a:p>
+        </p:txBody>
+      </p:sp>
+    </p:spTree>
+  </p:cSld>
+  <p:clrMapOvr>
+    <a:masterClrMapping/>
+  </p:clrMapOvr>
+</p:sld>
+</file>
+
+<file path=ppt/slides/slide12.xml><?xml version="1.0" encoding="utf-8"?>
 <p:sld xmlns:a="http://schemas.openxmlformats.org/drawingml/2006/main" xmlns:r="http://schemas.openxmlformats.org/officeDocument/2006/relationships" xmlns:p="http://schemas.openxmlformats.org/presentationml/2006/main">
   <p:cSld name="Slide 10">
     <p:bg>
@@ -2732,6 +4283,10 @@
           </a:solidFill>
           <a:ln/>
         </p:spPr>
+        <p:txBody>
+          <a:bodyPr/>
+          <a:p/>
+        </p:txBody>
       </p:sp>
       <p:pic>
         <p:nvPicPr>
@@ -2946,6 +4501,10 @@
           </a:solidFill>
           <a:ln/>
         </p:spPr>
+        <p:txBody>
+          <a:bodyPr/>
+          <a:p/>
+        </p:txBody>
       </p:sp>
       <p:pic>
         <p:nvPicPr>
@@ -3223,7 +4782,7 @@
 </p:sld>
 </file>
 
-<file path=ppt/slides/slide11.xml><?xml version="1.0" encoding="utf-8"?>
+<file path=ppt/slides/slide13.xml><?xml version="1.0" encoding="utf-8"?>
 <p:sld xmlns:a="http://schemas.openxmlformats.org/drawingml/2006/main" xmlns:r="http://schemas.openxmlformats.org/officeDocument/2006/relationships" xmlns:p="http://schemas.openxmlformats.org/presentationml/2006/main">
   <p:cSld name="Slide 11">
     <p:bg>
@@ -3399,6 +4958,10 @@
             <a:prstDash val="solid"/>
           </a:ln>
         </p:spPr>
+        <p:txBody>
+          <a:bodyPr/>
+          <a:p/>
+        </p:txBody>
       </p:sp>
       <p:sp>
         <p:nvSpPr>
@@ -3436,2005 +4999,6 @@
               <a:t>Thank you.</a:t>
             </a:r>
             <a:endParaRPr lang="en-US" sz="1400" dirty="0"/>
-          </a:p>
-        </p:txBody>
-      </p:sp>
-    </p:spTree>
-  </p:cSld>
-  <p:clrMapOvr>
-    <a:masterClrMapping/>
-  </p:clrMapOvr>
-</p:sld>
-</file>
-
-<file path=ppt/slides/slide12.xml><?xml version="1.0" encoding="utf-8"?>
-<p:sld xmlns:a="http://schemas.openxmlformats.org/drawingml/2006/main" xmlns:p="http://schemas.openxmlformats.org/presentationml/2006/main" xmlns:r="http://schemas.openxmlformats.org/officeDocument/2006/relationships">
-  <p:cSld>
-    <p:spTree>
-      <p:nvGrpSpPr>
-        <p:cNvPr id="1" name=""/>
-        <p:cNvGrpSpPr/>
-        <p:nvPr/>
-      </p:nvGrpSpPr>
-      <p:grpSpPr/>
-      <p:sp>
-        <p:nvSpPr>
-          <p:cNvPr id="2" name="TextBox 1"/>
-          <p:cNvSpPr txBox="1"/>
-          <p:nvPr/>
-        </p:nvSpPr>
-        <p:spPr>
-          <a:xfrm>
-            <a:off x="548640" y="365760"/>
-            <a:ext cx="9144000" cy="274320"/>
-          </a:xfrm>
-          <a:prstGeom prst="rect">
-            <a:avLst/>
-          </a:prstGeom>
-          <a:noFill/>
-        </p:spPr>
-        <p:txBody>
-          <a:bodyPr wrap="square" lIns="0" rIns="0" tIns="0" bIns="0" anchor="t">
-            <a:spAutoFit/>
-          </a:bodyPr>
-          <a:lstStyle/>
-          <a:p>
-            <a:pPr algn="l">
-              <a:lnSpc>
-                <a:spcPct val="120000"/>
-              </a:lnSpc>
-              <a:spcAft>
-                <a:spcPts val="0"/>
-              </a:spcAft>
-            </a:pPr>
-            <a:r>
-              <a:rPr sz="1200" b="1">
-                <a:solidFill>
-                  <a:srgbClr val="E94F37"/>
-                </a:solidFill>
-                <a:latin typeface="Calibri"/>
-              </a:rPr>
-              <a:t>THE EVIDENCE</a:t>
-            </a:r>
-          </a:p>
-        </p:txBody>
-      </p:sp>
-      <p:sp>
-        <p:nvSpPr>
-          <p:cNvPr id="3" name="TextBox 2"/>
-          <p:cNvSpPr txBox="1"/>
-          <p:nvPr/>
-        </p:nvSpPr>
-        <p:spPr>
-          <a:xfrm>
-            <a:off x="548640" y="621792"/>
-            <a:ext cx="11155680" cy="777240"/>
-          </a:xfrm>
-          <a:prstGeom prst="rect">
-            <a:avLst/>
-          </a:prstGeom>
-          <a:noFill/>
-        </p:spPr>
-        <p:txBody>
-          <a:bodyPr wrap="square" lIns="0" rIns="0" tIns="0" bIns="0" anchor="t">
-            <a:spAutoFit/>
-          </a:bodyPr>
-          <a:lstStyle/>
-          <a:p>
-            <a:pPr algn="l">
-              <a:lnSpc>
-                <a:spcPct val="110000"/>
-              </a:lnSpc>
-              <a:spcAft>
-                <a:spcPts val="0"/>
-              </a:spcAft>
-            </a:pPr>
-            <a:r>
-              <a:rPr sz="3000" b="1">
-                <a:solidFill>
-                  <a:srgbClr val="1B1F3B"/>
-                </a:solidFill>
-                <a:latin typeface="Cambria"/>
-              </a:rPr>
-              <a:t>How far it falls</a:t>
-            </a:r>
-          </a:p>
-        </p:txBody>
-      </p:sp>
-      <p:sp>
-        <p:nvSpPr>
-          <p:cNvPr id="4" name="TextBox 3"/>
-          <p:cNvSpPr txBox="1"/>
-          <p:nvPr/>
-        </p:nvSpPr>
-        <p:spPr>
-          <a:xfrm>
-            <a:off x="457200" y="6537960"/>
-            <a:ext cx="8229600" cy="274320"/>
-          </a:xfrm>
-          <a:prstGeom prst="rect">
-            <a:avLst/>
-          </a:prstGeom>
-          <a:noFill/>
-        </p:spPr>
-        <p:txBody>
-          <a:bodyPr wrap="square" lIns="0" rIns="0" tIns="0" bIns="0" anchor="t">
-            <a:spAutoFit/>
-          </a:bodyPr>
-          <a:lstStyle/>
-          <a:p>
-            <a:pPr algn="l">
-              <a:lnSpc>
-                <a:spcPct val="120000"/>
-              </a:lnSpc>
-              <a:spcAft>
-                <a:spcPts val="0"/>
-              </a:spcAft>
-            </a:pPr>
-            <a:r>
-              <a:rPr sz="900" b="0">
-                <a:solidFill>
-                  <a:srgbClr val="8792AC"/>
-                </a:solidFill>
-                <a:latin typeface="Calibri"/>
-              </a:rPr>
-              <a:t>Vishing Challenge  |  Deepfake Voice Detection for Anti-Vishing Systems</a:t>
-            </a:r>
-          </a:p>
-        </p:txBody>
-      </p:sp>
-      <p:sp>
-        <p:nvSpPr>
-          <p:cNvPr id="5" name="Rectangle 4"/>
-          <p:cNvSpPr/>
-          <p:nvPr/>
-        </p:nvSpPr>
-        <p:spPr>
-          <a:xfrm>
-            <a:off x="9845040" y="1810512"/>
-            <a:ext cx="1173480" cy="1810512"/>
-          </a:xfrm>
-          <a:prstGeom prst="rect">
-            <a:avLst/>
-          </a:prstGeom>
-          <a:solidFill>
-            <a:srgbClr val="FFF3F1"/>
-          </a:solidFill>
-          <a:ln>
-            <a:noFill/>
-          </a:ln>
-          <a:effectLst/>
-        </p:spPr>
-        <p:style>
-          <a:lnRef idx="1">
-            <a:schemeClr val="accent1"/>
-          </a:lnRef>
-          <a:fillRef idx="3">
-            <a:schemeClr val="accent1"/>
-          </a:fillRef>
-          <a:effectRef idx="2">
-            <a:schemeClr val="accent1"/>
-          </a:effectRef>
-          <a:fontRef idx="minor">
-            <a:schemeClr val="lt1"/>
-          </a:fontRef>
-        </p:style>
-        <p:txBody>
-          <a:bodyPr rtlCol="0" anchor="ctr"/>
-          <a:lstStyle/>
-          <a:p/>
-        </p:txBody>
-      </p:sp>
-      <p:sp>
-        <p:nvSpPr>
-          <p:cNvPr id="6" name="TextBox 5"/>
-          <p:cNvSpPr txBox="1"/>
-          <p:nvPr/>
-        </p:nvSpPr>
-        <p:spPr>
-          <a:xfrm>
-            <a:off x="9845040" y="1572768"/>
-            <a:ext cx="1173480" cy="219456"/>
-          </a:xfrm>
-          <a:prstGeom prst="rect">
-            <a:avLst/>
-          </a:prstGeom>
-          <a:noFill/>
-        </p:spPr>
-        <p:txBody>
-          <a:bodyPr wrap="square" lIns="0" rIns="0" tIns="0" bIns="0" anchor="t">
-            <a:spAutoFit/>
-          </a:bodyPr>
-          <a:lstStyle/>
-          <a:p>
-            <a:pPr algn="ctr">
-              <a:lnSpc>
-                <a:spcPct val="120000"/>
-              </a:lnSpc>
-              <a:spcAft>
-                <a:spcPts val="0"/>
-              </a:spcAft>
-            </a:pPr>
-            <a:r>
-              <a:rPr sz="900" b="1">
-                <a:solidFill>
-                  <a:srgbClr val="E94F37"/>
-                </a:solidFill>
-                <a:latin typeface="Calibri"/>
-              </a:rPr>
-              <a:t>COIN FLIP</a:t>
-            </a:r>
-          </a:p>
-        </p:txBody>
-      </p:sp>
-      <p:sp>
-        <p:nvSpPr>
-          <p:cNvPr id="7" name="TextBox 6"/>
-          <p:cNvSpPr txBox="1"/>
-          <p:nvPr/>
-        </p:nvSpPr>
-        <p:spPr>
-          <a:xfrm>
-            <a:off x="548640" y="1572768"/>
-            <a:ext cx="3291840" cy="219456"/>
-          </a:xfrm>
-          <a:prstGeom prst="rect">
-            <a:avLst/>
-          </a:prstGeom>
-          <a:noFill/>
-        </p:spPr>
-        <p:txBody>
-          <a:bodyPr wrap="square" lIns="0" rIns="0" tIns="0" bIns="0" anchor="t">
-            <a:spAutoFit/>
-          </a:bodyPr>
-          <a:lstStyle/>
-          <a:p>
-            <a:pPr algn="l">
-              <a:lnSpc>
-                <a:spcPct val="120000"/>
-              </a:lnSpc>
-              <a:spcAft>
-                <a:spcPts val="0"/>
-              </a:spcAft>
-            </a:pPr>
-            <a:r>
-              <a:rPr sz="900" b="1">
-                <a:solidFill>
-                  <a:srgbClr val="8792AC"/>
-                </a:solidFill>
-                <a:latin typeface="Calibri"/>
-              </a:rPr>
-              <a:t>TRAINED ON ASVSPOOF 2019, TESTED ON:</a:t>
-            </a:r>
-          </a:p>
-        </p:txBody>
-      </p:sp>
-      <p:sp>
-        <p:nvSpPr>
-          <p:cNvPr id="8" name="TextBox 7"/>
-          <p:cNvSpPr txBox="1"/>
-          <p:nvPr/>
-        </p:nvSpPr>
-        <p:spPr>
-          <a:xfrm>
-            <a:off x="548640" y="1883664"/>
-            <a:ext cx="3200400" cy="502920"/>
-          </a:xfrm>
-          <a:prstGeom prst="rect">
-            <a:avLst/>
-          </a:prstGeom>
-          <a:noFill/>
-        </p:spPr>
-        <p:txBody>
-          <a:bodyPr wrap="square" lIns="0" rIns="0" tIns="0" bIns="0" anchor="t">
-            <a:spAutoFit/>
-          </a:bodyPr>
-          <a:lstStyle/>
-          <a:p>
-            <a:pPr algn="l">
-              <a:lnSpc>
-                <a:spcPct val="120000"/>
-              </a:lnSpc>
-              <a:spcAft>
-                <a:spcPts val="100"/>
-              </a:spcAft>
-            </a:pPr>
-            <a:r>
-              <a:rPr sz="1400" b="1">
-                <a:solidFill>
-                  <a:srgbClr val="1B1F3B"/>
-                </a:solidFill>
-                <a:latin typeface="Calibri"/>
-              </a:rPr>
-              <a:t>its own test set</a:t>
-            </a:r>
-          </a:p>
-        </p:txBody>
-      </p:sp>
-      <p:sp>
-        <p:nvSpPr>
-          <p:cNvPr id="9" name="Rectangle 8"/>
-          <p:cNvSpPr/>
-          <p:nvPr/>
-        </p:nvSpPr>
-        <p:spPr>
-          <a:xfrm>
-            <a:off x="3977639" y="1901952"/>
-            <a:ext cx="144338" cy="365760"/>
-          </a:xfrm>
-          <a:prstGeom prst="rect">
-            <a:avLst/>
-          </a:prstGeom>
-          <a:solidFill>
-            <a:srgbClr val="1E2761"/>
-          </a:solidFill>
-          <a:ln>
-            <a:noFill/>
-          </a:ln>
-          <a:effectLst/>
-        </p:spPr>
-        <p:style>
-          <a:lnRef idx="1">
-            <a:schemeClr val="accent1"/>
-          </a:lnRef>
-          <a:fillRef idx="3">
-            <a:schemeClr val="accent1"/>
-          </a:fillRef>
-          <a:effectRef idx="2">
-            <a:schemeClr val="accent1"/>
-          </a:effectRef>
-          <a:fontRef idx="minor">
-            <a:schemeClr val="lt1"/>
-          </a:fontRef>
-        </p:style>
-        <p:txBody>
-          <a:bodyPr rtlCol="0" anchor="ctr"/>
-          <a:lstStyle/>
-          <a:p/>
-        </p:txBody>
-      </p:sp>
-      <p:sp>
-        <p:nvSpPr>
-          <p:cNvPr id="10" name="TextBox 9"/>
-          <p:cNvSpPr txBox="1"/>
-          <p:nvPr/>
-        </p:nvSpPr>
-        <p:spPr>
-          <a:xfrm>
-            <a:off x="4268282" y="1947672"/>
-            <a:ext cx="1371600" cy="274320"/>
-          </a:xfrm>
-          <a:prstGeom prst="rect">
-            <a:avLst/>
-          </a:prstGeom>
-          <a:noFill/>
-        </p:spPr>
-        <p:txBody>
-          <a:bodyPr wrap="square" lIns="0" rIns="0" tIns="0" bIns="0" anchor="t">
-            <a:spAutoFit/>
-          </a:bodyPr>
-          <a:lstStyle/>
-          <a:p>
-            <a:pPr algn="l">
-              <a:lnSpc>
-                <a:spcPct val="120000"/>
-              </a:lnSpc>
-              <a:spcAft>
-                <a:spcPts val="0"/>
-              </a:spcAft>
-            </a:pPr>
-            <a:r>
-              <a:rPr sz="1700" b="1">
-                <a:solidFill>
-                  <a:srgbClr val="1E2761"/>
-                </a:solidFill>
-                <a:latin typeface="Calibri"/>
-              </a:rPr>
-              <a:t>1.23%</a:t>
-            </a:r>
-          </a:p>
-        </p:txBody>
-      </p:sp>
-      <p:sp>
-        <p:nvSpPr>
-          <p:cNvPr id="11" name="TextBox 10"/>
-          <p:cNvSpPr txBox="1"/>
-          <p:nvPr/>
-        </p:nvSpPr>
-        <p:spPr>
-          <a:xfrm>
-            <a:off x="548640" y="2487168"/>
-            <a:ext cx="3200400" cy="502920"/>
-          </a:xfrm>
-          <a:prstGeom prst="rect">
-            <a:avLst/>
-          </a:prstGeom>
-          <a:noFill/>
-        </p:spPr>
-        <p:txBody>
-          <a:bodyPr wrap="square" lIns="0" rIns="0" tIns="0" bIns="0" anchor="t">
-            <a:spAutoFit/>
-          </a:bodyPr>
-          <a:lstStyle/>
-          <a:p>
-            <a:pPr algn="l">
-              <a:lnSpc>
-                <a:spcPct val="120000"/>
-              </a:lnSpc>
-              <a:spcAft>
-                <a:spcPts val="100"/>
-              </a:spcAft>
-            </a:pPr>
-            <a:r>
-              <a:rPr sz="1400" b="1">
-                <a:solidFill>
-                  <a:srgbClr val="1B1F3B"/>
-                </a:solidFill>
-                <a:latin typeface="Calibri"/>
-              </a:rPr>
-              <a:t>another corpus</a:t>
-            </a:r>
-          </a:p>
-          <a:p>
-            <a:pPr>
-              <a:lnSpc>
-                <a:spcPct val="120000"/>
-              </a:lnSpc>
-              <a:spcAft>
-                <a:spcPts val="0"/>
-              </a:spcAft>
-            </a:pPr>
-            <a:r>
-              <a:rPr sz="1000" b="0">
-                <a:solidFill>
-                  <a:srgbClr val="8792AC"/>
-                </a:solidFill>
-                <a:latin typeface="Calibri"/>
-              </a:rPr>
-              <a:t>In-the-Wild</a:t>
-            </a:r>
-          </a:p>
-        </p:txBody>
-      </p:sp>
-      <p:sp>
-        <p:nvSpPr>
-          <p:cNvPr id="12" name="Rectangle 11"/>
-          <p:cNvSpPr/>
-          <p:nvPr/>
-        </p:nvSpPr>
-        <p:spPr>
-          <a:xfrm>
-            <a:off x="3977639" y="2505456"/>
-            <a:ext cx="4359478" cy="365760"/>
-          </a:xfrm>
-          <a:prstGeom prst="rect">
-            <a:avLst/>
-          </a:prstGeom>
-          <a:solidFill>
-            <a:srgbClr val="E94F37"/>
-          </a:solidFill>
-          <a:ln>
-            <a:noFill/>
-          </a:ln>
-          <a:effectLst/>
-        </p:spPr>
-        <p:style>
-          <a:lnRef idx="1">
-            <a:schemeClr val="accent1"/>
-          </a:lnRef>
-          <a:fillRef idx="3">
-            <a:schemeClr val="accent1"/>
-          </a:fillRef>
-          <a:effectRef idx="2">
-            <a:schemeClr val="accent1"/>
-          </a:effectRef>
-          <a:fontRef idx="minor">
-            <a:schemeClr val="lt1"/>
-          </a:fontRef>
-        </p:style>
-        <p:txBody>
-          <a:bodyPr rtlCol="0" anchor="ctr"/>
-          <a:lstStyle/>
-          <a:p/>
-        </p:txBody>
-      </p:sp>
-      <p:sp>
-        <p:nvSpPr>
-          <p:cNvPr id="13" name="TextBox 12"/>
-          <p:cNvSpPr txBox="1"/>
-          <p:nvPr/>
-        </p:nvSpPr>
-        <p:spPr>
-          <a:xfrm>
-            <a:off x="8483422" y="2551176"/>
-            <a:ext cx="1371600" cy="274320"/>
-          </a:xfrm>
-          <a:prstGeom prst="rect">
-            <a:avLst/>
-          </a:prstGeom>
-          <a:noFill/>
-        </p:spPr>
-        <p:txBody>
-          <a:bodyPr wrap="square" lIns="0" rIns="0" tIns="0" bIns="0" anchor="t">
-            <a:spAutoFit/>
-          </a:bodyPr>
-          <a:lstStyle/>
-          <a:p>
-            <a:pPr algn="l">
-              <a:lnSpc>
-                <a:spcPct val="120000"/>
-              </a:lnSpc>
-              <a:spcAft>
-                <a:spcPts val="0"/>
-              </a:spcAft>
-            </a:pPr>
-            <a:r>
-              <a:rPr sz="1700" b="1">
-                <a:solidFill>
-                  <a:srgbClr val="E94F37"/>
-                </a:solidFill>
-                <a:latin typeface="Calibri"/>
-              </a:rPr>
-              <a:t>37.15%</a:t>
-            </a:r>
-          </a:p>
-        </p:txBody>
-      </p:sp>
-      <p:sp>
-        <p:nvSpPr>
-          <p:cNvPr id="14" name="TextBox 13"/>
-          <p:cNvSpPr txBox="1"/>
-          <p:nvPr/>
-        </p:nvSpPr>
-        <p:spPr>
-          <a:xfrm>
-            <a:off x="548640" y="3090672"/>
-            <a:ext cx="3200400" cy="502920"/>
-          </a:xfrm>
-          <a:prstGeom prst="rect">
-            <a:avLst/>
-          </a:prstGeom>
-          <a:noFill/>
-        </p:spPr>
-        <p:txBody>
-          <a:bodyPr wrap="square" lIns="0" rIns="0" tIns="0" bIns="0" anchor="t">
-            <a:spAutoFit/>
-          </a:bodyPr>
-          <a:lstStyle/>
-          <a:p>
-            <a:pPr algn="l">
-              <a:lnSpc>
-                <a:spcPct val="120000"/>
-              </a:lnSpc>
-              <a:spcAft>
-                <a:spcPts val="100"/>
-              </a:spcAft>
-            </a:pPr>
-            <a:r>
-              <a:rPr sz="1400" b="1">
-                <a:solidFill>
-                  <a:srgbClr val="1B1F3B"/>
-                </a:solidFill>
-                <a:latin typeface="Calibri"/>
-              </a:rPr>
-              <a:t>2026 cloned voices</a:t>
-            </a:r>
-          </a:p>
-          <a:p>
-            <a:pPr>
-              <a:lnSpc>
-                <a:spcPct val="120000"/>
-              </a:lnSpc>
-              <a:spcAft>
-                <a:spcPts val="0"/>
-              </a:spcAft>
-            </a:pPr>
-            <a:r>
-              <a:rPr sz="1000" b="0">
-                <a:solidFill>
-                  <a:srgbClr val="8792AC"/>
-                </a:solidFill>
-                <a:latin typeface="Calibri"/>
-              </a:rPr>
-              <a:t>over a real VoIP call</a:t>
-            </a:r>
-          </a:p>
-        </p:txBody>
-      </p:sp>
-      <p:sp>
-        <p:nvSpPr>
-          <p:cNvPr id="15" name="Rectangle 14"/>
-          <p:cNvSpPr/>
-          <p:nvPr/>
-        </p:nvSpPr>
-        <p:spPr>
-          <a:xfrm>
-            <a:off x="3977639" y="3108960"/>
-            <a:ext cx="5900257" cy="365760"/>
-          </a:xfrm>
-          <a:prstGeom prst="rect">
-            <a:avLst/>
-          </a:prstGeom>
-          <a:solidFill>
-            <a:srgbClr val="E94F37"/>
-          </a:solidFill>
-          <a:ln>
-            <a:noFill/>
-          </a:ln>
-          <a:effectLst/>
-        </p:spPr>
-        <p:style>
-          <a:lnRef idx="1">
-            <a:schemeClr val="accent1"/>
-          </a:lnRef>
-          <a:fillRef idx="3">
-            <a:schemeClr val="accent1"/>
-          </a:fillRef>
-          <a:effectRef idx="2">
-            <a:schemeClr val="accent1"/>
-          </a:effectRef>
-          <a:fontRef idx="minor">
-            <a:schemeClr val="lt1"/>
-          </a:fontRef>
-        </p:style>
-        <p:txBody>
-          <a:bodyPr rtlCol="0" anchor="ctr"/>
-          <a:lstStyle/>
-          <a:p/>
-        </p:txBody>
-      </p:sp>
-      <p:sp>
-        <p:nvSpPr>
-          <p:cNvPr id="16" name="TextBox 15"/>
-          <p:cNvSpPr txBox="1"/>
-          <p:nvPr/>
-        </p:nvSpPr>
-        <p:spPr>
-          <a:xfrm>
-            <a:off x="8643457" y="3163824"/>
-            <a:ext cx="1097280" cy="274320"/>
-          </a:xfrm>
-          <a:prstGeom prst="rect">
-            <a:avLst/>
-          </a:prstGeom>
-          <a:noFill/>
-        </p:spPr>
-        <p:txBody>
-          <a:bodyPr wrap="square" lIns="0" rIns="0" tIns="0" bIns="0" anchor="t">
-            <a:spAutoFit/>
-          </a:bodyPr>
-          <a:lstStyle/>
-          <a:p>
-            <a:pPr algn="r">
-              <a:lnSpc>
-                <a:spcPct val="120000"/>
-              </a:lnSpc>
-              <a:spcAft>
-                <a:spcPts val="0"/>
-              </a:spcAft>
-            </a:pPr>
-            <a:r>
-              <a:rPr sz="1700" b="1">
-                <a:solidFill>
-                  <a:srgbClr val="FFFFFF"/>
-                </a:solidFill>
-                <a:latin typeface="Calibri"/>
-              </a:rPr>
-              <a:t>50.28%</a:t>
-            </a:r>
-          </a:p>
-        </p:txBody>
-      </p:sp>
-      <p:cxnSp>
-        <p:nvCxnSpPr>
-          <p:cNvPr id="17" name="Connector 16"/>
-          <p:cNvCxnSpPr/>
-          <p:nvPr/>
-        </p:nvCxnSpPr>
-        <p:spPr>
-          <a:xfrm>
-            <a:off x="548640" y="3803904"/>
-            <a:ext cx="10469880" cy="0"/>
-          </a:xfrm>
-          <a:prstGeom prst="line">
-            <a:avLst/>
-          </a:prstGeom>
-          <a:ln w="12700">
-            <a:solidFill>
-              <a:srgbClr val="D8DEEC"/>
-            </a:solidFill>
-          </a:ln>
-        </p:spPr>
-        <p:style>
-          <a:lnRef idx="2">
-            <a:schemeClr val="accent1"/>
-          </a:lnRef>
-          <a:fillRef idx="0">
-            <a:schemeClr val="accent1"/>
-          </a:fillRef>
-          <a:effectRef idx="1">
-            <a:schemeClr val="accent1"/>
-          </a:effectRef>
-          <a:fontRef idx="minor">
-            <a:schemeClr val="tx1"/>
-          </a:fontRef>
-        </p:style>
-      </p:cxnSp>
-      <p:sp>
-        <p:nvSpPr>
-          <p:cNvPr id="18" name="TextBox 17"/>
-          <p:cNvSpPr txBox="1"/>
-          <p:nvPr/>
-        </p:nvSpPr>
-        <p:spPr>
-          <a:xfrm>
-            <a:off x="548640" y="3931920"/>
-            <a:ext cx="3200400" cy="502920"/>
-          </a:xfrm>
-          <a:prstGeom prst="rect">
-            <a:avLst/>
-          </a:prstGeom>
-          <a:noFill/>
-        </p:spPr>
-        <p:txBody>
-          <a:bodyPr wrap="square" lIns="0" rIns="0" tIns="0" bIns="0" anchor="t">
-            <a:spAutoFit/>
-          </a:bodyPr>
-          <a:lstStyle/>
-          <a:p>
-            <a:pPr algn="l">
-              <a:lnSpc>
-                <a:spcPct val="120000"/>
-              </a:lnSpc>
-              <a:spcAft>
-                <a:spcPts val="100"/>
-              </a:spcAft>
-            </a:pPr>
-            <a:r>
-              <a:rPr sz="1400" b="1">
-                <a:solidFill>
-                  <a:srgbClr val="1E2761"/>
-                </a:solidFill>
-                <a:latin typeface="Calibri"/>
-              </a:rPr>
-              <a:t>same test, retrained</a:t>
-            </a:r>
-          </a:p>
-          <a:p>
-            <a:pPr>
-              <a:lnSpc>
-                <a:spcPct val="120000"/>
-              </a:lnSpc>
-              <a:spcAft>
-                <a:spcPts val="0"/>
-              </a:spcAft>
-            </a:pPr>
-            <a:r>
-              <a:rPr sz="1000" b="0">
-                <a:solidFill>
-                  <a:srgbClr val="8792AC"/>
-                </a:solidFill>
-                <a:latin typeface="Calibri"/>
-              </a:rPr>
-              <a:t>on modern voices</a:t>
-            </a:r>
-          </a:p>
-        </p:txBody>
-      </p:sp>
-      <p:sp>
-        <p:nvSpPr>
-          <p:cNvPr id="19" name="Rectangle 18"/>
-          <p:cNvSpPr/>
-          <p:nvPr/>
-        </p:nvSpPr>
-        <p:spPr>
-          <a:xfrm>
-            <a:off x="3977639" y="3950208"/>
-            <a:ext cx="681791" cy="365760"/>
-          </a:xfrm>
-          <a:prstGeom prst="rect">
-            <a:avLst/>
-          </a:prstGeom>
-          <a:solidFill>
-            <a:srgbClr val="1E2761"/>
-          </a:solidFill>
-          <a:ln>
-            <a:noFill/>
-          </a:ln>
-          <a:effectLst/>
-        </p:spPr>
-        <p:style>
-          <a:lnRef idx="1">
-            <a:schemeClr val="accent1"/>
-          </a:lnRef>
-          <a:fillRef idx="3">
-            <a:schemeClr val="accent1"/>
-          </a:fillRef>
-          <a:effectRef idx="2">
-            <a:schemeClr val="accent1"/>
-          </a:effectRef>
-          <a:fontRef idx="minor">
-            <a:schemeClr val="lt1"/>
-          </a:fontRef>
-        </p:style>
-        <p:txBody>
-          <a:bodyPr rtlCol="0" anchor="ctr"/>
-          <a:lstStyle/>
-          <a:p/>
-        </p:txBody>
-      </p:sp>
-      <p:sp>
-        <p:nvSpPr>
-          <p:cNvPr id="20" name="TextBox 19"/>
-          <p:cNvSpPr txBox="1"/>
-          <p:nvPr/>
-        </p:nvSpPr>
-        <p:spPr>
-          <a:xfrm>
-            <a:off x="4805735" y="3995928"/>
-            <a:ext cx="3291840" cy="274320"/>
-          </a:xfrm>
-          <a:prstGeom prst="rect">
-            <a:avLst/>
-          </a:prstGeom>
-          <a:noFill/>
-        </p:spPr>
-        <p:txBody>
-          <a:bodyPr wrap="square" lIns="0" rIns="0" tIns="0" bIns="0" anchor="t">
-            <a:spAutoFit/>
-          </a:bodyPr>
-          <a:lstStyle/>
-          <a:p>
-            <a:pPr algn="l">
-              <a:lnSpc>
-                <a:spcPct val="120000"/>
-              </a:lnSpc>
-              <a:spcAft>
-                <a:spcPts val="0"/>
-              </a:spcAft>
-            </a:pPr>
-            <a:r>
-              <a:rPr sz="1700" b="1">
-                <a:solidFill>
-                  <a:srgbClr val="1E2761"/>
-                </a:solidFill>
-                <a:latin typeface="Calibri"/>
-              </a:rPr>
-              <a:t>5.81%</a:t>
-            </a:r>
-            <a:r>
-              <a:rPr sz="1300" b="0">
-                <a:solidFill>
-                  <a:srgbClr val="8792AC"/>
-                </a:solidFill>
-                <a:latin typeface="Calibri"/>
-              </a:rPr>
-              <a:t>    so it can be fixed</a:t>
-            </a:r>
-          </a:p>
-        </p:txBody>
-      </p:sp>
-      <p:cxnSp>
-        <p:nvCxnSpPr>
-          <p:cNvPr id="21" name="Connector 20"/>
-          <p:cNvCxnSpPr/>
-          <p:nvPr/>
-        </p:nvCxnSpPr>
-        <p:spPr>
-          <a:xfrm>
-            <a:off x="3977639" y="4498848"/>
-            <a:ext cx="7040881" cy="0"/>
-          </a:xfrm>
-          <a:prstGeom prst="line">
-            <a:avLst/>
-          </a:prstGeom>
-          <a:ln w="12700">
-            <a:solidFill>
-              <a:srgbClr val="D8DEEC"/>
-            </a:solidFill>
-          </a:ln>
-        </p:spPr>
-        <p:style>
-          <a:lnRef idx="2">
-            <a:schemeClr val="accent1"/>
-          </a:lnRef>
-          <a:fillRef idx="0">
-            <a:schemeClr val="accent1"/>
-          </a:fillRef>
-          <a:effectRef idx="1">
-            <a:schemeClr val="accent1"/>
-          </a:effectRef>
-          <a:fontRef idx="minor">
-            <a:schemeClr val="tx1"/>
-          </a:fontRef>
-        </p:style>
-      </p:cxnSp>
-      <p:sp>
-        <p:nvSpPr>
-          <p:cNvPr id="22" name="TextBox 21"/>
-          <p:cNvSpPr txBox="1"/>
-          <p:nvPr/>
-        </p:nvSpPr>
-        <p:spPr>
-          <a:xfrm>
-            <a:off x="3611879" y="4553712"/>
-            <a:ext cx="731520" cy="219456"/>
-          </a:xfrm>
-          <a:prstGeom prst="rect">
-            <a:avLst/>
-          </a:prstGeom>
-          <a:noFill/>
-        </p:spPr>
-        <p:txBody>
-          <a:bodyPr wrap="square" lIns="0" rIns="0" tIns="0" bIns="0" anchor="t">
-            <a:spAutoFit/>
-          </a:bodyPr>
-          <a:lstStyle/>
-          <a:p>
-            <a:pPr algn="ctr">
-              <a:lnSpc>
-                <a:spcPct val="120000"/>
-              </a:lnSpc>
-              <a:spcAft>
-                <a:spcPts val="0"/>
-              </a:spcAft>
-            </a:pPr>
-            <a:r>
-              <a:rPr sz="900" b="0">
-                <a:solidFill>
-                  <a:srgbClr val="8792AC"/>
-                </a:solidFill>
-                <a:latin typeface="Calibri"/>
-              </a:rPr>
-              <a:t>0%</a:t>
-            </a:r>
-          </a:p>
-        </p:txBody>
-      </p:sp>
-      <p:sp>
-        <p:nvSpPr>
-          <p:cNvPr id="23" name="TextBox 22"/>
-          <p:cNvSpPr txBox="1"/>
-          <p:nvPr/>
-        </p:nvSpPr>
-        <p:spPr>
-          <a:xfrm>
-            <a:off x="5372100" y="4553712"/>
-            <a:ext cx="731520" cy="219456"/>
-          </a:xfrm>
-          <a:prstGeom prst="rect">
-            <a:avLst/>
-          </a:prstGeom>
-          <a:noFill/>
-        </p:spPr>
-        <p:txBody>
-          <a:bodyPr wrap="square" lIns="0" rIns="0" tIns="0" bIns="0" anchor="t">
-            <a:spAutoFit/>
-          </a:bodyPr>
-          <a:lstStyle/>
-          <a:p>
-            <a:pPr algn="ctr">
-              <a:lnSpc>
-                <a:spcPct val="120000"/>
-              </a:lnSpc>
-              <a:spcAft>
-                <a:spcPts val="0"/>
-              </a:spcAft>
-            </a:pPr>
-            <a:r>
-              <a:rPr sz="900" b="0">
-                <a:solidFill>
-                  <a:srgbClr val="8792AC"/>
-                </a:solidFill>
-                <a:latin typeface="Calibri"/>
-              </a:rPr>
-              <a:t>15%</a:t>
-            </a:r>
-          </a:p>
-        </p:txBody>
-      </p:sp>
-      <p:sp>
-        <p:nvSpPr>
-          <p:cNvPr id="24" name="TextBox 23"/>
-          <p:cNvSpPr txBox="1"/>
-          <p:nvPr/>
-        </p:nvSpPr>
-        <p:spPr>
-          <a:xfrm>
-            <a:off x="7132319" y="4553712"/>
-            <a:ext cx="731520" cy="219456"/>
-          </a:xfrm>
-          <a:prstGeom prst="rect">
-            <a:avLst/>
-          </a:prstGeom>
-          <a:noFill/>
-        </p:spPr>
-        <p:txBody>
-          <a:bodyPr wrap="square" lIns="0" rIns="0" tIns="0" bIns="0" anchor="t">
-            <a:spAutoFit/>
-          </a:bodyPr>
-          <a:lstStyle/>
-          <a:p>
-            <a:pPr algn="ctr">
-              <a:lnSpc>
-                <a:spcPct val="120000"/>
-              </a:lnSpc>
-              <a:spcAft>
-                <a:spcPts val="0"/>
-              </a:spcAft>
-            </a:pPr>
-            <a:r>
-              <a:rPr sz="900" b="0">
-                <a:solidFill>
-                  <a:srgbClr val="8792AC"/>
-                </a:solidFill>
-                <a:latin typeface="Calibri"/>
-              </a:rPr>
-              <a:t>30%</a:t>
-            </a:r>
-          </a:p>
-        </p:txBody>
-      </p:sp>
-      <p:sp>
-        <p:nvSpPr>
-          <p:cNvPr id="25" name="TextBox 24"/>
-          <p:cNvSpPr txBox="1"/>
-          <p:nvPr/>
-        </p:nvSpPr>
-        <p:spPr>
-          <a:xfrm>
-            <a:off x="8892540" y="4553712"/>
-            <a:ext cx="731520" cy="219456"/>
-          </a:xfrm>
-          <a:prstGeom prst="rect">
-            <a:avLst/>
-          </a:prstGeom>
-          <a:noFill/>
-        </p:spPr>
-        <p:txBody>
-          <a:bodyPr wrap="square" lIns="0" rIns="0" tIns="0" bIns="0" anchor="t">
-            <a:spAutoFit/>
-          </a:bodyPr>
-          <a:lstStyle/>
-          <a:p>
-            <a:pPr algn="ctr">
-              <a:lnSpc>
-                <a:spcPct val="120000"/>
-              </a:lnSpc>
-              <a:spcAft>
-                <a:spcPts val="0"/>
-              </a:spcAft>
-            </a:pPr>
-            <a:r>
-              <a:rPr sz="900" b="0">
-                <a:solidFill>
-                  <a:srgbClr val="8792AC"/>
-                </a:solidFill>
-                <a:latin typeface="Calibri"/>
-              </a:rPr>
-              <a:t>45%</a:t>
-            </a:r>
-          </a:p>
-        </p:txBody>
-      </p:sp>
-      <p:sp>
-        <p:nvSpPr>
-          <p:cNvPr id="26" name="TextBox 25"/>
-          <p:cNvSpPr txBox="1"/>
-          <p:nvPr/>
-        </p:nvSpPr>
-        <p:spPr>
-          <a:xfrm>
-            <a:off x="10652760" y="4553712"/>
-            <a:ext cx="731520" cy="219456"/>
-          </a:xfrm>
-          <a:prstGeom prst="rect">
-            <a:avLst/>
-          </a:prstGeom>
-          <a:noFill/>
-        </p:spPr>
-        <p:txBody>
-          <a:bodyPr wrap="square" lIns="0" rIns="0" tIns="0" bIns="0" anchor="t">
-            <a:spAutoFit/>
-          </a:bodyPr>
-          <a:lstStyle/>
-          <a:p>
-            <a:pPr algn="ctr">
-              <a:lnSpc>
-                <a:spcPct val="120000"/>
-              </a:lnSpc>
-              <a:spcAft>
-                <a:spcPts val="0"/>
-              </a:spcAft>
-            </a:pPr>
-            <a:r>
-              <a:rPr sz="900" b="0">
-                <a:solidFill>
-                  <a:srgbClr val="8792AC"/>
-                </a:solidFill>
-                <a:latin typeface="Calibri"/>
-              </a:rPr>
-              <a:t>60%</a:t>
-            </a:r>
-          </a:p>
-        </p:txBody>
-      </p:sp>
-      <p:sp>
-        <p:nvSpPr>
-          <p:cNvPr id="27" name="TextBox 26"/>
-          <p:cNvSpPr txBox="1"/>
-          <p:nvPr/>
-        </p:nvSpPr>
-        <p:spPr>
-          <a:xfrm>
-            <a:off x="548640" y="4553712"/>
-            <a:ext cx="3200400" cy="219456"/>
-          </a:xfrm>
-          <a:prstGeom prst="rect">
-            <a:avLst/>
-          </a:prstGeom>
-          <a:noFill/>
-        </p:spPr>
-        <p:txBody>
-          <a:bodyPr wrap="square" lIns="0" rIns="0" tIns="0" bIns="0" anchor="t">
-            <a:spAutoFit/>
-          </a:bodyPr>
-          <a:lstStyle/>
-          <a:p>
-            <a:pPr algn="l">
-              <a:lnSpc>
-                <a:spcPct val="120000"/>
-              </a:lnSpc>
-              <a:spcAft>
-                <a:spcPts val="0"/>
-              </a:spcAft>
-            </a:pPr>
-            <a:r>
-              <a:rPr sz="900" b="0">
-                <a:solidFill>
-                  <a:srgbClr val="8792AC"/>
-                </a:solidFill>
-                <a:latin typeface="Calibri"/>
-              </a:rPr>
-              <a:t>equal error rate, lower is better</a:t>
-            </a:r>
-          </a:p>
-        </p:txBody>
-      </p:sp>
-      <p:sp>
-        <p:nvSpPr>
-          <p:cNvPr id="28" name="Rectangle 27"/>
-          <p:cNvSpPr/>
-          <p:nvPr/>
-        </p:nvSpPr>
-        <p:spPr>
-          <a:xfrm>
-            <a:off x="548640" y="5074920"/>
-            <a:ext cx="11091672" cy="868680"/>
-          </a:xfrm>
-          <a:prstGeom prst="rect">
-            <a:avLst/>
-          </a:prstGeom>
-          <a:solidFill>
-            <a:srgbClr val="F4F6FC"/>
-          </a:solidFill>
-          <a:ln>
-            <a:noFill/>
-          </a:ln>
-          <a:effectLst/>
-        </p:spPr>
-        <p:style>
-          <a:lnRef idx="1">
-            <a:schemeClr val="accent1"/>
-          </a:lnRef>
-          <a:fillRef idx="3">
-            <a:schemeClr val="accent1"/>
-          </a:fillRef>
-          <a:effectRef idx="2">
-            <a:schemeClr val="accent1"/>
-          </a:effectRef>
-          <a:fontRef idx="minor">
-            <a:schemeClr val="lt1"/>
-          </a:fontRef>
-        </p:style>
-        <p:txBody>
-          <a:bodyPr rtlCol="0" anchor="ctr"/>
-          <a:lstStyle/>
-          <a:p/>
-        </p:txBody>
-      </p:sp>
-      <p:sp>
-        <p:nvSpPr>
-          <p:cNvPr id="29" name="Rectangle 28"/>
-          <p:cNvSpPr/>
-          <p:nvPr/>
-        </p:nvSpPr>
-        <p:spPr>
-          <a:xfrm>
-            <a:off x="548640" y="5074920"/>
-            <a:ext cx="41148" cy="868680"/>
-          </a:xfrm>
-          <a:prstGeom prst="rect">
-            <a:avLst/>
-          </a:prstGeom>
-          <a:solidFill>
-            <a:srgbClr val="E94F37"/>
-          </a:solidFill>
-          <a:ln>
-            <a:noFill/>
-          </a:ln>
-          <a:effectLst/>
-        </p:spPr>
-        <p:style>
-          <a:lnRef idx="1">
-            <a:schemeClr val="accent1"/>
-          </a:lnRef>
-          <a:fillRef idx="3">
-            <a:schemeClr val="accent1"/>
-          </a:fillRef>
-          <a:effectRef idx="2">
-            <a:schemeClr val="accent1"/>
-          </a:effectRef>
-          <a:fontRef idx="minor">
-            <a:schemeClr val="lt1"/>
-          </a:fontRef>
-        </p:style>
-        <p:txBody>
-          <a:bodyPr rtlCol="0" anchor="ctr"/>
-          <a:lstStyle/>
-          <a:p/>
-        </p:txBody>
-      </p:sp>
-      <p:sp>
-        <p:nvSpPr>
-          <p:cNvPr id="30" name="TextBox 29"/>
-          <p:cNvSpPr txBox="1"/>
-          <p:nvPr/>
-        </p:nvSpPr>
-        <p:spPr>
-          <a:xfrm>
-            <a:off x="868680" y="5230368"/>
-            <a:ext cx="10515600" cy="566928"/>
-          </a:xfrm>
-          <a:prstGeom prst="rect">
-            <a:avLst/>
-          </a:prstGeom>
-          <a:noFill/>
-        </p:spPr>
-        <p:txBody>
-          <a:bodyPr wrap="square" lIns="0" rIns="0" tIns="0" bIns="0" anchor="ctr">
-            <a:spAutoFit/>
-          </a:bodyPr>
-          <a:lstStyle/>
-          <a:p>
-            <a:pPr algn="l">
-              <a:lnSpc>
-                <a:spcPct val="125000"/>
-              </a:lnSpc>
-              <a:spcAft>
-                <a:spcPts val="0"/>
-              </a:spcAft>
-            </a:pPr>
-            <a:r>
-              <a:rPr sz="1400" b="0">
-                <a:solidFill>
-                  <a:srgbClr val="44506B"/>
-                </a:solidFill>
-                <a:latin typeface="Calibri"/>
-              </a:rPr>
-              <a:t>A 36-point gap between the benchmark and anything else. </a:t>
-            </a:r>
-            <a:r>
-              <a:rPr sz="1400" b="1">
-                <a:solidFill>
-                  <a:srgbClr val="1B1F3B"/>
-                </a:solidFill>
-                <a:latin typeface="Calibri"/>
-              </a:rPr>
-              <a:t>Closing that gap is what we are building.</a:t>
-            </a:r>
-          </a:p>
-        </p:txBody>
-      </p:sp>
-    </p:spTree>
-  </p:cSld>
-  <p:clrMapOvr>
-    <a:masterClrMapping/>
-  </p:clrMapOvr>
-</p:sld>
-</file>
-
-<file path=ppt/slides/slide13.xml><?xml version="1.0" encoding="utf-8"?>
-<p:sld xmlns:a="http://schemas.openxmlformats.org/drawingml/2006/main" xmlns:p="http://schemas.openxmlformats.org/presentationml/2006/main" xmlns:r="http://schemas.openxmlformats.org/officeDocument/2006/relationships">
-  <p:cSld>
-    <p:spTree>
-      <p:nvGrpSpPr>
-        <p:cNvPr id="1" name=""/>
-        <p:cNvGrpSpPr/>
-        <p:nvPr/>
-      </p:nvGrpSpPr>
-      <p:grpSpPr/>
-      <p:sp>
-        <p:nvSpPr>
-          <p:cNvPr id="2" name="TextBox 1"/>
-          <p:cNvSpPr txBox="1"/>
-          <p:nvPr/>
-        </p:nvSpPr>
-        <p:spPr>
-          <a:xfrm>
-            <a:off x="548640" y="365760"/>
-            <a:ext cx="9144000" cy="274320"/>
-          </a:xfrm>
-          <a:prstGeom prst="rect">
-            <a:avLst/>
-          </a:prstGeom>
-          <a:noFill/>
-        </p:spPr>
-        <p:txBody>
-          <a:bodyPr wrap="square" lIns="0" rIns="0" tIns="0" bIns="0" anchor="t">
-            <a:spAutoFit/>
-          </a:bodyPr>
-          <a:lstStyle/>
-          <a:p>
-            <a:pPr algn="l">
-              <a:lnSpc>
-                <a:spcPct val="120000"/>
-              </a:lnSpc>
-              <a:spcAft>
-                <a:spcPts val="0"/>
-              </a:spcAft>
-            </a:pPr>
-            <a:r>
-              <a:rPr sz="1200" b="1">
-                <a:solidFill>
-                  <a:srgbClr val="E94F37"/>
-                </a:solidFill>
-                <a:latin typeface="Calibri"/>
-              </a:rPr>
-              <a:t>DIAGNOSIS</a:t>
-            </a:r>
-          </a:p>
-        </p:txBody>
-      </p:sp>
-      <p:sp>
-        <p:nvSpPr>
-          <p:cNvPr id="3" name="TextBox 2"/>
-          <p:cNvSpPr txBox="1"/>
-          <p:nvPr/>
-        </p:nvSpPr>
-        <p:spPr>
-          <a:xfrm>
-            <a:off x="548640" y="621792"/>
-            <a:ext cx="11155680" cy="777240"/>
-          </a:xfrm>
-          <a:prstGeom prst="rect">
-            <a:avLst/>
-          </a:prstGeom>
-          <a:noFill/>
-        </p:spPr>
-        <p:txBody>
-          <a:bodyPr wrap="square" lIns="0" rIns="0" tIns="0" bIns="0" anchor="t">
-            <a:spAutoFit/>
-          </a:bodyPr>
-          <a:lstStyle/>
-          <a:p>
-            <a:pPr algn="l">
-              <a:lnSpc>
-                <a:spcPct val="110000"/>
-              </a:lnSpc>
-              <a:spcAft>
-                <a:spcPts val="0"/>
-              </a:spcAft>
-            </a:pPr>
-            <a:r>
-              <a:rPr sz="3000" b="1">
-                <a:solidFill>
-                  <a:srgbClr val="1B1F3B"/>
-                </a:solidFill>
-                <a:latin typeface="Cambria"/>
-              </a:rPr>
-              <a:t>It learns the dataset, not the voice</a:t>
-            </a:r>
-          </a:p>
-        </p:txBody>
-      </p:sp>
-      <p:sp>
-        <p:nvSpPr>
-          <p:cNvPr id="4" name="TextBox 3"/>
-          <p:cNvSpPr txBox="1"/>
-          <p:nvPr/>
-        </p:nvSpPr>
-        <p:spPr>
-          <a:xfrm>
-            <a:off x="457200" y="6537960"/>
-            <a:ext cx="8229600" cy="274320"/>
-          </a:xfrm>
-          <a:prstGeom prst="rect">
-            <a:avLst/>
-          </a:prstGeom>
-          <a:noFill/>
-        </p:spPr>
-        <p:txBody>
-          <a:bodyPr wrap="square" lIns="0" rIns="0" tIns="0" bIns="0" anchor="t">
-            <a:spAutoFit/>
-          </a:bodyPr>
-          <a:lstStyle/>
-          <a:p>
-            <a:pPr algn="l">
-              <a:lnSpc>
-                <a:spcPct val="120000"/>
-              </a:lnSpc>
-              <a:spcAft>
-                <a:spcPts val="0"/>
-              </a:spcAft>
-            </a:pPr>
-            <a:r>
-              <a:rPr sz="900" b="0">
-                <a:solidFill>
-                  <a:srgbClr val="8792AC"/>
-                </a:solidFill>
-                <a:latin typeface="Calibri"/>
-              </a:rPr>
-              <a:t>Vishing Challenge  |  Deepfake Voice Detection for Anti-Vishing Systems</a:t>
-            </a:r>
-          </a:p>
-        </p:txBody>
-      </p:sp>
-      <p:sp>
-        <p:nvSpPr>
-          <p:cNvPr id="5" name="TextBox 4"/>
-          <p:cNvSpPr txBox="1"/>
-          <p:nvPr/>
-        </p:nvSpPr>
-        <p:spPr>
-          <a:xfrm>
-            <a:off x="548640" y="1481328"/>
-            <a:ext cx="11091672" cy="457200"/>
-          </a:xfrm>
-          <a:prstGeom prst="rect">
-            <a:avLst/>
-          </a:prstGeom>
-          <a:noFill/>
-        </p:spPr>
-        <p:txBody>
-          <a:bodyPr wrap="square" lIns="0" rIns="0" tIns="0" bIns="0" anchor="t">
-            <a:spAutoFit/>
-          </a:bodyPr>
-          <a:lstStyle/>
-          <a:p>
-            <a:pPr algn="l">
-              <a:lnSpc>
-                <a:spcPct val="130000"/>
-              </a:lnSpc>
-              <a:spcAft>
-                <a:spcPts val="0"/>
-              </a:spcAft>
-            </a:pPr>
-            <a:r>
-              <a:rPr sz="1300" b="0">
-                <a:solidFill>
-                  <a:srgbClr val="44506B"/>
-                </a:solidFill>
-                <a:latin typeface="Calibri"/>
-              </a:rPr>
-              <a:t>Before choosing an architecture we asked what the failing detectors are actually keying on. The answer explains the collapse, and it tells us what to remove during training.</a:t>
-            </a:r>
-          </a:p>
-        </p:txBody>
-      </p:sp>
-      <p:sp>
-        <p:nvSpPr>
-          <p:cNvPr id="6" name="Rectangle 5"/>
-          <p:cNvSpPr/>
-          <p:nvPr/>
-        </p:nvSpPr>
-        <p:spPr>
-          <a:xfrm>
-            <a:off x="548640" y="2212848"/>
-            <a:ext cx="3483864" cy="2240280"/>
-          </a:xfrm>
-          <a:prstGeom prst="rect">
-            <a:avLst/>
-          </a:prstGeom>
-          <a:solidFill>
-            <a:srgbClr val="F4F6FC"/>
-          </a:solidFill>
-          <a:ln>
-            <a:noFill/>
-          </a:ln>
-          <a:effectLst/>
-        </p:spPr>
-        <p:style>
-          <a:lnRef idx="1">
-            <a:schemeClr val="accent1"/>
-          </a:lnRef>
-          <a:fillRef idx="3">
-            <a:schemeClr val="accent1"/>
-          </a:fillRef>
-          <a:effectRef idx="2">
-            <a:schemeClr val="accent1"/>
-          </a:effectRef>
-          <a:fontRef idx="minor">
-            <a:schemeClr val="lt1"/>
-          </a:fontRef>
-        </p:style>
-        <p:txBody>
-          <a:bodyPr rtlCol="0" anchor="ctr"/>
-          <a:lstStyle/>
-          <a:p/>
-        </p:txBody>
-      </p:sp>
-      <p:sp>
-        <p:nvSpPr>
-          <p:cNvPr id="7" name="TextBox 6"/>
-          <p:cNvSpPr txBox="1"/>
-          <p:nvPr/>
-        </p:nvSpPr>
-        <p:spPr>
-          <a:xfrm>
-            <a:off x="804672" y="2432304"/>
-            <a:ext cx="2971800" cy="1783080"/>
-          </a:xfrm>
-          <a:prstGeom prst="rect">
-            <a:avLst/>
-          </a:prstGeom>
-          <a:noFill/>
-        </p:spPr>
-        <p:txBody>
-          <a:bodyPr wrap="square" lIns="0" rIns="0" tIns="0" bIns="0" anchor="t">
-            <a:spAutoFit/>
-          </a:bodyPr>
-          <a:lstStyle/>
-          <a:p>
-            <a:pPr algn="l">
-              <a:lnSpc>
-                <a:spcPct val="120000"/>
-              </a:lnSpc>
-              <a:spcAft>
-                <a:spcPts val="1000"/>
-              </a:spcAft>
-            </a:pPr>
-            <a:r>
-              <a:rPr sz="1000" b="1">
-                <a:solidFill>
-                  <a:srgbClr val="8792AC"/>
-                </a:solidFill>
-                <a:latin typeface="Calibri"/>
-              </a:rPr>
-              <a:t>SILENCE ALONE</a:t>
-            </a:r>
-          </a:p>
-          <a:p>
-            <a:pPr>
-              <a:lnSpc>
-                <a:spcPct val="100000"/>
-              </a:lnSpc>
-              <a:spcAft>
-                <a:spcPts val="1200"/>
-              </a:spcAft>
-            </a:pPr>
-            <a:r>
-              <a:rPr sz="3400" b="1">
-                <a:solidFill>
-                  <a:srgbClr val="E94F37"/>
-                </a:solidFill>
-                <a:latin typeface="Calibri"/>
-              </a:rPr>
-              <a:t>85%</a:t>
-            </a:r>
-          </a:p>
-          <a:p>
-            <a:pPr>
-              <a:lnSpc>
-                <a:spcPct val="130000"/>
-              </a:lnSpc>
-              <a:spcAft>
-                <a:spcPts val="1000"/>
-              </a:spcAft>
-            </a:pPr>
-            <a:r>
-              <a:rPr sz="1250" b="0">
-                <a:solidFill>
-                  <a:srgbClr val="44506B"/>
-                </a:solidFill>
-                <a:latin typeface="Calibri"/>
-              </a:rPr>
-              <a:t>accuracy from a classifier given only the length of the opening silence</a:t>
-            </a:r>
-          </a:p>
-          <a:p>
-            <a:pPr>
-              <a:lnSpc>
-                <a:spcPct val="120000"/>
-              </a:lnSpc>
-              <a:spcAft>
-                <a:spcPts val="0"/>
-              </a:spcAft>
-            </a:pPr>
-            <a:r>
-              <a:rPr sz="900" b="0">
-                <a:solidFill>
-                  <a:srgbClr val="8792AC"/>
-                </a:solidFill>
-                <a:latin typeface="Calibri"/>
-              </a:rPr>
-              <a:t>Muller et al.</a:t>
-            </a:r>
-          </a:p>
-        </p:txBody>
-      </p:sp>
-      <p:sp>
-        <p:nvSpPr>
-          <p:cNvPr id="8" name="Rectangle 7"/>
-          <p:cNvSpPr/>
-          <p:nvPr/>
-        </p:nvSpPr>
-        <p:spPr>
-          <a:xfrm>
-            <a:off x="4352544" y="2212848"/>
-            <a:ext cx="3483864" cy="2240280"/>
-          </a:xfrm>
-          <a:prstGeom prst="rect">
-            <a:avLst/>
-          </a:prstGeom>
-          <a:solidFill>
-            <a:srgbClr val="F4F6FC"/>
-          </a:solidFill>
-          <a:ln>
-            <a:noFill/>
-          </a:ln>
-          <a:effectLst/>
-        </p:spPr>
-        <p:style>
-          <a:lnRef idx="1">
-            <a:schemeClr val="accent1"/>
-          </a:lnRef>
-          <a:fillRef idx="3">
-            <a:schemeClr val="accent1"/>
-          </a:fillRef>
-          <a:effectRef idx="2">
-            <a:schemeClr val="accent1"/>
-          </a:effectRef>
-          <a:fontRef idx="minor">
-            <a:schemeClr val="lt1"/>
-          </a:fontRef>
-        </p:style>
-        <p:txBody>
-          <a:bodyPr rtlCol="0" anchor="ctr"/>
-          <a:lstStyle/>
-          <a:p/>
-        </p:txBody>
-      </p:sp>
-      <p:sp>
-        <p:nvSpPr>
-          <p:cNvPr id="9" name="TextBox 8"/>
-          <p:cNvSpPr txBox="1"/>
-          <p:nvPr/>
-        </p:nvSpPr>
-        <p:spPr>
-          <a:xfrm>
-            <a:off x="4608576" y="2432304"/>
-            <a:ext cx="2971800" cy="1783080"/>
-          </a:xfrm>
-          <a:prstGeom prst="rect">
-            <a:avLst/>
-          </a:prstGeom>
-          <a:noFill/>
-        </p:spPr>
-        <p:txBody>
-          <a:bodyPr wrap="square" lIns="0" rIns="0" tIns="0" bIns="0" anchor="t">
-            <a:spAutoFit/>
-          </a:bodyPr>
-          <a:lstStyle/>
-          <a:p>
-            <a:pPr algn="l">
-              <a:lnSpc>
-                <a:spcPct val="120000"/>
-              </a:lnSpc>
-              <a:spcAft>
-                <a:spcPts val="1000"/>
-              </a:spcAft>
-            </a:pPr>
-            <a:r>
-              <a:rPr sz="1000" b="1">
-                <a:solidFill>
-                  <a:srgbClr val="8792AC"/>
-                </a:solidFill>
-                <a:latin typeface="Calibri"/>
-              </a:rPr>
-              <a:t>ATTACK ON SILENCE ONLY</a:t>
-            </a:r>
-          </a:p>
-          <a:p>
-            <a:pPr>
-              <a:lnSpc>
-                <a:spcPct val="100000"/>
-              </a:lnSpc>
-              <a:spcAft>
-                <a:spcPts val="1200"/>
-              </a:spcAft>
-            </a:pPr>
-            <a:r>
-              <a:rPr sz="3400" b="1">
-                <a:solidFill>
-                  <a:srgbClr val="E94F37"/>
-                </a:solidFill>
-                <a:latin typeface="Calibri"/>
-              </a:rPr>
-              <a:t>82.2%</a:t>
-            </a:r>
-          </a:p>
-          <a:p>
-            <a:pPr>
-              <a:lnSpc>
-                <a:spcPct val="130000"/>
-              </a:lnSpc>
-              <a:spcAft>
-                <a:spcPts val="1000"/>
-              </a:spcAft>
-            </a:pPr>
-            <a:r>
-              <a:rPr sz="1250" b="0">
-                <a:solidFill>
-                  <a:srgbClr val="44506B"/>
-                </a:solidFill>
-                <a:latin typeface="Calibri"/>
-              </a:rPr>
-              <a:t>attack success from changing only the background noise and the mute segments, never the voice</a:t>
-            </a:r>
-          </a:p>
-          <a:p>
-            <a:pPr>
-              <a:lnSpc>
-                <a:spcPct val="120000"/>
-              </a:lnSpc>
-              <a:spcAft>
-                <a:spcPts val="0"/>
-              </a:spcAft>
-            </a:pPr>
-            <a:r>
-              <a:rPr sz="900" b="0">
-                <a:solidFill>
-                  <a:srgbClr val="8792AC"/>
-                </a:solidFill>
-                <a:latin typeface="Calibri"/>
-              </a:rPr>
-              <a:t>SiFDetectCracker, ACM MM 2023</a:t>
-            </a:r>
-          </a:p>
-        </p:txBody>
-      </p:sp>
-      <p:sp>
-        <p:nvSpPr>
-          <p:cNvPr id="10" name="Rectangle 9"/>
-          <p:cNvSpPr/>
-          <p:nvPr/>
-        </p:nvSpPr>
-        <p:spPr>
-          <a:xfrm>
-            <a:off x="8156448" y="2212848"/>
-            <a:ext cx="3483864" cy="2240280"/>
-          </a:xfrm>
-          <a:prstGeom prst="rect">
-            <a:avLst/>
-          </a:prstGeom>
-          <a:solidFill>
-            <a:srgbClr val="F4F6FC"/>
-          </a:solidFill>
-          <a:ln>
-            <a:noFill/>
-          </a:ln>
-          <a:effectLst/>
-        </p:spPr>
-        <p:style>
-          <a:lnRef idx="1">
-            <a:schemeClr val="accent1"/>
-          </a:lnRef>
-          <a:fillRef idx="3">
-            <a:schemeClr val="accent1"/>
-          </a:fillRef>
-          <a:effectRef idx="2">
-            <a:schemeClr val="accent1"/>
-          </a:effectRef>
-          <a:fontRef idx="minor">
-            <a:schemeClr val="lt1"/>
-          </a:fontRef>
-        </p:style>
-        <p:txBody>
-          <a:bodyPr rtlCol="0" anchor="ctr"/>
-          <a:lstStyle/>
-          <a:p/>
-        </p:txBody>
-      </p:sp>
-      <p:sp>
-        <p:nvSpPr>
-          <p:cNvPr id="11" name="TextBox 10"/>
-          <p:cNvSpPr txBox="1"/>
-          <p:nvPr/>
-        </p:nvSpPr>
-        <p:spPr>
-          <a:xfrm>
-            <a:off x="8412480" y="2432304"/>
-            <a:ext cx="2971800" cy="1783080"/>
-          </a:xfrm>
-          <a:prstGeom prst="rect">
-            <a:avLst/>
-          </a:prstGeom>
-          <a:noFill/>
-        </p:spPr>
-        <p:txBody>
-          <a:bodyPr wrap="square" lIns="0" rIns="0" tIns="0" bIns="0" anchor="t">
-            <a:spAutoFit/>
-          </a:bodyPr>
-          <a:lstStyle/>
-          <a:p>
-            <a:pPr algn="l">
-              <a:lnSpc>
-                <a:spcPct val="120000"/>
-              </a:lnSpc>
-              <a:spcAft>
-                <a:spcPts val="1000"/>
-              </a:spcAft>
-            </a:pPr>
-            <a:r>
-              <a:rPr sz="1000" b="1">
-                <a:solidFill>
-                  <a:srgbClr val="8792AC"/>
-                </a:solidFill>
-                <a:latin typeface="Calibri"/>
-              </a:rPr>
-              <a:t>WHERE IT LOOKS</a:t>
-            </a:r>
-          </a:p>
-          <a:p>
-            <a:pPr>
-              <a:lnSpc>
-                <a:spcPct val="100000"/>
-              </a:lnSpc>
-              <a:spcAft>
-                <a:spcPts val="1200"/>
-              </a:spcAft>
-            </a:pPr>
-            <a:r>
-              <a:rPr sz="3400" b="1">
-                <a:solidFill>
-                  <a:srgbClr val="E94F37"/>
-                </a:solidFill>
-                <a:latin typeface="Calibri"/>
-              </a:rPr>
-              <a:t>0.5-0.6 kHz</a:t>
-            </a:r>
-          </a:p>
-          <a:p>
-            <a:pPr>
-              <a:lnSpc>
-                <a:spcPct val="130000"/>
-              </a:lnSpc>
-              <a:spcAft>
-                <a:spcPts val="1000"/>
-              </a:spcAft>
-            </a:pPr>
-            <a:r>
-              <a:rPr sz="1250" b="0">
-                <a:solidFill>
-                  <a:srgbClr val="44506B"/>
-                </a:solidFill>
-                <a:latin typeface="Calibri"/>
-              </a:rPr>
-              <a:t>SHAP analysis: the model attends to the gaps between words and one narrow low band</a:t>
-            </a:r>
-          </a:p>
-          <a:p>
-            <a:pPr>
-              <a:lnSpc>
-                <a:spcPct val="120000"/>
-              </a:lnSpc>
-              <a:spcAft>
-                <a:spcPts val="0"/>
-              </a:spcAft>
-            </a:pPr>
-            <a:r>
-              <a:rPr sz="900" b="0">
-                <a:solidFill>
-                  <a:srgbClr val="8792AC"/>
-                </a:solidFill>
-                <a:latin typeface="Calibri"/>
-              </a:rPr>
-              <a:t>arXiv:2110.03309</a:t>
-            </a:r>
-          </a:p>
-        </p:txBody>
-      </p:sp>
-      <p:sp>
-        <p:nvSpPr>
-          <p:cNvPr id="12" name="Rectangle 11"/>
-          <p:cNvSpPr/>
-          <p:nvPr/>
-        </p:nvSpPr>
-        <p:spPr>
-          <a:xfrm>
-            <a:off x="548640" y="4800600"/>
-            <a:ext cx="11091672" cy="960120"/>
-          </a:xfrm>
-          <a:prstGeom prst="rect">
-            <a:avLst/>
-          </a:prstGeom>
-          <a:solidFill>
-            <a:srgbClr val="1E2761"/>
-          </a:solidFill>
-          <a:ln>
-            <a:noFill/>
-          </a:ln>
-          <a:effectLst/>
-        </p:spPr>
-        <p:style>
-          <a:lnRef idx="1">
-            <a:schemeClr val="accent1"/>
-          </a:lnRef>
-          <a:fillRef idx="3">
-            <a:schemeClr val="accent1"/>
-          </a:fillRef>
-          <a:effectRef idx="2">
-            <a:schemeClr val="accent1"/>
-          </a:effectRef>
-          <a:fontRef idx="minor">
-            <a:schemeClr val="lt1"/>
-          </a:fontRef>
-        </p:style>
-        <p:txBody>
-          <a:bodyPr rtlCol="0" anchor="ctr"/>
-          <a:lstStyle/>
-          <a:p/>
-        </p:txBody>
-      </p:sp>
-      <p:sp>
-        <p:nvSpPr>
-          <p:cNvPr id="13" name="TextBox 12"/>
-          <p:cNvSpPr txBox="1"/>
-          <p:nvPr/>
-        </p:nvSpPr>
-        <p:spPr>
-          <a:xfrm>
-            <a:off x="914400" y="4983480"/>
-            <a:ext cx="10424160" cy="621792"/>
-          </a:xfrm>
-          <a:prstGeom prst="rect">
-            <a:avLst/>
-          </a:prstGeom>
-          <a:noFill/>
-        </p:spPr>
-        <p:txBody>
-          <a:bodyPr wrap="square" lIns="0" rIns="0" tIns="0" bIns="0" anchor="ctr">
-            <a:spAutoFit/>
-          </a:bodyPr>
-          <a:lstStyle/>
-          <a:p>
-            <a:pPr algn="l">
-              <a:lnSpc>
-                <a:spcPct val="130000"/>
-              </a:lnSpc>
-              <a:spcAft>
-                <a:spcPts val="0"/>
-              </a:spcAft>
-            </a:pPr>
-            <a:r>
-              <a:rPr sz="1450" b="0">
-                <a:solidFill>
-                  <a:srgbClr val="CADCFC"/>
-                </a:solidFill>
-                <a:latin typeface="Calibri"/>
-              </a:rPr>
-              <a:t>The detector wins on what belongs to the corpus, not to the speech. </a:t>
-            </a:r>
-            <a:r>
-              <a:rPr sz="1450" b="1">
-                <a:solidFill>
-                  <a:srgbClr val="FFFFFF"/>
-                </a:solidFill>
-                <a:latin typeface="Calibri"/>
-              </a:rPr>
-              <a:t>Every one of those cues can be taken away in training.</a:t>
-            </a:r>
           </a:p>
         </p:txBody>
       </p:sp>
@@ -5567,6 +5131,10 @@
           </a:solidFill>
           <a:ln/>
         </p:spPr>
+        <p:txBody>
+          <a:bodyPr/>
+          <a:p/>
+        </p:txBody>
       </p:sp>
       <p:pic>
         <p:nvPicPr>
@@ -5692,6 +5260,10 @@
           </a:solidFill>
           <a:ln/>
         </p:spPr>
+        <p:txBody>
+          <a:bodyPr/>
+          <a:p/>
+        </p:txBody>
       </p:sp>
       <p:pic>
         <p:nvPicPr>
@@ -5817,6 +5389,10 @@
           </a:solidFill>
           <a:ln/>
         </p:spPr>
+        <p:txBody>
+          <a:bodyPr/>
+          <a:p/>
+        </p:txBody>
       </p:sp>
       <p:pic>
         <p:nvPicPr>
@@ -5867,15 +5443,13 @@
               <a:buNone/>
             </a:pPr>
             <a:r>
-              <a:rPr lang="en-US" sz="1700" b="1" dirty="0">
+              <a:rPr sz="1700" b="1">
                 <a:solidFill>
                   <a:srgbClr val="1B1F3B"/>
                 </a:solidFill>
-                <a:latin typeface="Calibri" pitchFamily="34" charset="0"/>
-                <a:ea typeface="Calibri" pitchFamily="34" charset="-122"/>
-                <a:cs typeface="Calibri" pitchFamily="34" charset="-120"/>
-              </a:rPr>
-              <a:t>The stakes sit at the authentication layer</a:t>
+                <a:latin typeface="Calibri"/>
+              </a:rPr>
+              <a:t>The stakes sit with the person answering</a:t>
             </a:r>
             <a:endParaRPr lang="en-US" sz="1700" dirty="0"/>
           </a:p>
@@ -5909,15 +5483,13 @@
               <a:buNone/>
             </a:pPr>
             <a:r>
-              <a:rPr lang="en-US" sz="1300" dirty="0">
+              <a:rPr sz="1300">
                 <a:solidFill>
                   <a:srgbClr val="44506B"/>
                 </a:solidFill>
-                <a:latin typeface="Calibri" pitchFamily="34" charset="0"/>
-                <a:ea typeface="Calibri" pitchFamily="34" charset="-122"/>
-                <a:cs typeface="Calibri" pitchFamily="34" charset="-120"/>
-              </a:rPr>
-              <a:t>Voice authentication and call-center vishing sit directly in front of account access and fund transfers — a single miss is costly.</a:t>
+                <a:latin typeface="Calibri"/>
+              </a:rPr>
+              <a:t>A cloned voice asking for an urgent transfer reaches the victim directly, with nothing behind it — a single miss is costly.</a:t>
             </a:r>
             <a:endParaRPr lang="en-US" sz="1300" dirty="0"/>
           </a:p>
@@ -6008,6 +5580,2005 @@
 </file>
 
 <file path=ppt/slides/slide3.xml><?xml version="1.0" encoding="utf-8"?>
+<p:sld xmlns:a="http://schemas.openxmlformats.org/drawingml/2006/main" xmlns:p="http://schemas.openxmlformats.org/presentationml/2006/main" xmlns:r="http://schemas.openxmlformats.org/officeDocument/2006/relationships">
+  <p:cSld>
+    <p:spTree>
+      <p:nvGrpSpPr>
+        <p:cNvPr id="1" name=""/>
+        <p:cNvGrpSpPr/>
+        <p:nvPr/>
+      </p:nvGrpSpPr>
+      <p:grpSpPr/>
+      <p:sp>
+        <p:nvSpPr>
+          <p:cNvPr id="2" name="TextBox 1"/>
+          <p:cNvSpPr txBox="1"/>
+          <p:nvPr/>
+        </p:nvSpPr>
+        <p:spPr>
+          <a:xfrm>
+            <a:off x="548640" y="365760"/>
+            <a:ext cx="9144000" cy="274320"/>
+          </a:xfrm>
+          <a:prstGeom prst="rect">
+            <a:avLst/>
+          </a:prstGeom>
+          <a:noFill/>
+        </p:spPr>
+        <p:txBody>
+          <a:bodyPr wrap="square" lIns="0" rIns="0" tIns="0" bIns="0" anchor="t">
+            <a:spAutoFit/>
+          </a:bodyPr>
+          <a:lstStyle/>
+          <a:p>
+            <a:pPr algn="l">
+              <a:lnSpc>
+                <a:spcPct val="120000"/>
+              </a:lnSpc>
+              <a:spcAft>
+                <a:spcPts val="0"/>
+              </a:spcAft>
+            </a:pPr>
+            <a:r>
+              <a:rPr sz="1200" b="1">
+                <a:solidFill>
+                  <a:srgbClr val="E94F37"/>
+                </a:solidFill>
+                <a:latin typeface="Calibri"/>
+              </a:rPr>
+              <a:t>THE EVIDENCE</a:t>
+            </a:r>
+          </a:p>
+        </p:txBody>
+      </p:sp>
+      <p:sp>
+        <p:nvSpPr>
+          <p:cNvPr id="3" name="TextBox 2"/>
+          <p:cNvSpPr txBox="1"/>
+          <p:nvPr/>
+        </p:nvSpPr>
+        <p:spPr>
+          <a:xfrm>
+            <a:off x="548640" y="621792"/>
+            <a:ext cx="11155680" cy="777240"/>
+          </a:xfrm>
+          <a:prstGeom prst="rect">
+            <a:avLst/>
+          </a:prstGeom>
+          <a:noFill/>
+        </p:spPr>
+        <p:txBody>
+          <a:bodyPr wrap="square" lIns="0" rIns="0" tIns="0" bIns="0" anchor="t">
+            <a:spAutoFit/>
+          </a:bodyPr>
+          <a:lstStyle/>
+          <a:p>
+            <a:pPr algn="l">
+              <a:lnSpc>
+                <a:spcPct val="110000"/>
+              </a:lnSpc>
+              <a:spcAft>
+                <a:spcPts val="0"/>
+              </a:spcAft>
+            </a:pPr>
+            <a:r>
+              <a:rPr sz="3000" b="1">
+                <a:solidFill>
+                  <a:srgbClr val="1B1F3B"/>
+                </a:solidFill>
+                <a:latin typeface="Cambria"/>
+              </a:rPr>
+              <a:t>How far it falls</a:t>
+            </a:r>
+          </a:p>
+        </p:txBody>
+      </p:sp>
+      <p:sp>
+        <p:nvSpPr>
+          <p:cNvPr id="4" name="TextBox 3"/>
+          <p:cNvSpPr txBox="1"/>
+          <p:nvPr/>
+        </p:nvSpPr>
+        <p:spPr>
+          <a:xfrm>
+            <a:off x="457200" y="6537960"/>
+            <a:ext cx="8229600" cy="274320"/>
+          </a:xfrm>
+          <a:prstGeom prst="rect">
+            <a:avLst/>
+          </a:prstGeom>
+          <a:noFill/>
+        </p:spPr>
+        <p:txBody>
+          <a:bodyPr wrap="square" lIns="0" rIns="0" tIns="0" bIns="0" anchor="t">
+            <a:spAutoFit/>
+          </a:bodyPr>
+          <a:lstStyle/>
+          <a:p>
+            <a:pPr algn="l">
+              <a:lnSpc>
+                <a:spcPct val="120000"/>
+              </a:lnSpc>
+              <a:spcAft>
+                <a:spcPts val="0"/>
+              </a:spcAft>
+            </a:pPr>
+            <a:r>
+              <a:rPr sz="900" b="0">
+                <a:solidFill>
+                  <a:srgbClr val="8792AC"/>
+                </a:solidFill>
+                <a:latin typeface="Calibri"/>
+              </a:rPr>
+              <a:t>Vishing Challenge  |  Deepfake Voice Detection for Anti-Vishing Systems</a:t>
+            </a:r>
+          </a:p>
+        </p:txBody>
+      </p:sp>
+      <p:sp>
+        <p:nvSpPr>
+          <p:cNvPr id="5" name="Rectangle 4"/>
+          <p:cNvSpPr/>
+          <p:nvPr/>
+        </p:nvSpPr>
+        <p:spPr>
+          <a:xfrm>
+            <a:off x="9845040" y="1810512"/>
+            <a:ext cx="1173480" cy="1810512"/>
+          </a:xfrm>
+          <a:prstGeom prst="rect">
+            <a:avLst/>
+          </a:prstGeom>
+          <a:solidFill>
+            <a:srgbClr val="FFF3F1"/>
+          </a:solidFill>
+          <a:ln>
+            <a:noFill/>
+          </a:ln>
+          <a:effectLst/>
+        </p:spPr>
+        <p:style>
+          <a:lnRef idx="1">
+            <a:schemeClr val="accent1"/>
+          </a:lnRef>
+          <a:fillRef idx="3">
+            <a:schemeClr val="accent1"/>
+          </a:fillRef>
+          <a:effectRef idx="2">
+            <a:schemeClr val="accent1"/>
+          </a:effectRef>
+          <a:fontRef idx="minor">
+            <a:schemeClr val="lt1"/>
+          </a:fontRef>
+        </p:style>
+        <p:txBody>
+          <a:bodyPr rtlCol="0" anchor="ctr"/>
+          <a:lstStyle/>
+          <a:p/>
+        </p:txBody>
+      </p:sp>
+      <p:sp>
+        <p:nvSpPr>
+          <p:cNvPr id="6" name="TextBox 5"/>
+          <p:cNvSpPr txBox="1"/>
+          <p:nvPr/>
+        </p:nvSpPr>
+        <p:spPr>
+          <a:xfrm>
+            <a:off x="9845040" y="1572768"/>
+            <a:ext cx="1173480" cy="219456"/>
+          </a:xfrm>
+          <a:prstGeom prst="rect">
+            <a:avLst/>
+          </a:prstGeom>
+          <a:noFill/>
+        </p:spPr>
+        <p:txBody>
+          <a:bodyPr wrap="square" lIns="0" rIns="0" tIns="0" bIns="0" anchor="t">
+            <a:spAutoFit/>
+          </a:bodyPr>
+          <a:lstStyle/>
+          <a:p>
+            <a:pPr algn="ctr">
+              <a:lnSpc>
+                <a:spcPct val="120000"/>
+              </a:lnSpc>
+              <a:spcAft>
+                <a:spcPts val="0"/>
+              </a:spcAft>
+            </a:pPr>
+            <a:r>
+              <a:rPr sz="900" b="1">
+                <a:solidFill>
+                  <a:srgbClr val="E94F37"/>
+                </a:solidFill>
+                <a:latin typeface="Calibri"/>
+              </a:rPr>
+              <a:t>COIN FLIP</a:t>
+            </a:r>
+          </a:p>
+        </p:txBody>
+      </p:sp>
+      <p:sp>
+        <p:nvSpPr>
+          <p:cNvPr id="7" name="TextBox 6"/>
+          <p:cNvSpPr txBox="1"/>
+          <p:nvPr/>
+        </p:nvSpPr>
+        <p:spPr>
+          <a:xfrm>
+            <a:off x="548640" y="1572768"/>
+            <a:ext cx="3291840" cy="219456"/>
+          </a:xfrm>
+          <a:prstGeom prst="rect">
+            <a:avLst/>
+          </a:prstGeom>
+          <a:noFill/>
+        </p:spPr>
+        <p:txBody>
+          <a:bodyPr wrap="square" lIns="0" rIns="0" tIns="0" bIns="0" anchor="t">
+            <a:spAutoFit/>
+          </a:bodyPr>
+          <a:lstStyle/>
+          <a:p>
+            <a:pPr algn="l">
+              <a:lnSpc>
+                <a:spcPct val="120000"/>
+              </a:lnSpc>
+              <a:spcAft>
+                <a:spcPts val="0"/>
+              </a:spcAft>
+            </a:pPr>
+            <a:r>
+              <a:rPr sz="900" b="1">
+                <a:solidFill>
+                  <a:srgbClr val="8792AC"/>
+                </a:solidFill>
+                <a:latin typeface="Calibri"/>
+              </a:rPr>
+              <a:t>TRAINED ON ASVSPOOF 2019, TESTED ON:</a:t>
+            </a:r>
+          </a:p>
+        </p:txBody>
+      </p:sp>
+      <p:sp>
+        <p:nvSpPr>
+          <p:cNvPr id="8" name="TextBox 7"/>
+          <p:cNvSpPr txBox="1"/>
+          <p:nvPr/>
+        </p:nvSpPr>
+        <p:spPr>
+          <a:xfrm>
+            <a:off x="548640" y="1883664"/>
+            <a:ext cx="3200400" cy="502920"/>
+          </a:xfrm>
+          <a:prstGeom prst="rect">
+            <a:avLst/>
+          </a:prstGeom>
+          <a:noFill/>
+        </p:spPr>
+        <p:txBody>
+          <a:bodyPr wrap="square" lIns="0" rIns="0" tIns="0" bIns="0" anchor="t">
+            <a:spAutoFit/>
+          </a:bodyPr>
+          <a:lstStyle/>
+          <a:p>
+            <a:pPr algn="l">
+              <a:lnSpc>
+                <a:spcPct val="120000"/>
+              </a:lnSpc>
+              <a:spcAft>
+                <a:spcPts val="100"/>
+              </a:spcAft>
+            </a:pPr>
+            <a:r>
+              <a:rPr sz="1400" b="1">
+                <a:solidFill>
+                  <a:srgbClr val="1B1F3B"/>
+                </a:solidFill>
+                <a:latin typeface="Calibri"/>
+              </a:rPr>
+              <a:t>its own test set</a:t>
+            </a:r>
+          </a:p>
+        </p:txBody>
+      </p:sp>
+      <p:sp>
+        <p:nvSpPr>
+          <p:cNvPr id="9" name="Rectangle 8"/>
+          <p:cNvSpPr/>
+          <p:nvPr/>
+        </p:nvSpPr>
+        <p:spPr>
+          <a:xfrm>
+            <a:off x="3977639" y="1901952"/>
+            <a:ext cx="144338" cy="365760"/>
+          </a:xfrm>
+          <a:prstGeom prst="rect">
+            <a:avLst/>
+          </a:prstGeom>
+          <a:solidFill>
+            <a:srgbClr val="1E2761"/>
+          </a:solidFill>
+          <a:ln>
+            <a:noFill/>
+          </a:ln>
+          <a:effectLst/>
+        </p:spPr>
+        <p:style>
+          <a:lnRef idx="1">
+            <a:schemeClr val="accent1"/>
+          </a:lnRef>
+          <a:fillRef idx="3">
+            <a:schemeClr val="accent1"/>
+          </a:fillRef>
+          <a:effectRef idx="2">
+            <a:schemeClr val="accent1"/>
+          </a:effectRef>
+          <a:fontRef idx="minor">
+            <a:schemeClr val="lt1"/>
+          </a:fontRef>
+        </p:style>
+        <p:txBody>
+          <a:bodyPr rtlCol="0" anchor="ctr"/>
+          <a:lstStyle/>
+          <a:p/>
+        </p:txBody>
+      </p:sp>
+      <p:sp>
+        <p:nvSpPr>
+          <p:cNvPr id="10" name="TextBox 9"/>
+          <p:cNvSpPr txBox="1"/>
+          <p:nvPr/>
+        </p:nvSpPr>
+        <p:spPr>
+          <a:xfrm>
+            <a:off x="4268282" y="1947672"/>
+            <a:ext cx="1371600" cy="274320"/>
+          </a:xfrm>
+          <a:prstGeom prst="rect">
+            <a:avLst/>
+          </a:prstGeom>
+          <a:noFill/>
+        </p:spPr>
+        <p:txBody>
+          <a:bodyPr wrap="square" lIns="0" rIns="0" tIns="0" bIns="0" anchor="t">
+            <a:spAutoFit/>
+          </a:bodyPr>
+          <a:lstStyle/>
+          <a:p>
+            <a:pPr algn="l">
+              <a:lnSpc>
+                <a:spcPct val="120000"/>
+              </a:lnSpc>
+              <a:spcAft>
+                <a:spcPts val="0"/>
+              </a:spcAft>
+            </a:pPr>
+            <a:r>
+              <a:rPr sz="1700" b="1">
+                <a:solidFill>
+                  <a:srgbClr val="1E2761"/>
+                </a:solidFill>
+                <a:latin typeface="Calibri"/>
+              </a:rPr>
+              <a:t>1.23%</a:t>
+            </a:r>
+          </a:p>
+        </p:txBody>
+      </p:sp>
+      <p:sp>
+        <p:nvSpPr>
+          <p:cNvPr id="11" name="TextBox 10"/>
+          <p:cNvSpPr txBox="1"/>
+          <p:nvPr/>
+        </p:nvSpPr>
+        <p:spPr>
+          <a:xfrm>
+            <a:off x="548640" y="2487168"/>
+            <a:ext cx="3200400" cy="502920"/>
+          </a:xfrm>
+          <a:prstGeom prst="rect">
+            <a:avLst/>
+          </a:prstGeom>
+          <a:noFill/>
+        </p:spPr>
+        <p:txBody>
+          <a:bodyPr wrap="square" lIns="0" rIns="0" tIns="0" bIns="0" anchor="t">
+            <a:spAutoFit/>
+          </a:bodyPr>
+          <a:lstStyle/>
+          <a:p>
+            <a:pPr algn="l">
+              <a:lnSpc>
+                <a:spcPct val="120000"/>
+              </a:lnSpc>
+              <a:spcAft>
+                <a:spcPts val="100"/>
+              </a:spcAft>
+            </a:pPr>
+            <a:r>
+              <a:rPr sz="1400" b="1">
+                <a:solidFill>
+                  <a:srgbClr val="1B1F3B"/>
+                </a:solidFill>
+                <a:latin typeface="Calibri"/>
+              </a:rPr>
+              <a:t>another corpus</a:t>
+            </a:r>
+          </a:p>
+          <a:p>
+            <a:pPr>
+              <a:lnSpc>
+                <a:spcPct val="120000"/>
+              </a:lnSpc>
+              <a:spcAft>
+                <a:spcPts val="0"/>
+              </a:spcAft>
+            </a:pPr>
+            <a:r>
+              <a:rPr sz="1000" b="0">
+                <a:solidFill>
+                  <a:srgbClr val="8792AC"/>
+                </a:solidFill>
+                <a:latin typeface="Calibri"/>
+              </a:rPr>
+              <a:t>In-the-Wild</a:t>
+            </a:r>
+          </a:p>
+        </p:txBody>
+      </p:sp>
+      <p:sp>
+        <p:nvSpPr>
+          <p:cNvPr id="12" name="Rectangle 11"/>
+          <p:cNvSpPr/>
+          <p:nvPr/>
+        </p:nvSpPr>
+        <p:spPr>
+          <a:xfrm>
+            <a:off x="3977639" y="2505456"/>
+            <a:ext cx="4359478" cy="365760"/>
+          </a:xfrm>
+          <a:prstGeom prst="rect">
+            <a:avLst/>
+          </a:prstGeom>
+          <a:solidFill>
+            <a:srgbClr val="E94F37"/>
+          </a:solidFill>
+          <a:ln>
+            <a:noFill/>
+          </a:ln>
+          <a:effectLst/>
+        </p:spPr>
+        <p:style>
+          <a:lnRef idx="1">
+            <a:schemeClr val="accent1"/>
+          </a:lnRef>
+          <a:fillRef idx="3">
+            <a:schemeClr val="accent1"/>
+          </a:fillRef>
+          <a:effectRef idx="2">
+            <a:schemeClr val="accent1"/>
+          </a:effectRef>
+          <a:fontRef idx="minor">
+            <a:schemeClr val="lt1"/>
+          </a:fontRef>
+        </p:style>
+        <p:txBody>
+          <a:bodyPr rtlCol="0" anchor="ctr"/>
+          <a:lstStyle/>
+          <a:p/>
+        </p:txBody>
+      </p:sp>
+      <p:sp>
+        <p:nvSpPr>
+          <p:cNvPr id="13" name="TextBox 12"/>
+          <p:cNvSpPr txBox="1"/>
+          <p:nvPr/>
+        </p:nvSpPr>
+        <p:spPr>
+          <a:xfrm>
+            <a:off x="8483422" y="2551176"/>
+            <a:ext cx="1371600" cy="274320"/>
+          </a:xfrm>
+          <a:prstGeom prst="rect">
+            <a:avLst/>
+          </a:prstGeom>
+          <a:noFill/>
+        </p:spPr>
+        <p:txBody>
+          <a:bodyPr wrap="square" lIns="0" rIns="0" tIns="0" bIns="0" anchor="t">
+            <a:spAutoFit/>
+          </a:bodyPr>
+          <a:lstStyle/>
+          <a:p>
+            <a:pPr algn="l">
+              <a:lnSpc>
+                <a:spcPct val="120000"/>
+              </a:lnSpc>
+              <a:spcAft>
+                <a:spcPts val="0"/>
+              </a:spcAft>
+            </a:pPr>
+            <a:r>
+              <a:rPr sz="1700" b="1">
+                <a:solidFill>
+                  <a:srgbClr val="E94F37"/>
+                </a:solidFill>
+                <a:latin typeface="Calibri"/>
+              </a:rPr>
+              <a:t>37.15%</a:t>
+            </a:r>
+          </a:p>
+        </p:txBody>
+      </p:sp>
+      <p:sp>
+        <p:nvSpPr>
+          <p:cNvPr id="14" name="TextBox 13"/>
+          <p:cNvSpPr txBox="1"/>
+          <p:nvPr/>
+        </p:nvSpPr>
+        <p:spPr>
+          <a:xfrm>
+            <a:off x="548640" y="3090672"/>
+            <a:ext cx="3200400" cy="502920"/>
+          </a:xfrm>
+          <a:prstGeom prst="rect">
+            <a:avLst/>
+          </a:prstGeom>
+          <a:noFill/>
+        </p:spPr>
+        <p:txBody>
+          <a:bodyPr wrap="square" lIns="0" rIns="0" tIns="0" bIns="0" anchor="t">
+            <a:spAutoFit/>
+          </a:bodyPr>
+          <a:lstStyle/>
+          <a:p>
+            <a:pPr algn="l">
+              <a:lnSpc>
+                <a:spcPct val="120000"/>
+              </a:lnSpc>
+              <a:spcAft>
+                <a:spcPts val="100"/>
+              </a:spcAft>
+            </a:pPr>
+            <a:r>
+              <a:rPr sz="1400" b="1">
+                <a:solidFill>
+                  <a:srgbClr val="1B1F3B"/>
+                </a:solidFill>
+                <a:latin typeface="Calibri"/>
+              </a:rPr>
+              <a:t>2026 cloned voices</a:t>
+            </a:r>
+          </a:p>
+          <a:p>
+            <a:pPr>
+              <a:lnSpc>
+                <a:spcPct val="120000"/>
+              </a:lnSpc>
+              <a:spcAft>
+                <a:spcPts val="0"/>
+              </a:spcAft>
+            </a:pPr>
+            <a:r>
+              <a:rPr sz="1000" b="0">
+                <a:solidFill>
+                  <a:srgbClr val="8792AC"/>
+                </a:solidFill>
+                <a:latin typeface="Calibri"/>
+              </a:rPr>
+              <a:t>over a real VoIP call</a:t>
+            </a:r>
+          </a:p>
+        </p:txBody>
+      </p:sp>
+      <p:sp>
+        <p:nvSpPr>
+          <p:cNvPr id="15" name="Rectangle 14"/>
+          <p:cNvSpPr/>
+          <p:nvPr/>
+        </p:nvSpPr>
+        <p:spPr>
+          <a:xfrm>
+            <a:off x="3977639" y="3108960"/>
+            <a:ext cx="5900257" cy="365760"/>
+          </a:xfrm>
+          <a:prstGeom prst="rect">
+            <a:avLst/>
+          </a:prstGeom>
+          <a:solidFill>
+            <a:srgbClr val="E94F37"/>
+          </a:solidFill>
+          <a:ln>
+            <a:noFill/>
+          </a:ln>
+          <a:effectLst/>
+        </p:spPr>
+        <p:style>
+          <a:lnRef idx="1">
+            <a:schemeClr val="accent1"/>
+          </a:lnRef>
+          <a:fillRef idx="3">
+            <a:schemeClr val="accent1"/>
+          </a:fillRef>
+          <a:effectRef idx="2">
+            <a:schemeClr val="accent1"/>
+          </a:effectRef>
+          <a:fontRef idx="minor">
+            <a:schemeClr val="lt1"/>
+          </a:fontRef>
+        </p:style>
+        <p:txBody>
+          <a:bodyPr rtlCol="0" anchor="ctr"/>
+          <a:lstStyle/>
+          <a:p/>
+        </p:txBody>
+      </p:sp>
+      <p:sp>
+        <p:nvSpPr>
+          <p:cNvPr id="16" name="TextBox 15"/>
+          <p:cNvSpPr txBox="1"/>
+          <p:nvPr/>
+        </p:nvSpPr>
+        <p:spPr>
+          <a:xfrm>
+            <a:off x="8643457" y="3163824"/>
+            <a:ext cx="1097280" cy="274320"/>
+          </a:xfrm>
+          <a:prstGeom prst="rect">
+            <a:avLst/>
+          </a:prstGeom>
+          <a:noFill/>
+        </p:spPr>
+        <p:txBody>
+          <a:bodyPr wrap="square" lIns="0" rIns="0" tIns="0" bIns="0" anchor="t">
+            <a:spAutoFit/>
+          </a:bodyPr>
+          <a:lstStyle/>
+          <a:p>
+            <a:pPr algn="r">
+              <a:lnSpc>
+                <a:spcPct val="120000"/>
+              </a:lnSpc>
+              <a:spcAft>
+                <a:spcPts val="0"/>
+              </a:spcAft>
+            </a:pPr>
+            <a:r>
+              <a:rPr sz="1700" b="1">
+                <a:solidFill>
+                  <a:srgbClr val="FFFFFF"/>
+                </a:solidFill>
+                <a:latin typeface="Calibri"/>
+              </a:rPr>
+              <a:t>50.28%</a:t>
+            </a:r>
+          </a:p>
+        </p:txBody>
+      </p:sp>
+      <p:cxnSp>
+        <p:nvCxnSpPr>
+          <p:cNvPr id="17" name="Connector 16"/>
+          <p:cNvCxnSpPr/>
+          <p:nvPr/>
+        </p:nvCxnSpPr>
+        <p:spPr>
+          <a:xfrm>
+            <a:off x="548640" y="3803904"/>
+            <a:ext cx="10469880" cy="0"/>
+          </a:xfrm>
+          <a:prstGeom prst="line">
+            <a:avLst/>
+          </a:prstGeom>
+          <a:ln w="12700">
+            <a:solidFill>
+              <a:srgbClr val="D8DEEC"/>
+            </a:solidFill>
+          </a:ln>
+        </p:spPr>
+        <p:style>
+          <a:lnRef idx="2">
+            <a:schemeClr val="accent1"/>
+          </a:lnRef>
+          <a:fillRef idx="0">
+            <a:schemeClr val="accent1"/>
+          </a:fillRef>
+          <a:effectRef idx="1">
+            <a:schemeClr val="accent1"/>
+          </a:effectRef>
+          <a:fontRef idx="minor">
+            <a:schemeClr val="tx1"/>
+          </a:fontRef>
+        </p:style>
+      </p:cxnSp>
+      <p:sp>
+        <p:nvSpPr>
+          <p:cNvPr id="18" name="TextBox 17"/>
+          <p:cNvSpPr txBox="1"/>
+          <p:nvPr/>
+        </p:nvSpPr>
+        <p:spPr>
+          <a:xfrm>
+            <a:off x="548640" y="3931920"/>
+            <a:ext cx="3200400" cy="502920"/>
+          </a:xfrm>
+          <a:prstGeom prst="rect">
+            <a:avLst/>
+          </a:prstGeom>
+          <a:noFill/>
+        </p:spPr>
+        <p:txBody>
+          <a:bodyPr wrap="square" lIns="0" rIns="0" tIns="0" bIns="0" anchor="t">
+            <a:spAutoFit/>
+          </a:bodyPr>
+          <a:lstStyle/>
+          <a:p>
+            <a:pPr algn="l">
+              <a:lnSpc>
+                <a:spcPct val="120000"/>
+              </a:lnSpc>
+              <a:spcAft>
+                <a:spcPts val="100"/>
+              </a:spcAft>
+            </a:pPr>
+            <a:r>
+              <a:rPr sz="1400" b="1">
+                <a:solidFill>
+                  <a:srgbClr val="1E2761"/>
+                </a:solidFill>
+                <a:latin typeface="Calibri"/>
+              </a:rPr>
+              <a:t>same test, retrained</a:t>
+            </a:r>
+          </a:p>
+          <a:p>
+            <a:pPr>
+              <a:lnSpc>
+                <a:spcPct val="120000"/>
+              </a:lnSpc>
+              <a:spcAft>
+                <a:spcPts val="0"/>
+              </a:spcAft>
+            </a:pPr>
+            <a:r>
+              <a:rPr sz="1000" b="0">
+                <a:solidFill>
+                  <a:srgbClr val="8792AC"/>
+                </a:solidFill>
+                <a:latin typeface="Calibri"/>
+              </a:rPr>
+              <a:t>on modern voices</a:t>
+            </a:r>
+          </a:p>
+        </p:txBody>
+      </p:sp>
+      <p:sp>
+        <p:nvSpPr>
+          <p:cNvPr id="19" name="Rectangle 18"/>
+          <p:cNvSpPr/>
+          <p:nvPr/>
+        </p:nvSpPr>
+        <p:spPr>
+          <a:xfrm>
+            <a:off x="3977639" y="3950208"/>
+            <a:ext cx="681791" cy="365760"/>
+          </a:xfrm>
+          <a:prstGeom prst="rect">
+            <a:avLst/>
+          </a:prstGeom>
+          <a:solidFill>
+            <a:srgbClr val="1E2761"/>
+          </a:solidFill>
+          <a:ln>
+            <a:noFill/>
+          </a:ln>
+          <a:effectLst/>
+        </p:spPr>
+        <p:style>
+          <a:lnRef idx="1">
+            <a:schemeClr val="accent1"/>
+          </a:lnRef>
+          <a:fillRef idx="3">
+            <a:schemeClr val="accent1"/>
+          </a:fillRef>
+          <a:effectRef idx="2">
+            <a:schemeClr val="accent1"/>
+          </a:effectRef>
+          <a:fontRef idx="minor">
+            <a:schemeClr val="lt1"/>
+          </a:fontRef>
+        </p:style>
+        <p:txBody>
+          <a:bodyPr rtlCol="0" anchor="ctr"/>
+          <a:lstStyle/>
+          <a:p/>
+        </p:txBody>
+      </p:sp>
+      <p:sp>
+        <p:nvSpPr>
+          <p:cNvPr id="20" name="TextBox 19"/>
+          <p:cNvSpPr txBox="1"/>
+          <p:nvPr/>
+        </p:nvSpPr>
+        <p:spPr>
+          <a:xfrm>
+            <a:off x="4805735" y="3995928"/>
+            <a:ext cx="3291840" cy="274320"/>
+          </a:xfrm>
+          <a:prstGeom prst="rect">
+            <a:avLst/>
+          </a:prstGeom>
+          <a:noFill/>
+        </p:spPr>
+        <p:txBody>
+          <a:bodyPr wrap="square" lIns="0" rIns="0" tIns="0" bIns="0" anchor="t">
+            <a:spAutoFit/>
+          </a:bodyPr>
+          <a:lstStyle/>
+          <a:p>
+            <a:pPr algn="l">
+              <a:lnSpc>
+                <a:spcPct val="120000"/>
+              </a:lnSpc>
+              <a:spcAft>
+                <a:spcPts val="0"/>
+              </a:spcAft>
+            </a:pPr>
+            <a:r>
+              <a:rPr sz="1700" b="1">
+                <a:solidFill>
+                  <a:srgbClr val="1E2761"/>
+                </a:solidFill>
+                <a:latin typeface="Calibri"/>
+              </a:rPr>
+              <a:t>5.81%</a:t>
+            </a:r>
+            <a:r>
+              <a:rPr sz="1300" b="0">
+                <a:solidFill>
+                  <a:srgbClr val="8792AC"/>
+                </a:solidFill>
+                <a:latin typeface="Calibri"/>
+              </a:rPr>
+              <a:t>    so it can be fixed</a:t>
+            </a:r>
+          </a:p>
+        </p:txBody>
+      </p:sp>
+      <p:cxnSp>
+        <p:nvCxnSpPr>
+          <p:cNvPr id="21" name="Connector 20"/>
+          <p:cNvCxnSpPr/>
+          <p:nvPr/>
+        </p:nvCxnSpPr>
+        <p:spPr>
+          <a:xfrm>
+            <a:off x="3977639" y="4498848"/>
+            <a:ext cx="7040881" cy="0"/>
+          </a:xfrm>
+          <a:prstGeom prst="line">
+            <a:avLst/>
+          </a:prstGeom>
+          <a:ln w="12700">
+            <a:solidFill>
+              <a:srgbClr val="D8DEEC"/>
+            </a:solidFill>
+          </a:ln>
+        </p:spPr>
+        <p:style>
+          <a:lnRef idx="2">
+            <a:schemeClr val="accent1"/>
+          </a:lnRef>
+          <a:fillRef idx="0">
+            <a:schemeClr val="accent1"/>
+          </a:fillRef>
+          <a:effectRef idx="1">
+            <a:schemeClr val="accent1"/>
+          </a:effectRef>
+          <a:fontRef idx="minor">
+            <a:schemeClr val="tx1"/>
+          </a:fontRef>
+        </p:style>
+      </p:cxnSp>
+      <p:sp>
+        <p:nvSpPr>
+          <p:cNvPr id="22" name="TextBox 21"/>
+          <p:cNvSpPr txBox="1"/>
+          <p:nvPr/>
+        </p:nvSpPr>
+        <p:spPr>
+          <a:xfrm>
+            <a:off x="3611879" y="4553712"/>
+            <a:ext cx="731520" cy="219456"/>
+          </a:xfrm>
+          <a:prstGeom prst="rect">
+            <a:avLst/>
+          </a:prstGeom>
+          <a:noFill/>
+        </p:spPr>
+        <p:txBody>
+          <a:bodyPr wrap="square" lIns="0" rIns="0" tIns="0" bIns="0" anchor="t">
+            <a:spAutoFit/>
+          </a:bodyPr>
+          <a:lstStyle/>
+          <a:p>
+            <a:pPr algn="ctr">
+              <a:lnSpc>
+                <a:spcPct val="120000"/>
+              </a:lnSpc>
+              <a:spcAft>
+                <a:spcPts val="0"/>
+              </a:spcAft>
+            </a:pPr>
+            <a:r>
+              <a:rPr sz="900" b="0">
+                <a:solidFill>
+                  <a:srgbClr val="8792AC"/>
+                </a:solidFill>
+                <a:latin typeface="Calibri"/>
+              </a:rPr>
+              <a:t>0%</a:t>
+            </a:r>
+          </a:p>
+        </p:txBody>
+      </p:sp>
+      <p:sp>
+        <p:nvSpPr>
+          <p:cNvPr id="23" name="TextBox 22"/>
+          <p:cNvSpPr txBox="1"/>
+          <p:nvPr/>
+        </p:nvSpPr>
+        <p:spPr>
+          <a:xfrm>
+            <a:off x="5372100" y="4553712"/>
+            <a:ext cx="731520" cy="219456"/>
+          </a:xfrm>
+          <a:prstGeom prst="rect">
+            <a:avLst/>
+          </a:prstGeom>
+          <a:noFill/>
+        </p:spPr>
+        <p:txBody>
+          <a:bodyPr wrap="square" lIns="0" rIns="0" tIns="0" bIns="0" anchor="t">
+            <a:spAutoFit/>
+          </a:bodyPr>
+          <a:lstStyle/>
+          <a:p>
+            <a:pPr algn="ctr">
+              <a:lnSpc>
+                <a:spcPct val="120000"/>
+              </a:lnSpc>
+              <a:spcAft>
+                <a:spcPts val="0"/>
+              </a:spcAft>
+            </a:pPr>
+            <a:r>
+              <a:rPr sz="900" b="0">
+                <a:solidFill>
+                  <a:srgbClr val="8792AC"/>
+                </a:solidFill>
+                <a:latin typeface="Calibri"/>
+              </a:rPr>
+              <a:t>15%</a:t>
+            </a:r>
+          </a:p>
+        </p:txBody>
+      </p:sp>
+      <p:sp>
+        <p:nvSpPr>
+          <p:cNvPr id="24" name="TextBox 23"/>
+          <p:cNvSpPr txBox="1"/>
+          <p:nvPr/>
+        </p:nvSpPr>
+        <p:spPr>
+          <a:xfrm>
+            <a:off x="7132319" y="4553712"/>
+            <a:ext cx="731520" cy="219456"/>
+          </a:xfrm>
+          <a:prstGeom prst="rect">
+            <a:avLst/>
+          </a:prstGeom>
+          <a:noFill/>
+        </p:spPr>
+        <p:txBody>
+          <a:bodyPr wrap="square" lIns="0" rIns="0" tIns="0" bIns="0" anchor="t">
+            <a:spAutoFit/>
+          </a:bodyPr>
+          <a:lstStyle/>
+          <a:p>
+            <a:pPr algn="ctr">
+              <a:lnSpc>
+                <a:spcPct val="120000"/>
+              </a:lnSpc>
+              <a:spcAft>
+                <a:spcPts val="0"/>
+              </a:spcAft>
+            </a:pPr>
+            <a:r>
+              <a:rPr sz="900" b="0">
+                <a:solidFill>
+                  <a:srgbClr val="8792AC"/>
+                </a:solidFill>
+                <a:latin typeface="Calibri"/>
+              </a:rPr>
+              <a:t>30%</a:t>
+            </a:r>
+          </a:p>
+        </p:txBody>
+      </p:sp>
+      <p:sp>
+        <p:nvSpPr>
+          <p:cNvPr id="25" name="TextBox 24"/>
+          <p:cNvSpPr txBox="1"/>
+          <p:nvPr/>
+        </p:nvSpPr>
+        <p:spPr>
+          <a:xfrm>
+            <a:off x="8892540" y="4553712"/>
+            <a:ext cx="731520" cy="219456"/>
+          </a:xfrm>
+          <a:prstGeom prst="rect">
+            <a:avLst/>
+          </a:prstGeom>
+          <a:noFill/>
+        </p:spPr>
+        <p:txBody>
+          <a:bodyPr wrap="square" lIns="0" rIns="0" tIns="0" bIns="0" anchor="t">
+            <a:spAutoFit/>
+          </a:bodyPr>
+          <a:lstStyle/>
+          <a:p>
+            <a:pPr algn="ctr">
+              <a:lnSpc>
+                <a:spcPct val="120000"/>
+              </a:lnSpc>
+              <a:spcAft>
+                <a:spcPts val="0"/>
+              </a:spcAft>
+            </a:pPr>
+            <a:r>
+              <a:rPr sz="900" b="0">
+                <a:solidFill>
+                  <a:srgbClr val="8792AC"/>
+                </a:solidFill>
+                <a:latin typeface="Calibri"/>
+              </a:rPr>
+              <a:t>45%</a:t>
+            </a:r>
+          </a:p>
+        </p:txBody>
+      </p:sp>
+      <p:sp>
+        <p:nvSpPr>
+          <p:cNvPr id="26" name="TextBox 25"/>
+          <p:cNvSpPr txBox="1"/>
+          <p:nvPr/>
+        </p:nvSpPr>
+        <p:spPr>
+          <a:xfrm>
+            <a:off x="10652760" y="4553712"/>
+            <a:ext cx="731520" cy="219456"/>
+          </a:xfrm>
+          <a:prstGeom prst="rect">
+            <a:avLst/>
+          </a:prstGeom>
+          <a:noFill/>
+        </p:spPr>
+        <p:txBody>
+          <a:bodyPr wrap="square" lIns="0" rIns="0" tIns="0" bIns="0" anchor="t">
+            <a:spAutoFit/>
+          </a:bodyPr>
+          <a:lstStyle/>
+          <a:p>
+            <a:pPr algn="ctr">
+              <a:lnSpc>
+                <a:spcPct val="120000"/>
+              </a:lnSpc>
+              <a:spcAft>
+                <a:spcPts val="0"/>
+              </a:spcAft>
+            </a:pPr>
+            <a:r>
+              <a:rPr sz="900" b="0">
+                <a:solidFill>
+                  <a:srgbClr val="8792AC"/>
+                </a:solidFill>
+                <a:latin typeface="Calibri"/>
+              </a:rPr>
+              <a:t>60%</a:t>
+            </a:r>
+          </a:p>
+        </p:txBody>
+      </p:sp>
+      <p:sp>
+        <p:nvSpPr>
+          <p:cNvPr id="27" name="TextBox 26"/>
+          <p:cNvSpPr txBox="1"/>
+          <p:nvPr/>
+        </p:nvSpPr>
+        <p:spPr>
+          <a:xfrm>
+            <a:off x="548640" y="4553712"/>
+            <a:ext cx="3200400" cy="219456"/>
+          </a:xfrm>
+          <a:prstGeom prst="rect">
+            <a:avLst/>
+          </a:prstGeom>
+          <a:noFill/>
+        </p:spPr>
+        <p:txBody>
+          <a:bodyPr wrap="square" lIns="0" rIns="0" tIns="0" bIns="0" anchor="t">
+            <a:spAutoFit/>
+          </a:bodyPr>
+          <a:lstStyle/>
+          <a:p>
+            <a:pPr algn="l">
+              <a:lnSpc>
+                <a:spcPct val="120000"/>
+              </a:lnSpc>
+              <a:spcAft>
+                <a:spcPts val="0"/>
+              </a:spcAft>
+            </a:pPr>
+            <a:r>
+              <a:rPr sz="900" b="0">
+                <a:solidFill>
+                  <a:srgbClr val="8792AC"/>
+                </a:solidFill>
+                <a:latin typeface="Calibri"/>
+              </a:rPr>
+              <a:t>equal error rate, lower is better</a:t>
+            </a:r>
+          </a:p>
+        </p:txBody>
+      </p:sp>
+      <p:sp>
+        <p:nvSpPr>
+          <p:cNvPr id="28" name="Rectangle 27"/>
+          <p:cNvSpPr/>
+          <p:nvPr/>
+        </p:nvSpPr>
+        <p:spPr>
+          <a:xfrm>
+            <a:off x="548640" y="5074920"/>
+            <a:ext cx="11091672" cy="868680"/>
+          </a:xfrm>
+          <a:prstGeom prst="rect">
+            <a:avLst/>
+          </a:prstGeom>
+          <a:solidFill>
+            <a:srgbClr val="F4F6FC"/>
+          </a:solidFill>
+          <a:ln>
+            <a:noFill/>
+          </a:ln>
+          <a:effectLst/>
+        </p:spPr>
+        <p:style>
+          <a:lnRef idx="1">
+            <a:schemeClr val="accent1"/>
+          </a:lnRef>
+          <a:fillRef idx="3">
+            <a:schemeClr val="accent1"/>
+          </a:fillRef>
+          <a:effectRef idx="2">
+            <a:schemeClr val="accent1"/>
+          </a:effectRef>
+          <a:fontRef idx="minor">
+            <a:schemeClr val="lt1"/>
+          </a:fontRef>
+        </p:style>
+        <p:txBody>
+          <a:bodyPr rtlCol="0" anchor="ctr"/>
+          <a:lstStyle/>
+          <a:p/>
+        </p:txBody>
+      </p:sp>
+      <p:sp>
+        <p:nvSpPr>
+          <p:cNvPr id="29" name="Rectangle 28"/>
+          <p:cNvSpPr/>
+          <p:nvPr/>
+        </p:nvSpPr>
+        <p:spPr>
+          <a:xfrm>
+            <a:off x="548640" y="5074920"/>
+            <a:ext cx="41148" cy="868680"/>
+          </a:xfrm>
+          <a:prstGeom prst="rect">
+            <a:avLst/>
+          </a:prstGeom>
+          <a:solidFill>
+            <a:srgbClr val="E94F37"/>
+          </a:solidFill>
+          <a:ln>
+            <a:noFill/>
+          </a:ln>
+          <a:effectLst/>
+        </p:spPr>
+        <p:style>
+          <a:lnRef idx="1">
+            <a:schemeClr val="accent1"/>
+          </a:lnRef>
+          <a:fillRef idx="3">
+            <a:schemeClr val="accent1"/>
+          </a:fillRef>
+          <a:effectRef idx="2">
+            <a:schemeClr val="accent1"/>
+          </a:effectRef>
+          <a:fontRef idx="minor">
+            <a:schemeClr val="lt1"/>
+          </a:fontRef>
+        </p:style>
+        <p:txBody>
+          <a:bodyPr rtlCol="0" anchor="ctr"/>
+          <a:lstStyle/>
+          <a:p/>
+        </p:txBody>
+      </p:sp>
+      <p:sp>
+        <p:nvSpPr>
+          <p:cNvPr id="30" name="TextBox 29"/>
+          <p:cNvSpPr txBox="1"/>
+          <p:nvPr/>
+        </p:nvSpPr>
+        <p:spPr>
+          <a:xfrm>
+            <a:off x="868680" y="5230368"/>
+            <a:ext cx="10515600" cy="566928"/>
+          </a:xfrm>
+          <a:prstGeom prst="rect">
+            <a:avLst/>
+          </a:prstGeom>
+          <a:noFill/>
+        </p:spPr>
+        <p:txBody>
+          <a:bodyPr wrap="square" lIns="0" rIns="0" tIns="0" bIns="0" anchor="ctr">
+            <a:spAutoFit/>
+          </a:bodyPr>
+          <a:lstStyle/>
+          <a:p>
+            <a:pPr algn="l">
+              <a:lnSpc>
+                <a:spcPct val="125000"/>
+              </a:lnSpc>
+              <a:spcAft>
+                <a:spcPts val="0"/>
+              </a:spcAft>
+            </a:pPr>
+            <a:r>
+              <a:rPr sz="1400" b="0">
+                <a:solidFill>
+                  <a:srgbClr val="44506B"/>
+                </a:solidFill>
+                <a:latin typeface="Calibri"/>
+              </a:rPr>
+              <a:t>A 36-point gap between the benchmark and anything else. </a:t>
+            </a:r>
+            <a:r>
+              <a:rPr sz="1400" b="1">
+                <a:solidFill>
+                  <a:srgbClr val="1B1F3B"/>
+                </a:solidFill>
+                <a:latin typeface="Calibri"/>
+              </a:rPr>
+              <a:t>Closing that gap is what we are building.</a:t>
+            </a:r>
+          </a:p>
+        </p:txBody>
+      </p:sp>
+    </p:spTree>
+  </p:cSld>
+  <p:clrMapOvr>
+    <a:masterClrMapping/>
+  </p:clrMapOvr>
+</p:sld>
+</file>
+
+<file path=ppt/slides/slide4.xml><?xml version="1.0" encoding="utf-8"?>
+<p:sld xmlns:a="http://schemas.openxmlformats.org/drawingml/2006/main" xmlns:p="http://schemas.openxmlformats.org/presentationml/2006/main" xmlns:r="http://schemas.openxmlformats.org/officeDocument/2006/relationships">
+  <p:cSld>
+    <p:spTree>
+      <p:nvGrpSpPr>
+        <p:cNvPr id="1" name=""/>
+        <p:cNvGrpSpPr/>
+        <p:nvPr/>
+      </p:nvGrpSpPr>
+      <p:grpSpPr/>
+      <p:sp>
+        <p:nvSpPr>
+          <p:cNvPr id="2" name="TextBox 1"/>
+          <p:cNvSpPr txBox="1"/>
+          <p:nvPr/>
+        </p:nvSpPr>
+        <p:spPr>
+          <a:xfrm>
+            <a:off x="548640" y="365760"/>
+            <a:ext cx="9144000" cy="274320"/>
+          </a:xfrm>
+          <a:prstGeom prst="rect">
+            <a:avLst/>
+          </a:prstGeom>
+          <a:noFill/>
+        </p:spPr>
+        <p:txBody>
+          <a:bodyPr wrap="square" lIns="0" rIns="0" tIns="0" bIns="0" anchor="t">
+            <a:spAutoFit/>
+          </a:bodyPr>
+          <a:lstStyle/>
+          <a:p>
+            <a:pPr algn="l">
+              <a:lnSpc>
+                <a:spcPct val="120000"/>
+              </a:lnSpc>
+              <a:spcAft>
+                <a:spcPts val="0"/>
+              </a:spcAft>
+            </a:pPr>
+            <a:r>
+              <a:rPr sz="1200" b="1">
+                <a:solidFill>
+                  <a:srgbClr val="E94F37"/>
+                </a:solidFill>
+                <a:latin typeface="Calibri"/>
+              </a:rPr>
+              <a:t>DIAGNOSIS</a:t>
+            </a:r>
+          </a:p>
+        </p:txBody>
+      </p:sp>
+      <p:sp>
+        <p:nvSpPr>
+          <p:cNvPr id="3" name="TextBox 2"/>
+          <p:cNvSpPr txBox="1"/>
+          <p:nvPr/>
+        </p:nvSpPr>
+        <p:spPr>
+          <a:xfrm>
+            <a:off x="548640" y="621792"/>
+            <a:ext cx="11155680" cy="777240"/>
+          </a:xfrm>
+          <a:prstGeom prst="rect">
+            <a:avLst/>
+          </a:prstGeom>
+          <a:noFill/>
+        </p:spPr>
+        <p:txBody>
+          <a:bodyPr wrap="square" lIns="0" rIns="0" tIns="0" bIns="0" anchor="t">
+            <a:spAutoFit/>
+          </a:bodyPr>
+          <a:lstStyle/>
+          <a:p>
+            <a:pPr algn="l">
+              <a:lnSpc>
+                <a:spcPct val="110000"/>
+              </a:lnSpc>
+              <a:spcAft>
+                <a:spcPts val="0"/>
+              </a:spcAft>
+            </a:pPr>
+            <a:r>
+              <a:rPr sz="3000" b="1">
+                <a:solidFill>
+                  <a:srgbClr val="1B1F3B"/>
+                </a:solidFill>
+                <a:latin typeface="Cambria"/>
+              </a:rPr>
+              <a:t>It learns the dataset, not the voice</a:t>
+            </a:r>
+          </a:p>
+        </p:txBody>
+      </p:sp>
+      <p:sp>
+        <p:nvSpPr>
+          <p:cNvPr id="4" name="TextBox 3"/>
+          <p:cNvSpPr txBox="1"/>
+          <p:nvPr/>
+        </p:nvSpPr>
+        <p:spPr>
+          <a:xfrm>
+            <a:off x="457200" y="6537960"/>
+            <a:ext cx="8229600" cy="274320"/>
+          </a:xfrm>
+          <a:prstGeom prst="rect">
+            <a:avLst/>
+          </a:prstGeom>
+          <a:noFill/>
+        </p:spPr>
+        <p:txBody>
+          <a:bodyPr wrap="square" lIns="0" rIns="0" tIns="0" bIns="0" anchor="t">
+            <a:spAutoFit/>
+          </a:bodyPr>
+          <a:lstStyle/>
+          <a:p>
+            <a:pPr algn="l">
+              <a:lnSpc>
+                <a:spcPct val="120000"/>
+              </a:lnSpc>
+              <a:spcAft>
+                <a:spcPts val="0"/>
+              </a:spcAft>
+            </a:pPr>
+            <a:r>
+              <a:rPr sz="900" b="0">
+                <a:solidFill>
+                  <a:srgbClr val="8792AC"/>
+                </a:solidFill>
+                <a:latin typeface="Calibri"/>
+              </a:rPr>
+              <a:t>Vishing Challenge  |  Deepfake Voice Detection for Anti-Vishing Systems</a:t>
+            </a:r>
+          </a:p>
+        </p:txBody>
+      </p:sp>
+      <p:sp>
+        <p:nvSpPr>
+          <p:cNvPr id="5" name="TextBox 4"/>
+          <p:cNvSpPr txBox="1"/>
+          <p:nvPr/>
+        </p:nvSpPr>
+        <p:spPr>
+          <a:xfrm>
+            <a:off x="548640" y="1481328"/>
+            <a:ext cx="11091672" cy="457200"/>
+          </a:xfrm>
+          <a:prstGeom prst="rect">
+            <a:avLst/>
+          </a:prstGeom>
+          <a:noFill/>
+        </p:spPr>
+        <p:txBody>
+          <a:bodyPr wrap="square" lIns="0" rIns="0" tIns="0" bIns="0" anchor="t">
+            <a:spAutoFit/>
+          </a:bodyPr>
+          <a:lstStyle/>
+          <a:p>
+            <a:pPr algn="l">
+              <a:lnSpc>
+                <a:spcPct val="130000"/>
+              </a:lnSpc>
+              <a:spcAft>
+                <a:spcPts val="0"/>
+              </a:spcAft>
+            </a:pPr>
+            <a:r>
+              <a:rPr sz="1300" b="0">
+                <a:solidFill>
+                  <a:srgbClr val="44506B"/>
+                </a:solidFill>
+                <a:latin typeface="Calibri"/>
+              </a:rPr>
+              <a:t>Before choosing an architecture we asked what the failing detectors are actually keying on. The answer explains the collapse, and it tells us what to remove during training.</a:t>
+            </a:r>
+          </a:p>
+        </p:txBody>
+      </p:sp>
+      <p:sp>
+        <p:nvSpPr>
+          <p:cNvPr id="6" name="Rectangle 5"/>
+          <p:cNvSpPr/>
+          <p:nvPr/>
+        </p:nvSpPr>
+        <p:spPr>
+          <a:xfrm>
+            <a:off x="548640" y="2212848"/>
+            <a:ext cx="3483864" cy="2240280"/>
+          </a:xfrm>
+          <a:prstGeom prst="rect">
+            <a:avLst/>
+          </a:prstGeom>
+          <a:solidFill>
+            <a:srgbClr val="F4F6FC"/>
+          </a:solidFill>
+          <a:ln>
+            <a:noFill/>
+          </a:ln>
+          <a:effectLst/>
+        </p:spPr>
+        <p:style>
+          <a:lnRef idx="1">
+            <a:schemeClr val="accent1"/>
+          </a:lnRef>
+          <a:fillRef idx="3">
+            <a:schemeClr val="accent1"/>
+          </a:fillRef>
+          <a:effectRef idx="2">
+            <a:schemeClr val="accent1"/>
+          </a:effectRef>
+          <a:fontRef idx="minor">
+            <a:schemeClr val="lt1"/>
+          </a:fontRef>
+        </p:style>
+        <p:txBody>
+          <a:bodyPr rtlCol="0" anchor="ctr"/>
+          <a:lstStyle/>
+          <a:p/>
+        </p:txBody>
+      </p:sp>
+      <p:sp>
+        <p:nvSpPr>
+          <p:cNvPr id="7" name="TextBox 6"/>
+          <p:cNvSpPr txBox="1"/>
+          <p:nvPr/>
+        </p:nvSpPr>
+        <p:spPr>
+          <a:xfrm>
+            <a:off x="804672" y="2432304"/>
+            <a:ext cx="2971800" cy="1783080"/>
+          </a:xfrm>
+          <a:prstGeom prst="rect">
+            <a:avLst/>
+          </a:prstGeom>
+          <a:noFill/>
+        </p:spPr>
+        <p:txBody>
+          <a:bodyPr wrap="square" lIns="0" rIns="0" tIns="0" bIns="0" anchor="t">
+            <a:spAutoFit/>
+          </a:bodyPr>
+          <a:lstStyle/>
+          <a:p>
+            <a:pPr algn="l">
+              <a:lnSpc>
+                <a:spcPct val="120000"/>
+              </a:lnSpc>
+              <a:spcAft>
+                <a:spcPts val="1000"/>
+              </a:spcAft>
+            </a:pPr>
+            <a:r>
+              <a:rPr sz="1000" b="1">
+                <a:solidFill>
+                  <a:srgbClr val="8792AC"/>
+                </a:solidFill>
+                <a:latin typeface="Calibri"/>
+              </a:rPr>
+              <a:t>SILENCE ALONE</a:t>
+            </a:r>
+          </a:p>
+          <a:p>
+            <a:pPr>
+              <a:lnSpc>
+                <a:spcPct val="100000"/>
+              </a:lnSpc>
+              <a:spcAft>
+                <a:spcPts val="1200"/>
+              </a:spcAft>
+            </a:pPr>
+            <a:r>
+              <a:rPr sz="3400" b="1">
+                <a:solidFill>
+                  <a:srgbClr val="E94F37"/>
+                </a:solidFill>
+                <a:latin typeface="Calibri"/>
+              </a:rPr>
+              <a:t>85%</a:t>
+            </a:r>
+          </a:p>
+          <a:p>
+            <a:pPr>
+              <a:lnSpc>
+                <a:spcPct val="130000"/>
+              </a:lnSpc>
+              <a:spcAft>
+                <a:spcPts val="1000"/>
+              </a:spcAft>
+            </a:pPr>
+            <a:r>
+              <a:rPr sz="1250" b="0">
+                <a:solidFill>
+                  <a:srgbClr val="44506B"/>
+                </a:solidFill>
+                <a:latin typeface="Calibri"/>
+              </a:rPr>
+              <a:t>accuracy from a classifier given only the length of the opening silence</a:t>
+            </a:r>
+          </a:p>
+          <a:p>
+            <a:pPr>
+              <a:lnSpc>
+                <a:spcPct val="120000"/>
+              </a:lnSpc>
+              <a:spcAft>
+                <a:spcPts val="0"/>
+              </a:spcAft>
+            </a:pPr>
+            <a:r>
+              <a:rPr sz="900" b="0">
+                <a:solidFill>
+                  <a:srgbClr val="8792AC"/>
+                </a:solidFill>
+                <a:latin typeface="Calibri"/>
+              </a:rPr>
+              <a:t>Muller et al.</a:t>
+            </a:r>
+          </a:p>
+        </p:txBody>
+      </p:sp>
+      <p:sp>
+        <p:nvSpPr>
+          <p:cNvPr id="8" name="Rectangle 7"/>
+          <p:cNvSpPr/>
+          <p:nvPr/>
+        </p:nvSpPr>
+        <p:spPr>
+          <a:xfrm>
+            <a:off x="4352544" y="2212848"/>
+            <a:ext cx="3483864" cy="2240280"/>
+          </a:xfrm>
+          <a:prstGeom prst="rect">
+            <a:avLst/>
+          </a:prstGeom>
+          <a:solidFill>
+            <a:srgbClr val="F4F6FC"/>
+          </a:solidFill>
+          <a:ln>
+            <a:noFill/>
+          </a:ln>
+          <a:effectLst/>
+        </p:spPr>
+        <p:style>
+          <a:lnRef idx="1">
+            <a:schemeClr val="accent1"/>
+          </a:lnRef>
+          <a:fillRef idx="3">
+            <a:schemeClr val="accent1"/>
+          </a:fillRef>
+          <a:effectRef idx="2">
+            <a:schemeClr val="accent1"/>
+          </a:effectRef>
+          <a:fontRef idx="minor">
+            <a:schemeClr val="lt1"/>
+          </a:fontRef>
+        </p:style>
+        <p:txBody>
+          <a:bodyPr rtlCol="0" anchor="ctr"/>
+          <a:lstStyle/>
+          <a:p/>
+        </p:txBody>
+      </p:sp>
+      <p:sp>
+        <p:nvSpPr>
+          <p:cNvPr id="9" name="TextBox 8"/>
+          <p:cNvSpPr txBox="1"/>
+          <p:nvPr/>
+        </p:nvSpPr>
+        <p:spPr>
+          <a:xfrm>
+            <a:off x="4608576" y="2432304"/>
+            <a:ext cx="2971800" cy="1783080"/>
+          </a:xfrm>
+          <a:prstGeom prst="rect">
+            <a:avLst/>
+          </a:prstGeom>
+          <a:noFill/>
+        </p:spPr>
+        <p:txBody>
+          <a:bodyPr wrap="square" lIns="0" rIns="0" tIns="0" bIns="0" anchor="t">
+            <a:spAutoFit/>
+          </a:bodyPr>
+          <a:lstStyle/>
+          <a:p>
+            <a:pPr algn="l">
+              <a:lnSpc>
+                <a:spcPct val="120000"/>
+              </a:lnSpc>
+              <a:spcAft>
+                <a:spcPts val="1000"/>
+              </a:spcAft>
+            </a:pPr>
+            <a:r>
+              <a:rPr sz="1000" b="1">
+                <a:solidFill>
+                  <a:srgbClr val="8792AC"/>
+                </a:solidFill>
+                <a:latin typeface="Calibri"/>
+              </a:rPr>
+              <a:t>ATTACK ON SILENCE ONLY</a:t>
+            </a:r>
+          </a:p>
+          <a:p>
+            <a:pPr>
+              <a:lnSpc>
+                <a:spcPct val="100000"/>
+              </a:lnSpc>
+              <a:spcAft>
+                <a:spcPts val="1200"/>
+              </a:spcAft>
+            </a:pPr>
+            <a:r>
+              <a:rPr sz="3400" b="1">
+                <a:solidFill>
+                  <a:srgbClr val="E94F37"/>
+                </a:solidFill>
+                <a:latin typeface="Calibri"/>
+              </a:rPr>
+              <a:t>82.2%</a:t>
+            </a:r>
+          </a:p>
+          <a:p>
+            <a:pPr>
+              <a:lnSpc>
+                <a:spcPct val="130000"/>
+              </a:lnSpc>
+              <a:spcAft>
+                <a:spcPts val="1000"/>
+              </a:spcAft>
+            </a:pPr>
+            <a:r>
+              <a:rPr sz="1250" b="0">
+                <a:solidFill>
+                  <a:srgbClr val="44506B"/>
+                </a:solidFill>
+                <a:latin typeface="Calibri"/>
+              </a:rPr>
+              <a:t>attack success from changing only the background noise and the mute segments, never the voice</a:t>
+            </a:r>
+          </a:p>
+          <a:p>
+            <a:pPr>
+              <a:lnSpc>
+                <a:spcPct val="120000"/>
+              </a:lnSpc>
+              <a:spcAft>
+                <a:spcPts val="0"/>
+              </a:spcAft>
+            </a:pPr>
+            <a:r>
+              <a:rPr sz="900" b="0">
+                <a:solidFill>
+                  <a:srgbClr val="8792AC"/>
+                </a:solidFill>
+                <a:latin typeface="Calibri"/>
+              </a:rPr>
+              <a:t>SiFDetectCracker, ACM MM 2023</a:t>
+            </a:r>
+          </a:p>
+        </p:txBody>
+      </p:sp>
+      <p:sp>
+        <p:nvSpPr>
+          <p:cNvPr id="10" name="Rectangle 9"/>
+          <p:cNvSpPr/>
+          <p:nvPr/>
+        </p:nvSpPr>
+        <p:spPr>
+          <a:xfrm>
+            <a:off x="8156448" y="2212848"/>
+            <a:ext cx="3483864" cy="2240280"/>
+          </a:xfrm>
+          <a:prstGeom prst="rect">
+            <a:avLst/>
+          </a:prstGeom>
+          <a:solidFill>
+            <a:srgbClr val="F4F6FC"/>
+          </a:solidFill>
+          <a:ln>
+            <a:noFill/>
+          </a:ln>
+          <a:effectLst/>
+        </p:spPr>
+        <p:style>
+          <a:lnRef idx="1">
+            <a:schemeClr val="accent1"/>
+          </a:lnRef>
+          <a:fillRef idx="3">
+            <a:schemeClr val="accent1"/>
+          </a:fillRef>
+          <a:effectRef idx="2">
+            <a:schemeClr val="accent1"/>
+          </a:effectRef>
+          <a:fontRef idx="minor">
+            <a:schemeClr val="lt1"/>
+          </a:fontRef>
+        </p:style>
+        <p:txBody>
+          <a:bodyPr rtlCol="0" anchor="ctr"/>
+          <a:lstStyle/>
+          <a:p/>
+        </p:txBody>
+      </p:sp>
+      <p:sp>
+        <p:nvSpPr>
+          <p:cNvPr id="11" name="TextBox 10"/>
+          <p:cNvSpPr txBox="1"/>
+          <p:nvPr/>
+        </p:nvSpPr>
+        <p:spPr>
+          <a:xfrm>
+            <a:off x="8412480" y="2432304"/>
+            <a:ext cx="2971800" cy="1783080"/>
+          </a:xfrm>
+          <a:prstGeom prst="rect">
+            <a:avLst/>
+          </a:prstGeom>
+          <a:noFill/>
+        </p:spPr>
+        <p:txBody>
+          <a:bodyPr wrap="square" lIns="0" rIns="0" tIns="0" bIns="0" anchor="t">
+            <a:spAutoFit/>
+          </a:bodyPr>
+          <a:lstStyle/>
+          <a:p>
+            <a:pPr algn="l">
+              <a:lnSpc>
+                <a:spcPct val="120000"/>
+              </a:lnSpc>
+              <a:spcAft>
+                <a:spcPts val="1000"/>
+              </a:spcAft>
+            </a:pPr>
+            <a:r>
+              <a:rPr sz="1000" b="1">
+                <a:solidFill>
+                  <a:srgbClr val="8792AC"/>
+                </a:solidFill>
+                <a:latin typeface="Calibri"/>
+              </a:rPr>
+              <a:t>WHERE IT LOOKS</a:t>
+            </a:r>
+          </a:p>
+          <a:p>
+            <a:pPr>
+              <a:lnSpc>
+                <a:spcPct val="100000"/>
+              </a:lnSpc>
+              <a:spcAft>
+                <a:spcPts val="1200"/>
+              </a:spcAft>
+            </a:pPr>
+            <a:r>
+              <a:rPr sz="3400" b="1">
+                <a:solidFill>
+                  <a:srgbClr val="E94F37"/>
+                </a:solidFill>
+                <a:latin typeface="Calibri"/>
+              </a:rPr>
+              <a:t>0.5-0.6 kHz</a:t>
+            </a:r>
+          </a:p>
+          <a:p>
+            <a:pPr>
+              <a:lnSpc>
+                <a:spcPct val="130000"/>
+              </a:lnSpc>
+              <a:spcAft>
+                <a:spcPts val="1000"/>
+              </a:spcAft>
+            </a:pPr>
+            <a:r>
+              <a:rPr sz="1250" b="0">
+                <a:solidFill>
+                  <a:srgbClr val="44506B"/>
+                </a:solidFill>
+                <a:latin typeface="Calibri"/>
+              </a:rPr>
+              <a:t>SHAP analysis: the model attends to the gaps between words and one narrow low band</a:t>
+            </a:r>
+          </a:p>
+          <a:p>
+            <a:pPr>
+              <a:lnSpc>
+                <a:spcPct val="120000"/>
+              </a:lnSpc>
+              <a:spcAft>
+                <a:spcPts val="0"/>
+              </a:spcAft>
+            </a:pPr>
+            <a:r>
+              <a:rPr sz="900" b="0">
+                <a:solidFill>
+                  <a:srgbClr val="8792AC"/>
+                </a:solidFill>
+                <a:latin typeface="Calibri"/>
+              </a:rPr>
+              <a:t>arXiv:2110.03309</a:t>
+            </a:r>
+          </a:p>
+        </p:txBody>
+      </p:sp>
+      <p:sp>
+        <p:nvSpPr>
+          <p:cNvPr id="12" name="Rectangle 11"/>
+          <p:cNvSpPr/>
+          <p:nvPr/>
+        </p:nvSpPr>
+        <p:spPr>
+          <a:xfrm>
+            <a:off x="548640" y="4800600"/>
+            <a:ext cx="11091672" cy="960120"/>
+          </a:xfrm>
+          <a:prstGeom prst="rect">
+            <a:avLst/>
+          </a:prstGeom>
+          <a:solidFill>
+            <a:srgbClr val="1E2761"/>
+          </a:solidFill>
+          <a:ln>
+            <a:noFill/>
+          </a:ln>
+          <a:effectLst/>
+        </p:spPr>
+        <p:style>
+          <a:lnRef idx="1">
+            <a:schemeClr val="accent1"/>
+          </a:lnRef>
+          <a:fillRef idx="3">
+            <a:schemeClr val="accent1"/>
+          </a:fillRef>
+          <a:effectRef idx="2">
+            <a:schemeClr val="accent1"/>
+          </a:effectRef>
+          <a:fontRef idx="minor">
+            <a:schemeClr val="lt1"/>
+          </a:fontRef>
+        </p:style>
+        <p:txBody>
+          <a:bodyPr rtlCol="0" anchor="ctr"/>
+          <a:lstStyle/>
+          <a:p/>
+        </p:txBody>
+      </p:sp>
+      <p:sp>
+        <p:nvSpPr>
+          <p:cNvPr id="13" name="TextBox 12"/>
+          <p:cNvSpPr txBox="1"/>
+          <p:nvPr/>
+        </p:nvSpPr>
+        <p:spPr>
+          <a:xfrm>
+            <a:off x="914400" y="4983480"/>
+            <a:ext cx="10424160" cy="621792"/>
+          </a:xfrm>
+          <a:prstGeom prst="rect">
+            <a:avLst/>
+          </a:prstGeom>
+          <a:noFill/>
+        </p:spPr>
+        <p:txBody>
+          <a:bodyPr wrap="square" lIns="0" rIns="0" tIns="0" bIns="0" anchor="ctr">
+            <a:spAutoFit/>
+          </a:bodyPr>
+          <a:lstStyle/>
+          <a:p>
+            <a:pPr algn="l">
+              <a:lnSpc>
+                <a:spcPct val="130000"/>
+              </a:lnSpc>
+              <a:spcAft>
+                <a:spcPts val="0"/>
+              </a:spcAft>
+            </a:pPr>
+            <a:r>
+              <a:rPr sz="1450" b="0">
+                <a:solidFill>
+                  <a:srgbClr val="CADCFC"/>
+                </a:solidFill>
+                <a:latin typeface="Calibri"/>
+              </a:rPr>
+              <a:t>The detector wins on what belongs to the corpus, not to the speech. </a:t>
+            </a:r>
+            <a:r>
+              <a:rPr sz="1450" b="1">
+                <a:solidFill>
+                  <a:srgbClr val="FFFFFF"/>
+                </a:solidFill>
+                <a:latin typeface="Calibri"/>
+              </a:rPr>
+              <a:t>Every one of those cues can be taken away in training.</a:t>
+            </a:r>
+          </a:p>
+        </p:txBody>
+      </p:sp>
+    </p:spTree>
+  </p:cSld>
+  <p:clrMapOvr>
+    <a:masterClrMapping/>
+  </p:clrMapOvr>
+</p:sld>
+</file>
+
+<file path=ppt/slides/slide5.xml><?xml version="1.0" encoding="utf-8"?>
 <p:sld xmlns:a="http://schemas.openxmlformats.org/drawingml/2006/main" xmlns:r="http://schemas.openxmlformats.org/officeDocument/2006/relationships" xmlns:p="http://schemas.openxmlformats.org/presentationml/2006/main">
   <p:cSld name="Slide 3">
     <p:bg>
@@ -6130,6 +7701,10 @@
           </a:solidFill>
           <a:ln/>
         </p:spPr>
+        <p:txBody>
+          <a:bodyPr/>
+          <a:p/>
+        </p:txBody>
       </p:sp>
       <p:pic>
         <p:nvPicPr>
@@ -6258,6 +7833,10 @@
             <a:prstDash val="solid"/>
           </a:ln>
         </p:spPr>
+        <p:txBody>
+          <a:bodyPr/>
+          <a:p/>
+        </p:txBody>
       </p:sp>
       <p:sp>
         <p:nvSpPr>
@@ -6322,6 +7901,10 @@
           </a:solidFill>
           <a:ln/>
         </p:spPr>
+        <p:txBody>
+          <a:bodyPr/>
+          <a:p/>
+        </p:txBody>
       </p:sp>
       <p:pic>
         <p:nvPicPr>
@@ -6449,6 +8032,10 @@
           </a:solidFill>
           <a:ln/>
         </p:spPr>
+        <p:txBody>
+          <a:bodyPr/>
+          <a:p/>
+        </p:txBody>
       </p:sp>
       <p:pic>
         <p:nvPicPr>
@@ -6576,6 +8163,10 @@
           </a:solidFill>
           <a:ln/>
         </p:spPr>
+        <p:txBody>
+          <a:bodyPr/>
+          <a:p/>
+        </p:txBody>
       </p:sp>
       <p:pic>
         <p:nvPicPr>
@@ -6703,6 +8294,10 @@
           </a:solidFill>
           <a:ln/>
         </p:spPr>
+        <p:txBody>
+          <a:bodyPr/>
+          <a:p/>
+        </p:txBody>
       </p:sp>
       <p:pic>
         <p:nvPicPr>
@@ -6893,7 +8488,7 @@
 </p:sld>
 </file>
 
-<file path=ppt/slides/slide4.xml><?xml version="1.0" encoding="utf-8"?>
+<file path=ppt/slides/slide6.xml><?xml version="1.0" encoding="utf-8"?>
 <p:sld xmlns:a="http://schemas.openxmlformats.org/drawingml/2006/main" xmlns:r="http://schemas.openxmlformats.org/officeDocument/2006/relationships" xmlns:p="http://schemas.openxmlformats.org/presentationml/2006/main">
   <p:cSld name="Slide 4">
     <p:bg>
@@ -7063,6 +8658,10 @@
             <a:prstDash val="solid"/>
           </a:ln>
         </p:spPr>
+        <p:txBody>
+          <a:bodyPr/>
+          <a:p/>
+        </p:txBody>
       </p:sp>
       <p:sp>
         <p:nvSpPr>
@@ -7296,6 +8895,10 @@
           </a:solidFill>
           <a:ln/>
         </p:spPr>
+        <p:txBody>
+          <a:bodyPr/>
+          <a:p/>
+        </p:txBody>
       </p:sp>
       <p:sp>
         <p:nvSpPr>
@@ -7592,7 +9195,7 @@
 </p:sld>
 </file>
 
-<file path=ppt/slides/slide5.xml><?xml version="1.0" encoding="utf-8"?>
+<file path=ppt/slides/slide7.xml><?xml version="1.0" encoding="utf-8"?>
 <p:sld xmlns:a="http://schemas.openxmlformats.org/drawingml/2006/main" xmlns:r="http://schemas.openxmlformats.org/officeDocument/2006/relationships" xmlns:p="http://schemas.openxmlformats.org/presentationml/2006/main">
   <p:cSld name="Slide 5">
     <p:bg>
@@ -7715,6 +9318,10 @@
           </a:solidFill>
           <a:ln/>
         </p:spPr>
+        <p:txBody>
+          <a:bodyPr/>
+          <a:p/>
+        </p:txBody>
       </p:sp>
       <p:pic>
         <p:nvPicPr>
@@ -7881,6 +9488,10 @@
           </a:solidFill>
           <a:ln/>
         </p:spPr>
+        <p:txBody>
+          <a:bodyPr/>
+          <a:p/>
+        </p:txBody>
       </p:sp>
       <p:pic>
         <p:nvPicPr>
@@ -8047,6 +9658,10 @@
           </a:solidFill>
           <a:ln/>
         </p:spPr>
+        <p:txBody>
+          <a:bodyPr/>
+          <a:p/>
+        </p:txBody>
       </p:sp>
       <p:pic>
         <p:nvPicPr>
@@ -8213,6 +9828,10 @@
           </a:solidFill>
           <a:ln/>
         </p:spPr>
+        <p:txBody>
+          <a:bodyPr/>
+          <a:p/>
+        </p:txBody>
       </p:sp>
       <p:pic>
         <p:nvPicPr>
@@ -8345,6 +9964,10 @@
             <a:prstDash val="solid"/>
           </a:ln>
         </p:spPr>
+        <p:txBody>
+          <a:bodyPr/>
+          <a:p/>
+        </p:txBody>
       </p:sp>
       <p:pic>
         <p:nvPicPr>
@@ -8496,7 +10119,7 @@
 </p:sld>
 </file>
 
-<file path=ppt/slides/slide6.xml><?xml version="1.0" encoding="utf-8"?>
+<file path=ppt/slides/slide8.xml><?xml version="1.0" encoding="utf-8"?>
 <p:sld xmlns:a="http://schemas.openxmlformats.org/drawingml/2006/main" xmlns:r="http://schemas.openxmlformats.org/officeDocument/2006/relationships" xmlns:p="http://schemas.openxmlformats.org/presentationml/2006/main">
   <p:cSld name="Slide 6">
     <p:bg>
@@ -8619,6 +10242,10 @@
           </a:solidFill>
           <a:ln/>
         </p:spPr>
+        <p:txBody>
+          <a:bodyPr/>
+          <a:p/>
+        </p:txBody>
       </p:sp>
       <p:sp>
         <p:nvSpPr>
@@ -8639,6 +10266,10 @@
           </a:solidFill>
           <a:ln/>
         </p:spPr>
+        <p:txBody>
+          <a:bodyPr/>
+          <a:p/>
+        </p:txBody>
       </p:sp>
       <p:pic>
         <p:nvPicPr>
@@ -8766,6 +10397,10 @@
           </a:solidFill>
           <a:ln/>
         </p:spPr>
+        <p:txBody>
+          <a:bodyPr/>
+          <a:p/>
+        </p:txBody>
       </p:sp>
       <p:sp>
         <p:nvSpPr>
@@ -8786,6 +10421,10 @@
           </a:solidFill>
           <a:ln/>
         </p:spPr>
+        <p:txBody>
+          <a:bodyPr/>
+          <a:p/>
+        </p:txBody>
       </p:sp>
       <p:pic>
         <p:nvPicPr>
@@ -8878,15 +10517,13 @@
               <a:buNone/>
             </a:pPr>
             <a:r>
-              <a:rPr lang="en-US" sz="1200" dirty="0">
+              <a:rPr sz="1200">
                 <a:solidFill>
                   <a:srgbClr val="44506B"/>
                 </a:solidFill>
-                <a:latin typeface="Calibri" pitchFamily="34" charset="0"/>
-                <a:ea typeface="Calibri" pitchFamily="34" charset="-122"/>
-                <a:cs typeface="Calibri" pitchFamily="34" charset="-120"/>
-              </a:rPr>
-              <a:t>Quantize/distill the SSL backbone (INT8, distilled student) to target sub-200ms latency per chunk.</a:t>
+                <a:latin typeface="Calibri"/>
+              </a:rPr>
+              <a:t>Quantize/distill the SSL backbone (INT8, distilled student) so it keeps up with the live stream on a phone.</a:t>
             </a:r>
             <a:endParaRPr lang="en-US" sz="1200" dirty="0"/>
           </a:p>
@@ -8913,6 +10550,10 @@
           </a:solidFill>
           <a:ln/>
         </p:spPr>
+        <p:txBody>
+          <a:bodyPr/>
+          <a:p/>
+        </p:txBody>
       </p:sp>
       <p:sp>
         <p:nvSpPr>
@@ -8933,6 +10574,10 @@
           </a:solidFill>
           <a:ln/>
         </p:spPr>
+        <p:txBody>
+          <a:bodyPr/>
+          <a:p/>
+        </p:txBody>
       </p:sp>
       <p:pic>
         <p:nvPicPr>
@@ -9060,6 +10705,10 @@
           </a:solidFill>
           <a:ln/>
         </p:spPr>
+        <p:txBody>
+          <a:bodyPr/>
+          <a:p/>
+        </p:txBody>
       </p:sp>
       <p:sp>
         <p:nvSpPr>
@@ -9080,6 +10729,10 @@
           </a:solidFill>
           <a:ln/>
         </p:spPr>
+        <p:txBody>
+          <a:bodyPr/>
+          <a:p/>
+        </p:txBody>
       </p:sp>
       <p:pic>
         <p:nvPicPr>
@@ -9130,15 +10783,13 @@
               <a:buNone/>
             </a:pPr>
             <a:r>
-              <a:rPr lang="en-US" sz="1450" b="1" dirty="0">
+              <a:rPr sz="1450" b="1">
                 <a:solidFill>
                   <a:srgbClr val="1B1F3B"/>
                 </a:solidFill>
-                <a:latin typeface="Calibri" pitchFamily="34" charset="0"/>
-                <a:ea typeface="Calibri" pitchFamily="34" charset="-122"/>
-                <a:cs typeface="Calibri" pitchFamily="34" charset="-120"/>
-              </a:rPr>
-              <a:t>Edge / cloud split</a:t>
+                <a:latin typeface="Calibri"/>
+              </a:rPr>
+              <a:t>On-device triage</a:t>
             </a:r>
             <a:endParaRPr lang="en-US" sz="1450" dirty="0"/>
           </a:p>
@@ -9172,15 +10823,13 @@
               <a:buNone/>
             </a:pPr>
             <a:r>
-              <a:rPr lang="en-US" sz="1200" dirty="0">
+              <a:rPr sz="1200">
                 <a:solidFill>
                   <a:srgbClr val="44506B"/>
                 </a:solidFill>
-                <a:latin typeface="Calibri" pitchFamily="34" charset="0"/>
-                <a:ea typeface="Calibri" pitchFamily="34" charset="-122"/>
-                <a:cs typeface="Calibri" pitchFamily="34" charset="-120"/>
-              </a:rPr>
-              <a:t>Fast handcrafted-feature triage at the gateway for an instant first pass; heavier backbone confirms asynchronously.</a:t>
+                <a:latin typeface="Calibri"/>
+              </a:rPr>
+              <a:t>Fast handcrafted-feature triage on the device for an instant first pass; the heavier backbone confirms right after.</a:t>
             </a:r>
             <a:endParaRPr lang="en-US" sz="1200" dirty="0"/>
           </a:p>
@@ -9270,7 +10919,7 @@
 </p:sld>
 </file>
 
-<file path=ppt/slides/slide7.xml><?xml version="1.0" encoding="utf-8"?>
+<file path=ppt/slides/slide9.xml><?xml version="1.0" encoding="utf-8"?>
 <p:sld xmlns:a="http://schemas.openxmlformats.org/drawingml/2006/main" xmlns:r="http://schemas.openxmlformats.org/officeDocument/2006/relationships" xmlns:p="http://schemas.openxmlformats.org/presentationml/2006/main">
   <p:cSld name="Slide 7">
     <p:bg>
@@ -9393,6 +11042,10 @@
           </a:solidFill>
           <a:ln/>
         </p:spPr>
+        <p:txBody>
+          <a:bodyPr/>
+          <a:p/>
+        </p:txBody>
       </p:sp>
       <p:sp>
         <p:nvSpPr>
@@ -9413,6 +11066,10 @@
           </a:solidFill>
           <a:ln/>
         </p:spPr>
+        <p:txBody>
+          <a:bodyPr/>
+          <a:p/>
+        </p:txBody>
       </p:sp>
       <p:pic>
         <p:nvPicPr>
@@ -9540,6 +11197,10 @@
           </a:solidFill>
           <a:ln/>
         </p:spPr>
+        <p:txBody>
+          <a:bodyPr/>
+          <a:p/>
+        </p:txBody>
       </p:sp>
       <p:sp>
         <p:nvSpPr>
@@ -9560,6 +11221,10 @@
           </a:solidFill>
           <a:ln/>
         </p:spPr>
+        <p:txBody>
+          <a:bodyPr/>
+          <a:p/>
+        </p:txBody>
       </p:sp>
       <p:pic>
         <p:nvPicPr>
@@ -9687,6 +11352,10 @@
           </a:solidFill>
           <a:ln/>
         </p:spPr>
+        <p:txBody>
+          <a:bodyPr/>
+          <a:p/>
+        </p:txBody>
       </p:sp>
       <p:sp>
         <p:nvSpPr>
@@ -9707,6 +11376,10 @@
           </a:solidFill>
           <a:ln/>
         </p:spPr>
+        <p:txBody>
+          <a:bodyPr/>
+          <a:p/>
+        </p:txBody>
       </p:sp>
       <p:pic>
         <p:nvPicPr>
@@ -9923,1578 +11596,6 @@
                 <a:latin typeface="Calibri"/>
               </a:rPr>
               <a:t>9</a:t>
-            </a:r>
-            <a:endParaRPr lang="en-US" sz="900" dirty="0"/>
-          </a:p>
-        </p:txBody>
-      </p:sp>
-    </p:spTree>
-  </p:cSld>
-  <p:clrMapOvr>
-    <a:masterClrMapping/>
-  </p:clrMapOvr>
-</p:sld>
-</file>
-
-<file path=ppt/slides/slide8.xml><?xml version="1.0" encoding="utf-8"?>
-<p:sld xmlns:a="http://schemas.openxmlformats.org/drawingml/2006/main" xmlns:r="http://schemas.openxmlformats.org/officeDocument/2006/relationships" xmlns:p="http://schemas.openxmlformats.org/presentationml/2006/main">
-  <p:cSld name="Slide 8">
-    <p:bg>
-      <p:bgPr>
-        <a:solidFill>
-          <a:srgbClr val="FFFFFF"/>
-        </a:solidFill>
-      </p:bgPr>
-    </p:bg>
-    <p:spTree>
-      <p:nvGrpSpPr>
-        <p:cNvPr id="1" name=""/>
-        <p:cNvGrpSpPr/>
-        <p:nvPr/>
-      </p:nvGrpSpPr>
-      <p:grpSpPr>
-        <a:xfrm>
-          <a:off x="0" y="0"/>
-          <a:ext cx="0" cy="0"/>
-          <a:chOff x="0" y="0"/>
-          <a:chExt cx="0" cy="0"/>
-        </a:xfrm>
-      </p:grpSpPr>
-      <p:sp>
-        <p:nvSpPr>
-          <p:cNvPr id="2" name="Text 0"/>
-          <p:cNvSpPr txBox="1"/>
-          <p:nvPr/>
-        </p:nvSpPr>
-        <p:spPr>
-          <a:xfrm>
-            <a:off x="548640" y="365760"/>
-            <a:ext cx="9144000" cy="274320"/>
-          </a:xfrm>
-          <a:prstGeom prst="rect">
-            <a:avLst/>
-          </a:prstGeom>
-          <a:noFill/>
-          <a:ln/>
-        </p:spPr>
-        <p:txBody>
-          <a:bodyPr wrap="square" lIns="0" tIns="0" rIns="0" bIns="0" rtlCol="0" anchor="ctr"/>
-          <a:lstStyle/>
-          <a:p>
-            <a:pPr indent="0" marL="0">
-              <a:buNone/>
-            </a:pPr>
-            <a:r>
-              <a:rPr lang="en-US" sz="1200" b="1" spc="200" kern="0" dirty="0">
-                <a:solidFill>
-                  <a:srgbClr val="E94F37"/>
-                </a:solidFill>
-                <a:latin typeface="Calibri" pitchFamily="34" charset="0"/>
-                <a:ea typeface="Calibri" pitchFamily="34" charset="-122"/>
-                <a:cs typeface="Calibri" pitchFamily="34" charset="-120"/>
-              </a:rPr>
-              <a:t>EVALUATION PLAN</a:t>
-            </a:r>
-            <a:endParaRPr lang="en-US" sz="1200" dirty="0"/>
-          </a:p>
-        </p:txBody>
-      </p:sp>
-      <p:sp>
-        <p:nvSpPr>
-          <p:cNvPr id="3" name="Text 1"/>
-          <p:cNvSpPr txBox="1"/>
-          <p:nvPr/>
-        </p:nvSpPr>
-        <p:spPr>
-          <a:xfrm>
-            <a:off x="548640" y="621792"/>
-            <a:ext cx="11155680" cy="685800"/>
-          </a:xfrm>
-          <a:prstGeom prst="rect">
-            <a:avLst/>
-          </a:prstGeom>
-          <a:noFill/>
-          <a:ln/>
-        </p:spPr>
-        <p:txBody>
-          <a:bodyPr wrap="square" lIns="0" tIns="0" rIns="0" bIns="0" rtlCol="0" anchor="ctr"/>
-          <a:lstStyle/>
-          <a:p>
-            <a:pPr indent="0" marL="0">
-              <a:buNone/>
-            </a:pPr>
-            <a:r>
-              <a:rPr lang="en-US" sz="3000" b="1" dirty="0">
-                <a:solidFill>
-                  <a:srgbClr val="1B1F3B"/>
-                </a:solidFill>
-                <a:latin typeface="Cambria" pitchFamily="34" charset="0"/>
-                <a:ea typeface="Cambria" pitchFamily="34" charset="-122"/>
-                <a:cs typeface="Cambria" pitchFamily="34" charset="-120"/>
-              </a:rPr>
-              <a:t>Proving generalization, not just accuracy</a:t>
-            </a:r>
-            <a:endParaRPr lang="en-US" sz="3000" dirty="0"/>
-          </a:p>
-        </p:txBody>
-      </p:sp>
-      <p:sp>
-        <p:nvSpPr>
-          <p:cNvPr id="4" name="Shape 2"/>
-          <p:cNvSpPr/>
-          <p:nvPr/>
-        </p:nvSpPr>
-        <p:spPr>
-          <a:xfrm>
-            <a:off x="548640" y="1600200"/>
-            <a:ext cx="5349240" cy="1353312"/>
-          </a:xfrm>
-          <a:prstGeom prst="roundRect">
-            <a:avLst>
-              <a:gd name="adj" fmla="val 5405"/>
-            </a:avLst>
-          </a:prstGeom>
-          <a:solidFill>
-            <a:srgbClr val="F4F6FC"/>
-          </a:solidFill>
-          <a:ln/>
-        </p:spPr>
-        <p:txBody>
-          <a:bodyPr/>
-          <a:p/>
-        </p:txBody>
-      </p:sp>
-      <p:pic>
-        <p:nvPicPr>
-          <p:cNvPr id="5" name="Image 0" descr="/home/claude/deck/icons/chart_1E2761.png">    </p:cNvPr>
-          <p:cNvPicPr>
-            <a:picLocks noChangeAspect="1"/>
-          </p:cNvPicPr>
-          <p:nvPr/>
-        </p:nvPicPr>
-        <p:blipFill>
-          <a:blip r:embed="rId1"/>
-          <a:stretch>
-            <a:fillRect/>
-          </a:stretch>
-        </p:blipFill>
-        <p:spPr>
-          <a:xfrm>
-            <a:off x="822960" y="1819656"/>
-            <a:ext cx="438912" cy="438912"/>
-          </a:xfrm>
-          <a:prstGeom prst="rect">
-            <a:avLst/>
-          </a:prstGeom>
-        </p:spPr>
-      </p:pic>
-      <p:sp>
-        <p:nvSpPr>
-          <p:cNvPr id="6" name="Text 3"/>
-          <p:cNvSpPr txBox="1"/>
-          <p:nvPr/>
-        </p:nvSpPr>
-        <p:spPr>
-          <a:xfrm>
-            <a:off x="1463040" y="1764792"/>
-            <a:ext cx="4206240" cy="365760"/>
-          </a:xfrm>
-          <a:prstGeom prst="rect">
-            <a:avLst/>
-          </a:prstGeom>
-          <a:noFill/>
-          <a:ln/>
-        </p:spPr>
-        <p:txBody>
-          <a:bodyPr wrap="square" lIns="0" tIns="0" rIns="0" bIns="0" rtlCol="0" anchor="ctr"/>
-          <a:lstStyle/>
-          <a:p>
-            <a:pPr indent="0" marL="0">
-              <a:buNone/>
-            </a:pPr>
-            <a:r>
-              <a:rPr sz="1400" b="1">
-                <a:solidFill>
-                  <a:srgbClr val="1B1F3B"/>
-                </a:solidFill>
-                <a:latin typeface="Calibri"/>
-              </a:rPr>
-              <a:t>EER, min t-DCF, per call-minute</a:t>
-            </a:r>
-            <a:endParaRPr lang="en-US" sz="1400" dirty="0"/>
-          </a:p>
-        </p:txBody>
-      </p:sp>
-      <p:sp>
-        <p:nvSpPr>
-          <p:cNvPr id="7" name="Text 4"/>
-          <p:cNvSpPr txBox="1"/>
-          <p:nvPr/>
-        </p:nvSpPr>
-        <p:spPr>
-          <a:xfrm>
-            <a:off x="1463040" y="2130552"/>
-            <a:ext cx="4206240" cy="777240"/>
-          </a:xfrm>
-          <a:prstGeom prst="rect">
-            <a:avLst/>
-          </a:prstGeom>
-          <a:noFill/>
-          <a:ln/>
-        </p:spPr>
-        <p:txBody>
-          <a:bodyPr wrap="square" lIns="0" tIns="0" rIns="0" bIns="0" rtlCol="0" anchor="ctr"/>
-          <a:lstStyle/>
-          <a:p>
-            <a:pPr indent="0" marL="0">
-              <a:lnSpc>
-                <a:spcPct val="120000"/>
-              </a:lnSpc>
-              <a:buNone/>
-            </a:pPr>
-            <a:r>
-              <a:rPr sz="1150">
-                <a:solidFill>
-                  <a:srgbClr val="44506B"/>
-                </a:solidFill>
-                <a:latin typeface="Calibri"/>
-              </a:rPr>
-              <a:t>Standard PAD metrics on held-out splits. And a streaming detector is judged per call, not per window: at 5% per-window error a 60-second call false-alarms 79% of the time.</a:t>
-            </a:r>
-            <a:endParaRPr lang="en-US" sz="1150" dirty="0"/>
-          </a:p>
-        </p:txBody>
-      </p:sp>
-      <p:sp>
-        <p:nvSpPr>
-          <p:cNvPr id="8" name="Shape 5"/>
-          <p:cNvSpPr/>
-          <p:nvPr/>
-        </p:nvSpPr>
-        <p:spPr>
-          <a:xfrm>
-            <a:off x="548640" y="3118104"/>
-            <a:ext cx="5349240" cy="1353312"/>
-          </a:xfrm>
-          <a:prstGeom prst="roundRect">
-            <a:avLst>
-              <a:gd name="adj" fmla="val 5405"/>
-            </a:avLst>
-          </a:prstGeom>
-          <a:solidFill>
-            <a:srgbClr val="F4F6FC"/>
-          </a:solidFill>
-          <a:ln/>
-        </p:spPr>
-        <p:txBody>
-          <a:bodyPr/>
-          <a:p/>
-        </p:txBody>
-      </p:sp>
-      <p:pic>
-        <p:nvPicPr>
-          <p:cNvPr id="9" name="Image 1" descr="/home/claude/deck/icons/target_1E2761.png">    </p:cNvPr>
-          <p:cNvPicPr>
-            <a:picLocks noChangeAspect="1"/>
-          </p:cNvPicPr>
-          <p:nvPr/>
-        </p:nvPicPr>
-        <p:blipFill>
-          <a:blip r:embed="rId2"/>
-          <a:stretch>
-            <a:fillRect/>
-          </a:stretch>
-        </p:blipFill>
-        <p:spPr>
-          <a:xfrm>
-            <a:off x="822960" y="3337560"/>
-            <a:ext cx="438912" cy="438912"/>
-          </a:xfrm>
-          <a:prstGeom prst="rect">
-            <a:avLst/>
-          </a:prstGeom>
-        </p:spPr>
-      </p:pic>
-      <p:sp>
-        <p:nvSpPr>
-          <p:cNvPr id="10" name="Text 6"/>
-          <p:cNvSpPr txBox="1"/>
-          <p:nvPr/>
-        </p:nvSpPr>
-        <p:spPr>
-          <a:xfrm>
-            <a:off x="1463040" y="3282696"/>
-            <a:ext cx="4206240" cy="365760"/>
-          </a:xfrm>
-          <a:prstGeom prst="rect">
-            <a:avLst/>
-          </a:prstGeom>
-          <a:noFill/>
-          <a:ln/>
-        </p:spPr>
-        <p:txBody>
-          <a:bodyPr wrap="square" lIns="0" tIns="0" rIns="0" bIns="0" rtlCol="0" anchor="ctr"/>
-          <a:lstStyle/>
-          <a:p>
-            <a:pPr indent="0" marL="0">
-              <a:buNone/>
-            </a:pPr>
-            <a:r>
-              <a:rPr lang="en-US" sz="1400" b="1" dirty="0">
-                <a:solidFill>
-                  <a:srgbClr val="1B1F3B"/>
-                </a:solidFill>
-                <a:latin typeface="Calibri" pitchFamily="34" charset="0"/>
-                <a:ea typeface="Calibri" pitchFamily="34" charset="-122"/>
-                <a:cs typeface="Calibri" pitchFamily="34" charset="-120"/>
-              </a:rPr>
-              <a:t>Leave-one-generator-out</a:t>
-            </a:r>
-            <a:endParaRPr lang="en-US" sz="1400" dirty="0"/>
-          </a:p>
-        </p:txBody>
-      </p:sp>
-      <p:sp>
-        <p:nvSpPr>
-          <p:cNvPr id="11" name="Text 7"/>
-          <p:cNvSpPr txBox="1"/>
-          <p:nvPr/>
-        </p:nvSpPr>
-        <p:spPr>
-          <a:xfrm>
-            <a:off x="1463040" y="3648456"/>
-            <a:ext cx="4206240" cy="777240"/>
-          </a:xfrm>
-          <a:prstGeom prst="rect">
-            <a:avLst/>
-          </a:prstGeom>
-          <a:noFill/>
-          <a:ln/>
-        </p:spPr>
-        <p:txBody>
-          <a:bodyPr wrap="square" lIns="0" tIns="0" rIns="0" bIns="0" rtlCol="0" anchor="ctr"/>
-          <a:lstStyle/>
-          <a:p>
-            <a:pPr indent="0" marL="0">
-              <a:lnSpc>
-                <a:spcPct val="120000"/>
-              </a:lnSpc>
-              <a:buNone/>
-            </a:pPr>
-            <a:r>
-              <a:rPr lang="en-US" sz="1150" dirty="0">
-                <a:solidFill>
-                  <a:srgbClr val="44506B"/>
-                </a:solidFill>
-                <a:latin typeface="Calibri" pitchFamily="34" charset="0"/>
-                <a:ea typeface="Calibri" pitchFamily="34" charset="-122"/>
-                <a:cs typeface="Calibri" pitchFamily="34" charset="-120"/>
-              </a:rPr>
-              <a:t>Entire vocoder / TTS families held out of training to directly test cross-generator generalization.</a:t>
-            </a:r>
-            <a:endParaRPr lang="en-US" sz="1150" dirty="0"/>
-          </a:p>
-        </p:txBody>
-      </p:sp>
-      <p:sp>
-        <p:nvSpPr>
-          <p:cNvPr id="12" name="Shape 8"/>
-          <p:cNvSpPr/>
-          <p:nvPr/>
-        </p:nvSpPr>
-        <p:spPr>
-          <a:xfrm>
-            <a:off x="548640" y="4636008"/>
-            <a:ext cx="5349240" cy="1353312"/>
-          </a:xfrm>
-          <a:prstGeom prst="roundRect">
-            <a:avLst>
-              <a:gd name="adj" fmla="val 5405"/>
-            </a:avLst>
-          </a:prstGeom>
-          <a:solidFill>
-            <a:srgbClr val="F4F6FC"/>
-          </a:solidFill>
-          <a:ln/>
-        </p:spPr>
-        <p:txBody>
-          <a:bodyPr/>
-          <a:p/>
-        </p:txBody>
-      </p:sp>
-      <p:pic>
-        <p:nvPicPr>
-          <p:cNvPr id="13" name="Image 2" descr="/home/claude/deck/icons/layers_1E2761.png">    </p:cNvPr>
-          <p:cNvPicPr>
-            <a:picLocks noChangeAspect="1"/>
-          </p:cNvPicPr>
-          <p:nvPr/>
-        </p:nvPicPr>
-        <p:blipFill>
-          <a:blip r:embed="rId3"/>
-          <a:stretch>
-            <a:fillRect/>
-          </a:stretch>
-        </p:blipFill>
-        <p:spPr>
-          <a:xfrm>
-            <a:off x="822960" y="4855464"/>
-            <a:ext cx="438912" cy="438912"/>
-          </a:xfrm>
-          <a:prstGeom prst="rect">
-            <a:avLst/>
-          </a:prstGeom>
-        </p:spPr>
-      </p:pic>
-      <p:sp>
-        <p:nvSpPr>
-          <p:cNvPr id="14" name="Text 9"/>
-          <p:cNvSpPr txBox="1"/>
-          <p:nvPr/>
-        </p:nvSpPr>
-        <p:spPr>
-          <a:xfrm>
-            <a:off x="1463040" y="4800600"/>
-            <a:ext cx="4206240" cy="365760"/>
-          </a:xfrm>
-          <a:prstGeom prst="rect">
-            <a:avLst/>
-          </a:prstGeom>
-          <a:noFill/>
-          <a:ln/>
-        </p:spPr>
-        <p:txBody>
-          <a:bodyPr wrap="square" lIns="0" tIns="0" rIns="0" bIns="0" rtlCol="0" anchor="ctr"/>
-          <a:lstStyle/>
-          <a:p>
-            <a:pPr indent="0" marL="0">
-              <a:buNone/>
-            </a:pPr>
-            <a:r>
-              <a:rPr lang="en-US" sz="1400" b="1" dirty="0">
-                <a:solidFill>
-                  <a:srgbClr val="1B1F3B"/>
-                </a:solidFill>
-                <a:latin typeface="Calibri" pitchFamily="34" charset="0"/>
-                <a:ea typeface="Calibri" pitchFamily="34" charset="-122"/>
-                <a:cs typeface="Calibri" pitchFamily="34" charset="-120"/>
-              </a:rPr>
-              <a:t>Cross-lingual robustness (stretch)</a:t>
-            </a:r>
-            <a:endParaRPr lang="en-US" sz="1400" dirty="0"/>
-          </a:p>
-        </p:txBody>
-      </p:sp>
-      <p:sp>
-        <p:nvSpPr>
-          <p:cNvPr id="15" name="Text 10"/>
-          <p:cNvSpPr txBox="1"/>
-          <p:nvPr/>
-        </p:nvSpPr>
-        <p:spPr>
-          <a:xfrm>
-            <a:off x="1463040" y="5166360"/>
-            <a:ext cx="4206240" cy="777240"/>
-          </a:xfrm>
-          <a:prstGeom prst="rect">
-            <a:avLst/>
-          </a:prstGeom>
-          <a:noFill/>
-          <a:ln/>
-        </p:spPr>
-        <p:txBody>
-          <a:bodyPr wrap="square" lIns="0" tIns="0" rIns="0" bIns="0" rtlCol="0" anchor="ctr"/>
-          <a:lstStyle/>
-          <a:p>
-            <a:pPr indent="0" marL="0">
-              <a:lnSpc>
-                <a:spcPct val="120000"/>
-              </a:lnSpc>
-              <a:buNone/>
-            </a:pPr>
-            <a:r>
-              <a:rPr lang="en-US" sz="1150" dirty="0">
-                <a:solidFill>
-                  <a:srgbClr val="44506B"/>
-                </a:solidFill>
-                <a:latin typeface="Calibri" pitchFamily="34" charset="0"/>
-                <a:ea typeface="Calibri" pitchFamily="34" charset="-122"/>
-                <a:cs typeface="Calibri" pitchFamily="34" charset="-120"/>
-              </a:rPr>
-              <a:t>Spot-check performance on non-English speech with no language-specific fine-tuning.</a:t>
-            </a:r>
-            <a:endParaRPr lang="en-US" sz="1150" dirty="0"/>
-          </a:p>
-        </p:txBody>
-      </p:sp>
-      <p:sp>
-        <p:nvSpPr>
-          <p:cNvPr id="16" name="Text 11"/>
-          <p:cNvSpPr txBox="1"/>
-          <p:nvPr/>
-        </p:nvSpPr>
-        <p:spPr>
-          <a:xfrm>
-            <a:off x="6263640" y="1627632"/>
-            <a:ext cx="5349240" cy="274320"/>
-          </a:xfrm>
-          <a:prstGeom prst="rect">
-            <a:avLst/>
-          </a:prstGeom>
-          <a:noFill/>
-          <a:ln/>
-        </p:spPr>
-        <p:txBody>
-          <a:bodyPr wrap="square" lIns="0" tIns="0" rIns="0" bIns="0" rtlCol="0" anchor="ctr"/>
-          <a:lstStyle/>
-          <a:p>
-            <a:pPr indent="0" marL="0">
-              <a:buNone/>
-            </a:pPr>
-            <a:r>
-              <a:rPr lang="en-US" sz="1050" b="1" spc="100" kern="0" dirty="0">
-                <a:solidFill>
-                  <a:srgbClr val="8792AC"/>
-                </a:solidFill>
-                <a:latin typeface="Calibri" pitchFamily="34" charset="0"/>
-                <a:ea typeface="Calibri" pitchFamily="34" charset="-122"/>
-                <a:cs typeface="Calibri" pitchFamily="34" charset="-120"/>
-              </a:rPr>
-              <a:t>REAL-TIME LATENCY BUDGET  ·  TARGET, MS PER CHUNK</a:t>
-            </a:r>
-            <a:endParaRPr lang="en-US" sz="1050" dirty="0"/>
-          </a:p>
-        </p:txBody>
-      </p:sp>
-      <p:graphicFrame>
-        <p:nvGraphicFramePr>
-          <p:cNvPr id="17" name="Chart 0" descr=""/>
-          <p:cNvGraphicFramePr/>
-          <p:nvPr/>
-        </p:nvGraphicFramePr>
-        <p:xfrm>
-          <a:off x="6263640" y="1965960"/>
-          <a:ext cx="5349240" cy="3291840"/>
-        </p:xfrm>
-        <a:graphic xmlns:a="http://schemas.openxmlformats.org/drawingml/2006/main">
-          <a:graphicData uri="http://schemas.openxmlformats.org/drawingml/2006/chart">
-            <c:chart xmlns:c="http://schemas.openxmlformats.org/drawingml/2006/chart" r:id="rId4"/>
-          </a:graphicData>
-        </a:graphic>
-      </p:graphicFrame>
-      <p:sp>
-        <p:nvSpPr>
-          <p:cNvPr id="18" name="Text 12"/>
-          <p:cNvSpPr txBox="1"/>
-          <p:nvPr/>
-        </p:nvSpPr>
-        <p:spPr>
-          <a:xfrm>
-            <a:off x="6263640" y="5349240"/>
-            <a:ext cx="5349240" cy="502920"/>
-          </a:xfrm>
-          <a:prstGeom prst="rect">
-            <a:avLst/>
-          </a:prstGeom>
-          <a:noFill/>
-          <a:ln/>
-        </p:spPr>
-        <p:txBody>
-          <a:bodyPr wrap="square" lIns="0" tIns="0" rIns="0" bIns="0" rtlCol="0" anchor="ctr"/>
-          <a:lstStyle/>
-          <a:p>
-            <a:pPr indent="0" marL="0">
-              <a:lnSpc>
-                <a:spcPct val="120000"/>
-              </a:lnSpc>
-              <a:buNone/>
-            </a:pPr>
-            <a:r>
-              <a:rPr lang="en-US" sz="1050" i="1" dirty="0">
-                <a:solidFill>
-                  <a:srgbClr val="8792AC"/>
-                </a:solidFill>
-                <a:latin typeface="Calibri" pitchFamily="34" charset="0"/>
-                <a:ea typeface="Calibri" pitchFamily="34" charset="-122"/>
-                <a:cs typeface="Calibri" pitchFamily="34" charset="-120"/>
-              </a:rPr>
-              <a:t>Sums to a ~200ms target per chunk — the budget streaming inference and compression are engineered against (Slide 6).</a:t>
-            </a:r>
-            <a:endParaRPr lang="en-US" sz="1050" dirty="0"/>
-          </a:p>
-        </p:txBody>
-      </p:sp>
-      <p:sp>
-        <p:nvSpPr>
-          <p:cNvPr id="19" name="Text 13"/>
-          <p:cNvSpPr txBox="1"/>
-          <p:nvPr/>
-        </p:nvSpPr>
-        <p:spPr>
-          <a:xfrm>
-            <a:off x="457200" y="6537960"/>
-            <a:ext cx="8229600" cy="274320"/>
-          </a:xfrm>
-          <a:prstGeom prst="rect">
-            <a:avLst/>
-          </a:prstGeom>
-          <a:noFill/>
-          <a:ln/>
-        </p:spPr>
-        <p:txBody>
-          <a:bodyPr wrap="square" lIns="0" tIns="0" rIns="0" bIns="0" rtlCol="0" anchor="ctr"/>
-          <a:lstStyle/>
-          <a:p>
-            <a:pPr indent="0" marL="0">
-              <a:buNone/>
-            </a:pPr>
-            <a:r>
-              <a:rPr lang="en-US" sz="900" dirty="0">
-                <a:solidFill>
-                  <a:srgbClr val="8792AC"/>
-                </a:solidFill>
-                <a:latin typeface="Calibri" pitchFamily="34" charset="0"/>
-                <a:ea typeface="Calibri" pitchFamily="34" charset="-122"/>
-                <a:cs typeface="Calibri" pitchFamily="34" charset="-120"/>
-              </a:rPr>
-              <a:t>Vishing Challenge  |  Deepfake Voice Detection for Anti-Vishing Systems</a:t>
-            </a:r>
-            <a:endParaRPr lang="en-US" sz="900" dirty="0"/>
-          </a:p>
-        </p:txBody>
-      </p:sp>
-      <p:sp>
-        <p:nvSpPr>
-          <p:cNvPr id="20" name="Text 14"/>
-          <p:cNvSpPr txBox="1"/>
-          <p:nvPr/>
-        </p:nvSpPr>
-        <p:spPr>
-          <a:xfrm>
-            <a:off x="11430000" y="6537960"/>
-            <a:ext cx="457200" cy="274320"/>
-          </a:xfrm>
-          <a:prstGeom prst="rect">
-            <a:avLst/>
-          </a:prstGeom>
-          <a:noFill/>
-          <a:ln/>
-        </p:spPr>
-        <p:txBody>
-          <a:bodyPr wrap="square" lIns="0" tIns="0" rIns="0" bIns="0" rtlCol="0" anchor="ctr"/>
-          <a:lstStyle/>
-          <a:p>
-            <a:pPr algn="r" indent="0" marL="0">
-              <a:buNone/>
-            </a:pPr>
-            <a:r>
-              <a:rPr sz="900">
-                <a:solidFill>
-                  <a:srgbClr val="8792AC"/>
-                </a:solidFill>
-                <a:latin typeface="Calibri"/>
-              </a:rPr>
-              <a:t>10</a:t>
-            </a:r>
-            <a:endParaRPr lang="en-US" sz="900" dirty="0"/>
-          </a:p>
-        </p:txBody>
-      </p:sp>
-    </p:spTree>
-  </p:cSld>
-  <p:clrMapOvr>
-    <a:masterClrMapping/>
-  </p:clrMapOvr>
-</p:sld>
-</file>
-
-<file path=ppt/slides/slide9.xml><?xml version="1.0" encoding="utf-8"?>
-<p:sld xmlns:a="http://schemas.openxmlformats.org/drawingml/2006/main" xmlns:r="http://schemas.openxmlformats.org/officeDocument/2006/relationships" xmlns:p="http://schemas.openxmlformats.org/presentationml/2006/main">
-  <p:cSld name="Slide 9">
-    <p:bg>
-      <p:bgPr>
-        <a:solidFill>
-          <a:srgbClr val="FFFFFF"/>
-        </a:solidFill>
-      </p:bgPr>
-    </p:bg>
-    <p:spTree>
-      <p:nvGrpSpPr>
-        <p:cNvPr id="1" name=""/>
-        <p:cNvGrpSpPr/>
-        <p:nvPr/>
-      </p:nvGrpSpPr>
-      <p:grpSpPr>
-        <a:xfrm>
-          <a:off x="0" y="0"/>
-          <a:ext cx="0" cy="0"/>
-          <a:chOff x="0" y="0"/>
-          <a:chExt cx="0" cy="0"/>
-        </a:xfrm>
-      </p:grpSpPr>
-      <p:sp>
-        <p:nvSpPr>
-          <p:cNvPr id="2" name="Text 0"/>
-          <p:cNvSpPr txBox="1"/>
-          <p:nvPr/>
-        </p:nvSpPr>
-        <p:spPr>
-          <a:xfrm>
-            <a:off x="548640" y="365760"/>
-            <a:ext cx="9144000" cy="274320"/>
-          </a:xfrm>
-          <a:prstGeom prst="rect">
-            <a:avLst/>
-          </a:prstGeom>
-          <a:noFill/>
-          <a:ln/>
-        </p:spPr>
-        <p:txBody>
-          <a:bodyPr wrap="square" lIns="0" tIns="0" rIns="0" bIns="0" rtlCol="0" anchor="ctr"/>
-          <a:lstStyle/>
-          <a:p>
-            <a:pPr indent="0" marL="0">
-              <a:buNone/>
-            </a:pPr>
-            <a:r>
-              <a:rPr lang="en-US" sz="1200" b="1" spc="200" kern="0" dirty="0">
-                <a:solidFill>
-                  <a:srgbClr val="E94F37"/>
-                </a:solidFill>
-                <a:latin typeface="Calibri" pitchFamily="34" charset="0"/>
-                <a:ea typeface="Calibri" pitchFamily="34" charset="-122"/>
-                <a:cs typeface="Calibri" pitchFamily="34" charset="-120"/>
-              </a:rPr>
-              <a:t>EXECUTION PLAN</a:t>
-            </a:r>
-            <a:endParaRPr lang="en-US" sz="1200" dirty="0"/>
-          </a:p>
-        </p:txBody>
-      </p:sp>
-      <p:sp>
-        <p:nvSpPr>
-          <p:cNvPr id="3" name="Text 1"/>
-          <p:cNvSpPr txBox="1"/>
-          <p:nvPr/>
-        </p:nvSpPr>
-        <p:spPr>
-          <a:xfrm>
-            <a:off x="548640" y="621792"/>
-            <a:ext cx="11155680" cy="685800"/>
-          </a:xfrm>
-          <a:prstGeom prst="rect">
-            <a:avLst/>
-          </a:prstGeom>
-          <a:noFill/>
-          <a:ln/>
-        </p:spPr>
-        <p:txBody>
-          <a:bodyPr wrap="square" lIns="0" tIns="0" rIns="0" bIns="0" rtlCol="0" anchor="ctr"/>
-          <a:lstStyle/>
-          <a:p>
-            <a:pPr indent="0" marL="0">
-              <a:buNone/>
-            </a:pPr>
-            <a:r>
-              <a:rPr sz="3000" b="1">
-                <a:solidFill>
-                  <a:srgbClr val="1B1F3B"/>
-                </a:solidFill>
-                <a:latin typeface="Cambria"/>
-              </a:rPr>
-              <a:t>From proposal to a working detector</a:t>
-            </a:r>
-            <a:endParaRPr lang="en-US" sz="3000" dirty="0"/>
-          </a:p>
-        </p:txBody>
-      </p:sp>
-      <p:sp>
-        <p:nvSpPr>
-          <p:cNvPr id="4" name="Shape 2"/>
-          <p:cNvSpPr/>
-          <p:nvPr/>
-        </p:nvSpPr>
-        <p:spPr>
-          <a:xfrm>
-            <a:off x="548640" y="2011680"/>
-            <a:ext cx="2560320" cy="3291840"/>
-          </a:xfrm>
-          <a:prstGeom prst="roundRect">
-            <a:avLst>
-              <a:gd name="adj" fmla="val 2857"/>
-            </a:avLst>
-          </a:prstGeom>
-          <a:solidFill>
-            <a:srgbClr val="1E2761"/>
-          </a:solidFill>
-          <a:ln/>
-        </p:spPr>
-        <p:txBody>
-          <a:bodyPr/>
-          <a:p/>
-        </p:txBody>
-      </p:sp>
-      <p:sp>
-        <p:nvSpPr>
-          <p:cNvPr id="5" name="Text 3"/>
-          <p:cNvSpPr txBox="1"/>
-          <p:nvPr/>
-        </p:nvSpPr>
-        <p:spPr>
-          <a:xfrm>
-            <a:off x="731520" y="2194560"/>
-            <a:ext cx="914400" cy="640080"/>
-          </a:xfrm>
-          <a:prstGeom prst="rect">
-            <a:avLst/>
-          </a:prstGeom>
-          <a:noFill/>
-          <a:ln/>
-        </p:spPr>
-        <p:txBody>
-          <a:bodyPr wrap="square" lIns="0" tIns="0" rIns="0" bIns="0" rtlCol="0" anchor="ctr"/>
-          <a:lstStyle/>
-          <a:p>
-            <a:pPr indent="0" marL="0">
-              <a:buNone/>
-            </a:pPr>
-            <a:r>
-              <a:rPr lang="en-US" sz="3400" b="1" dirty="0">
-                <a:solidFill>
-                  <a:srgbClr val="CADCFC"/>
-                </a:solidFill>
-                <a:latin typeface="Cambria" pitchFamily="34" charset="0"/>
-                <a:ea typeface="Cambria" pitchFamily="34" charset="-122"/>
-                <a:cs typeface="Cambria" pitchFamily="34" charset="-120"/>
-              </a:rPr>
-              <a:t>1</a:t>
-            </a:r>
-            <a:endParaRPr lang="en-US" sz="3400" dirty="0"/>
-          </a:p>
-        </p:txBody>
-      </p:sp>
-      <p:sp>
-        <p:nvSpPr>
-          <p:cNvPr id="6" name="Text 4"/>
-          <p:cNvSpPr txBox="1"/>
-          <p:nvPr/>
-        </p:nvSpPr>
-        <p:spPr>
-          <a:xfrm>
-            <a:off x="731520" y="2880360"/>
-            <a:ext cx="2194560" cy="274320"/>
-          </a:xfrm>
-          <a:prstGeom prst="rect">
-            <a:avLst/>
-          </a:prstGeom>
-          <a:noFill/>
-          <a:ln/>
-        </p:spPr>
-        <p:txBody>
-          <a:bodyPr wrap="square" lIns="0" tIns="0" rIns="0" bIns="0" rtlCol="0" anchor="ctr"/>
-          <a:lstStyle/>
-          <a:p>
-            <a:pPr indent="0" marL="0">
-              <a:buNone/>
-            </a:pPr>
-            <a:r>
-              <a:rPr sz="1000" b="1">
-                <a:solidFill>
-                  <a:srgbClr val="E94F37"/>
-                </a:solidFill>
-                <a:latin typeface="Calibri"/>
-              </a:rPr>
-              <a:t>2-DAY SPRINT</a:t>
-            </a:r>
-            <a:endParaRPr lang="en-US" sz="1000" dirty="0"/>
-          </a:p>
-        </p:txBody>
-      </p:sp>
-      <p:sp>
-        <p:nvSpPr>
-          <p:cNvPr id="7" name="Text 5"/>
-          <p:cNvSpPr txBox="1"/>
-          <p:nvPr/>
-        </p:nvSpPr>
-        <p:spPr>
-          <a:xfrm>
-            <a:off x="731520" y="3182112"/>
-            <a:ext cx="2194560" cy="502920"/>
-          </a:xfrm>
-          <a:prstGeom prst="rect">
-            <a:avLst/>
-          </a:prstGeom>
-          <a:noFill/>
-          <a:ln/>
-        </p:spPr>
-        <p:txBody>
-          <a:bodyPr wrap="square" lIns="0" tIns="0" rIns="0" bIns="0" rtlCol="0" anchor="ctr"/>
-          <a:lstStyle/>
-          <a:p>
-            <a:pPr indent="0" marL="0">
-              <a:buNone/>
-            </a:pPr>
-            <a:r>
-              <a:rPr sz="1400" b="1">
-                <a:solidFill>
-                  <a:srgbClr val="FFFFFF"/>
-                </a:solidFill>
-                <a:latin typeface="Calibri"/>
-              </a:rPr>
-              <a:t>Literature &amp; proposal</a:t>
-            </a:r>
-            <a:endParaRPr lang="en-US" sz="1400" dirty="0"/>
-          </a:p>
-        </p:txBody>
-      </p:sp>
-      <p:sp>
-        <p:nvSpPr>
-          <p:cNvPr id="8" name="Text 6"/>
-          <p:cNvSpPr txBox="1"/>
-          <p:nvPr/>
-        </p:nvSpPr>
-        <p:spPr>
-          <a:xfrm>
-            <a:off x="731520" y="3703320"/>
-            <a:ext cx="2194560" cy="1463040"/>
-          </a:xfrm>
-          <a:prstGeom prst="rect">
-            <a:avLst/>
-          </a:prstGeom>
-          <a:noFill/>
-          <a:ln/>
-        </p:spPr>
-        <p:txBody>
-          <a:bodyPr wrap="square" lIns="0" tIns="0" rIns="0" bIns="0" rtlCol="0" anchor="ctr"/>
-          <a:lstStyle/>
-          <a:p>
-            <a:pPr indent="0" marL="0">
-              <a:lnSpc>
-                <a:spcPct val="125000"/>
-              </a:lnSpc>
-              <a:buNone/>
-            </a:pPr>
-            <a:r>
-              <a:rPr sz="1100">
-                <a:solidFill>
-                  <a:srgbClr val="CADCFC"/>
-                </a:solidFill>
-                <a:latin typeface="Calibri"/>
-              </a:rPr>
-              <a:t>Survey the generalization failure, fix the evaluation protocol, and commit to an architecture. This deck.</a:t>
-            </a:r>
-            <a:endParaRPr lang="en-US" sz="1100" dirty="0"/>
-          </a:p>
-        </p:txBody>
-      </p:sp>
-      <p:sp>
-        <p:nvSpPr>
-          <p:cNvPr id="9" name="Shape 7"/>
-          <p:cNvSpPr/>
-          <p:nvPr/>
-        </p:nvSpPr>
-        <p:spPr>
-          <a:xfrm>
-            <a:off x="3337560" y="2011680"/>
-            <a:ext cx="2560320" cy="3291840"/>
-          </a:xfrm>
-          <a:prstGeom prst="roundRect">
-            <a:avLst>
-              <a:gd name="adj" fmla="val 2857"/>
-            </a:avLst>
-          </a:prstGeom>
-          <a:solidFill>
-            <a:srgbClr val="F4F6FC"/>
-          </a:solidFill>
-          <a:ln/>
-        </p:spPr>
-        <p:txBody>
-          <a:bodyPr/>
-          <a:p/>
-        </p:txBody>
-      </p:sp>
-      <p:sp>
-        <p:nvSpPr>
-          <p:cNvPr id="10" name="Text 8"/>
-          <p:cNvSpPr txBox="1"/>
-          <p:nvPr/>
-        </p:nvSpPr>
-        <p:spPr>
-          <a:xfrm>
-            <a:off x="3520440" y="2194560"/>
-            <a:ext cx="914400" cy="640080"/>
-          </a:xfrm>
-          <a:prstGeom prst="rect">
-            <a:avLst/>
-          </a:prstGeom>
-          <a:noFill/>
-          <a:ln/>
-        </p:spPr>
-        <p:txBody>
-          <a:bodyPr wrap="square" lIns="0" tIns="0" rIns="0" bIns="0" rtlCol="0" anchor="ctr"/>
-          <a:lstStyle/>
-          <a:p>
-            <a:pPr indent="0" marL="0">
-              <a:buNone/>
-            </a:pPr>
-            <a:r>
-              <a:rPr lang="en-US" sz="3400" b="1" dirty="0">
-                <a:solidFill>
-                  <a:srgbClr val="1E2761"/>
-                </a:solidFill>
-                <a:latin typeface="Cambria" pitchFamily="34" charset="0"/>
-                <a:ea typeface="Cambria" pitchFamily="34" charset="-122"/>
-                <a:cs typeface="Cambria" pitchFamily="34" charset="-120"/>
-              </a:rPr>
-              <a:t>2</a:t>
-            </a:r>
-            <a:endParaRPr lang="en-US" sz="3400" dirty="0"/>
-          </a:p>
-        </p:txBody>
-      </p:sp>
-      <p:sp>
-        <p:nvSpPr>
-          <p:cNvPr id="11" name="Text 9"/>
-          <p:cNvSpPr txBox="1"/>
-          <p:nvPr/>
-        </p:nvSpPr>
-        <p:spPr>
-          <a:xfrm>
-            <a:off x="3520440" y="2880360"/>
-            <a:ext cx="2194560" cy="274320"/>
-          </a:xfrm>
-          <a:prstGeom prst="rect">
-            <a:avLst/>
-          </a:prstGeom>
-          <a:noFill/>
-          <a:ln/>
-        </p:spPr>
-        <p:txBody>
-          <a:bodyPr wrap="square" lIns="0" tIns="0" rIns="0" bIns="0" rtlCol="0" anchor="ctr"/>
-          <a:lstStyle/>
-          <a:p>
-            <a:pPr indent="0" marL="0">
-              <a:buNone/>
-            </a:pPr>
-            <a:r>
-              <a:rPr sz="1000" b="1">
-                <a:solidFill>
-                  <a:srgbClr val="E94F37"/>
-                </a:solidFill>
-                <a:latin typeface="Calibri"/>
-              </a:rPr>
-              <a:t>WEEKS 2-4</a:t>
-            </a:r>
-            <a:endParaRPr lang="en-US" sz="1000" dirty="0"/>
-          </a:p>
-        </p:txBody>
-      </p:sp>
-      <p:sp>
-        <p:nvSpPr>
-          <p:cNvPr id="12" name="Text 10"/>
-          <p:cNvSpPr txBox="1"/>
-          <p:nvPr/>
-        </p:nvSpPr>
-        <p:spPr>
-          <a:xfrm>
-            <a:off x="3520440" y="3182112"/>
-            <a:ext cx="2194560" cy="502920"/>
-          </a:xfrm>
-          <a:prstGeom prst="rect">
-            <a:avLst/>
-          </a:prstGeom>
-          <a:noFill/>
-          <a:ln/>
-        </p:spPr>
-        <p:txBody>
-          <a:bodyPr wrap="square" lIns="0" tIns="0" rIns="0" bIns="0" rtlCol="0" anchor="ctr"/>
-          <a:lstStyle/>
-          <a:p>
-            <a:pPr indent="0" marL="0">
-              <a:buNone/>
-            </a:pPr>
-            <a:r>
-              <a:rPr sz="1400" b="1">
-                <a:solidFill>
-                  <a:srgbClr val="1B1F3B"/>
-                </a:solidFill>
-                <a:latin typeface="Calibri"/>
-              </a:rPr>
-              <a:t>Baseline</a:t>
-            </a:r>
-            <a:endParaRPr lang="en-US" sz="1400" dirty="0"/>
-          </a:p>
-        </p:txBody>
-      </p:sp>
-      <p:sp>
-        <p:nvSpPr>
-          <p:cNvPr id="13" name="Text 11"/>
-          <p:cNvSpPr txBox="1"/>
-          <p:nvPr/>
-        </p:nvSpPr>
-        <p:spPr>
-          <a:xfrm>
-            <a:off x="3520440" y="3703320"/>
-            <a:ext cx="2194560" cy="1463040"/>
-          </a:xfrm>
-          <a:prstGeom prst="rect">
-            <a:avLst/>
-          </a:prstGeom>
-          <a:noFill/>
-          <a:ln/>
-        </p:spPr>
-        <p:txBody>
-          <a:bodyPr wrap="square" lIns="0" tIns="0" rIns="0" bIns="0" rtlCol="0" anchor="ctr"/>
-          <a:lstStyle/>
-          <a:p>
-            <a:pPr indent="0" marL="0">
-              <a:lnSpc>
-                <a:spcPct val="125000"/>
-              </a:lnSpc>
-              <a:buNone/>
-            </a:pPr>
-            <a:r>
-              <a:rPr sz="1100">
-                <a:solidFill>
-                  <a:srgbClr val="44506B"/>
-                </a:solidFill>
-                <a:latin typeface="Calibri"/>
-              </a:rPr>
-              <a:t>Reproduce published clean-condition EER and validate against the official challenge baseline scores.</a:t>
-            </a:r>
-            <a:endParaRPr lang="en-US" sz="1100" dirty="0"/>
-          </a:p>
-        </p:txBody>
-      </p:sp>
-      <p:sp>
-        <p:nvSpPr>
-          <p:cNvPr id="14" name="Shape 12"/>
-          <p:cNvSpPr/>
-          <p:nvPr/>
-        </p:nvSpPr>
-        <p:spPr>
-          <a:xfrm>
-            <a:off x="6126480" y="2011680"/>
-            <a:ext cx="2560320" cy="3291840"/>
-          </a:xfrm>
-          <a:prstGeom prst="roundRect">
-            <a:avLst>
-              <a:gd name="adj" fmla="val 2857"/>
-            </a:avLst>
-          </a:prstGeom>
-          <a:solidFill>
-            <a:srgbClr val="1E2761"/>
-          </a:solidFill>
-          <a:ln/>
-        </p:spPr>
-        <p:txBody>
-          <a:bodyPr/>
-          <a:p/>
-        </p:txBody>
-      </p:sp>
-      <p:sp>
-        <p:nvSpPr>
-          <p:cNvPr id="15" name="Text 13"/>
-          <p:cNvSpPr txBox="1"/>
-          <p:nvPr/>
-        </p:nvSpPr>
-        <p:spPr>
-          <a:xfrm>
-            <a:off x="6309360" y="2194560"/>
-            <a:ext cx="914400" cy="640080"/>
-          </a:xfrm>
-          <a:prstGeom prst="rect">
-            <a:avLst/>
-          </a:prstGeom>
-          <a:noFill/>
-          <a:ln/>
-        </p:spPr>
-        <p:txBody>
-          <a:bodyPr wrap="square" lIns="0" tIns="0" rIns="0" bIns="0" rtlCol="0" anchor="ctr"/>
-          <a:lstStyle/>
-          <a:p>
-            <a:pPr indent="0" marL="0">
-              <a:buNone/>
-            </a:pPr>
-            <a:r>
-              <a:rPr lang="en-US" sz="3400" b="1" dirty="0">
-                <a:solidFill>
-                  <a:srgbClr val="CADCFC"/>
-                </a:solidFill>
-                <a:latin typeface="Cambria" pitchFamily="34" charset="0"/>
-                <a:ea typeface="Cambria" pitchFamily="34" charset="-122"/>
-                <a:cs typeface="Cambria" pitchFamily="34" charset="-120"/>
-              </a:rPr>
-              <a:t>3</a:t>
-            </a:r>
-            <a:endParaRPr lang="en-US" sz="3400" dirty="0"/>
-          </a:p>
-        </p:txBody>
-      </p:sp>
-      <p:sp>
-        <p:nvSpPr>
-          <p:cNvPr id="16" name="Text 14"/>
-          <p:cNvSpPr txBox="1"/>
-          <p:nvPr/>
-        </p:nvSpPr>
-        <p:spPr>
-          <a:xfrm>
-            <a:off x="6309360" y="2880360"/>
-            <a:ext cx="2194560" cy="274320"/>
-          </a:xfrm>
-          <a:prstGeom prst="rect">
-            <a:avLst/>
-          </a:prstGeom>
-          <a:noFill/>
-          <a:ln/>
-        </p:spPr>
-        <p:txBody>
-          <a:bodyPr wrap="square" lIns="0" tIns="0" rIns="0" bIns="0" rtlCol="0" anchor="ctr"/>
-          <a:lstStyle/>
-          <a:p>
-            <a:pPr indent="0" marL="0">
-              <a:buNone/>
-            </a:pPr>
-            <a:r>
-              <a:rPr sz="1000" b="1">
-                <a:solidFill>
-                  <a:srgbClr val="E94F37"/>
-                </a:solidFill>
-                <a:latin typeface="Calibri"/>
-              </a:rPr>
-              <a:t>WEEKS 5-9</a:t>
-            </a:r>
-            <a:endParaRPr lang="en-US" sz="1000" dirty="0"/>
-          </a:p>
-        </p:txBody>
-      </p:sp>
-      <p:sp>
-        <p:nvSpPr>
-          <p:cNvPr id="17" name="Text 15"/>
-          <p:cNvSpPr txBox="1"/>
-          <p:nvPr/>
-        </p:nvSpPr>
-        <p:spPr>
-          <a:xfrm>
-            <a:off x="6309360" y="3182112"/>
-            <a:ext cx="2194560" cy="502920"/>
-          </a:xfrm>
-          <a:prstGeom prst="rect">
-            <a:avLst/>
-          </a:prstGeom>
-          <a:noFill/>
-          <a:ln/>
-        </p:spPr>
-        <p:txBody>
-          <a:bodyPr wrap="square" lIns="0" tIns="0" rIns="0" bIns="0" rtlCol="0" anchor="ctr"/>
-          <a:lstStyle/>
-          <a:p>
-            <a:pPr indent="0" marL="0">
-              <a:buNone/>
-            </a:pPr>
-            <a:r>
-              <a:rPr sz="1400" b="1">
-                <a:solidFill>
-                  <a:srgbClr val="FFFFFF"/>
-                </a:solidFill>
-                <a:latin typeface="Calibri"/>
-              </a:rPr>
-              <a:t>Generalization</a:t>
-            </a:r>
-            <a:endParaRPr lang="en-US" sz="1400" dirty="0"/>
-          </a:p>
-        </p:txBody>
-      </p:sp>
-      <p:sp>
-        <p:nvSpPr>
-          <p:cNvPr id="18" name="Text 16"/>
-          <p:cNvSpPr txBox="1"/>
-          <p:nvPr/>
-        </p:nvSpPr>
-        <p:spPr>
-          <a:xfrm>
-            <a:off x="6309360" y="3703320"/>
-            <a:ext cx="2194560" cy="1463040"/>
-          </a:xfrm>
-          <a:prstGeom prst="rect">
-            <a:avLst/>
-          </a:prstGeom>
-          <a:noFill/>
-          <a:ln/>
-        </p:spPr>
-        <p:txBody>
-          <a:bodyPr wrap="square" lIns="0" tIns="0" rIns="0" bIns="0" rtlCol="0" anchor="ctr"/>
-          <a:lstStyle/>
-          <a:p>
-            <a:pPr indent="0" marL="0">
-              <a:lnSpc>
-                <a:spcPct val="125000"/>
-              </a:lnSpc>
-              <a:buNone/>
-            </a:pPr>
-            <a:r>
-              <a:rPr sz="1100">
-                <a:solidFill>
-                  <a:srgbClr val="CADCFC"/>
-                </a:solidFill>
-                <a:latin typeface="Calibri"/>
-              </a:rPr>
-              <a:t>Degraded-channel and silence augmentation, foundation-model front-end, leave-one-generator-out. The core work.</a:t>
-            </a:r>
-            <a:endParaRPr lang="en-US" sz="1100" dirty="0"/>
-          </a:p>
-        </p:txBody>
-      </p:sp>
-      <p:sp>
-        <p:nvSpPr>
-          <p:cNvPr id="19" name="Shape 17"/>
-          <p:cNvSpPr/>
-          <p:nvPr/>
-        </p:nvSpPr>
-        <p:spPr>
-          <a:xfrm>
-            <a:off x="8915400" y="2011680"/>
-            <a:ext cx="2560320" cy="3291840"/>
-          </a:xfrm>
-          <a:prstGeom prst="roundRect">
-            <a:avLst>
-              <a:gd name="adj" fmla="val 2857"/>
-            </a:avLst>
-          </a:prstGeom>
-          <a:solidFill>
-            <a:srgbClr val="F4F6FC"/>
-          </a:solidFill>
-          <a:ln/>
-        </p:spPr>
-        <p:txBody>
-          <a:bodyPr/>
-          <a:p/>
-        </p:txBody>
-      </p:sp>
-      <p:sp>
-        <p:nvSpPr>
-          <p:cNvPr id="20" name="Text 18"/>
-          <p:cNvSpPr txBox="1"/>
-          <p:nvPr/>
-        </p:nvSpPr>
-        <p:spPr>
-          <a:xfrm>
-            <a:off x="9098280" y="2194560"/>
-            <a:ext cx="914400" cy="640080"/>
-          </a:xfrm>
-          <a:prstGeom prst="rect">
-            <a:avLst/>
-          </a:prstGeom>
-          <a:noFill/>
-          <a:ln/>
-        </p:spPr>
-        <p:txBody>
-          <a:bodyPr wrap="square" lIns="0" tIns="0" rIns="0" bIns="0" rtlCol="0" anchor="ctr"/>
-          <a:lstStyle/>
-          <a:p>
-            <a:pPr indent="0" marL="0">
-              <a:buNone/>
-            </a:pPr>
-            <a:r>
-              <a:rPr lang="en-US" sz="3400" b="1" dirty="0">
-                <a:solidFill>
-                  <a:srgbClr val="1E2761"/>
-                </a:solidFill>
-                <a:latin typeface="Cambria" pitchFamily="34" charset="0"/>
-                <a:ea typeface="Cambria" pitchFamily="34" charset="-122"/>
-                <a:cs typeface="Cambria" pitchFamily="34" charset="-120"/>
-              </a:rPr>
-              <a:t>4</a:t>
-            </a:r>
-            <a:endParaRPr lang="en-US" sz="3400" dirty="0"/>
-          </a:p>
-        </p:txBody>
-      </p:sp>
-      <p:sp>
-        <p:nvSpPr>
-          <p:cNvPr id="21" name="Text 19"/>
-          <p:cNvSpPr txBox="1"/>
-          <p:nvPr/>
-        </p:nvSpPr>
-        <p:spPr>
-          <a:xfrm>
-            <a:off x="9098280" y="2880360"/>
-            <a:ext cx="2194560" cy="274320"/>
-          </a:xfrm>
-          <a:prstGeom prst="rect">
-            <a:avLst/>
-          </a:prstGeom>
-          <a:noFill/>
-          <a:ln/>
-        </p:spPr>
-        <p:txBody>
-          <a:bodyPr wrap="square" lIns="0" tIns="0" rIns="0" bIns="0" rtlCol="0" anchor="ctr"/>
-          <a:lstStyle/>
-          <a:p>
-            <a:pPr indent="0" marL="0">
-              <a:buNone/>
-            </a:pPr>
-            <a:r>
-              <a:rPr sz="1000" b="1">
-                <a:solidFill>
-                  <a:srgbClr val="E94F37"/>
-                </a:solidFill>
-                <a:latin typeface="Calibri"/>
-              </a:rPr>
-              <a:t>WEEKS 10-12</a:t>
-            </a:r>
-            <a:endParaRPr lang="en-US" sz="1000" dirty="0"/>
-          </a:p>
-        </p:txBody>
-      </p:sp>
-      <p:sp>
-        <p:nvSpPr>
-          <p:cNvPr id="22" name="Text 20"/>
-          <p:cNvSpPr txBox="1"/>
-          <p:nvPr/>
-        </p:nvSpPr>
-        <p:spPr>
-          <a:xfrm>
-            <a:off x="9098280" y="3182112"/>
-            <a:ext cx="2194560" cy="502920"/>
-          </a:xfrm>
-          <a:prstGeom prst="rect">
-            <a:avLst/>
-          </a:prstGeom>
-          <a:noFill/>
-          <a:ln/>
-        </p:spPr>
-        <p:txBody>
-          <a:bodyPr wrap="square" lIns="0" tIns="0" rIns="0" bIns="0" rtlCol="0" anchor="ctr"/>
-          <a:lstStyle/>
-          <a:p>
-            <a:pPr indent="0" marL="0">
-              <a:buNone/>
-            </a:pPr>
-            <a:r>
-              <a:rPr sz="1400" b="1">
-                <a:solidFill>
-                  <a:srgbClr val="1B1F3B"/>
-                </a:solidFill>
-                <a:latin typeface="Calibri"/>
-              </a:rPr>
-              <a:t>Real-time &amp; write-up</a:t>
-            </a:r>
-            <a:endParaRPr lang="en-US" sz="1400" dirty="0"/>
-          </a:p>
-        </p:txBody>
-      </p:sp>
-      <p:sp>
-        <p:nvSpPr>
-          <p:cNvPr id="23" name="Text 21"/>
-          <p:cNvSpPr txBox="1"/>
-          <p:nvPr/>
-        </p:nvSpPr>
-        <p:spPr>
-          <a:xfrm>
-            <a:off x="9098280" y="3703320"/>
-            <a:ext cx="2194560" cy="1463040"/>
-          </a:xfrm>
-          <a:prstGeom prst="rect">
-            <a:avLst/>
-          </a:prstGeom>
-          <a:noFill/>
-          <a:ln/>
-        </p:spPr>
-        <p:txBody>
-          <a:bodyPr wrap="square" lIns="0" tIns="0" rIns="0" bIns="0" rtlCol="0" anchor="ctr"/>
-          <a:lstStyle/>
-          <a:p>
-            <a:pPr indent="0" marL="0">
-              <a:lnSpc>
-                <a:spcPct val="125000"/>
-              </a:lnSpc>
-              <a:buNone/>
-            </a:pPr>
-            <a:r>
-              <a:rPr sz="1100">
-                <a:solidFill>
-                  <a:srgbClr val="44506B"/>
-                </a:solidFill>
-                <a:latin typeface="Calibri"/>
-              </a:rPr>
-              <a:t>Streaming inference, compression, latency on device, then the report and defence.</a:t>
-            </a:r>
-            <a:endParaRPr lang="en-US" sz="1100" dirty="0"/>
-          </a:p>
-        </p:txBody>
-      </p:sp>
-      <p:sp>
-        <p:nvSpPr>
-          <p:cNvPr id="24" name="Text 22"/>
-          <p:cNvSpPr txBox="1"/>
-          <p:nvPr/>
-        </p:nvSpPr>
-        <p:spPr>
-          <a:xfrm>
-            <a:off x="457200" y="6537960"/>
-            <a:ext cx="8229600" cy="274320"/>
-          </a:xfrm>
-          <a:prstGeom prst="rect">
-            <a:avLst/>
-          </a:prstGeom>
-          <a:noFill/>
-          <a:ln/>
-        </p:spPr>
-        <p:txBody>
-          <a:bodyPr wrap="square" lIns="0" tIns="0" rIns="0" bIns="0" rtlCol="0" anchor="ctr"/>
-          <a:lstStyle/>
-          <a:p>
-            <a:pPr indent="0" marL="0">
-              <a:buNone/>
-            </a:pPr>
-            <a:r>
-              <a:rPr lang="en-US" sz="900" dirty="0">
-                <a:solidFill>
-                  <a:srgbClr val="8792AC"/>
-                </a:solidFill>
-                <a:latin typeface="Calibri" pitchFamily="34" charset="0"/>
-                <a:ea typeface="Calibri" pitchFamily="34" charset="-122"/>
-                <a:cs typeface="Calibri" pitchFamily="34" charset="-120"/>
-              </a:rPr>
-              <a:t>Vishing Challenge  |  Deepfake Voice Detection for Anti-Vishing Systems</a:t>
-            </a:r>
-            <a:endParaRPr lang="en-US" sz="900" dirty="0"/>
-          </a:p>
-        </p:txBody>
-      </p:sp>
-      <p:sp>
-        <p:nvSpPr>
-          <p:cNvPr id="25" name="Text 23"/>
-          <p:cNvSpPr txBox="1"/>
-          <p:nvPr/>
-        </p:nvSpPr>
-        <p:spPr>
-          <a:xfrm>
-            <a:off x="11430000" y="6537960"/>
-            <a:ext cx="457200" cy="274320"/>
-          </a:xfrm>
-          <a:prstGeom prst="rect">
-            <a:avLst/>
-          </a:prstGeom>
-          <a:noFill/>
-          <a:ln/>
-        </p:spPr>
-        <p:txBody>
-          <a:bodyPr wrap="square" lIns="0" tIns="0" rIns="0" bIns="0" rtlCol="0" anchor="ctr"/>
-          <a:lstStyle/>
-          <a:p>
-            <a:pPr algn="r" indent="0" marL="0">
-              <a:buNone/>
-            </a:pPr>
-            <a:r>
-              <a:rPr sz="900">
-                <a:solidFill>
-                  <a:srgbClr val="8792AC"/>
-                </a:solidFill>
-                <a:latin typeface="Calibri"/>
-              </a:rPr>
-              <a:t>11</a:t>
             </a:r>
             <a:endParaRPr lang="en-US" sz="900" dirty="0"/>
           </a:p>

--- a/slides/anti_vishing_proposal.pptx
+++ b/slides/anti_vishing_proposal.pptx
@@ -1686,10 +1686,14 @@
           <a:lstStyle/>
           <a:p>
             <a:r>
-              <a:rPr lang="en-US" dirty="0"/>
               <a:t>This slide answers the 'operational feasibility' requirement from the brief directly. Four levers: streaming windows instead of whole-call batch processing, compression to hit latency, training on degraded/codec/narrowband audio because real vishing calls are never studio-clean, and an edge/cloud split so the perceived latency stays low even though the full model runs heavier analysis asynchronously.</a:t>
             </a:r>
-            <a:endParaRPr lang="en-US" dirty="0"/>
+          </a:p>
+          <a:p/>
+          <a:p>
+            <a:r>
+              <a:t>Measured ourselves from the official ASVspoof 2021 baseline scores. RawNet2 by codec: none 5.84, u-law 6.33, G.722 6.41, a-law 6.59, Opus 7.95, GSM 10.66, PSTN 16.72 percent EER. Note a-law and u-law are 8 kHz narrowband yet beat wideband Opus, so the simple 'narrowband is the problem' story is wrong. G.711 only band-limits and keeps the waveform; GSM is a 13 kbps LPC vocoder and PSTN adds unknown repeated transcoding. That is what our augmentation has to cover.</a:t>
+            </a:r>
           </a:p>
         </p:txBody>
       </p:sp>
@@ -10670,15 +10674,13 @@
               <a:buNone/>
             </a:pPr>
             <a:r>
-              <a:rPr lang="en-US" sz="1200" dirty="0">
+              <a:rPr sz="1200">
                 <a:solidFill>
                   <a:srgbClr val="44506B"/>
                 </a:solidFill>
-                <a:latin typeface="Calibri" pitchFamily="34" charset="0"/>
-                <a:ea typeface="Calibri" pitchFamily="34" charset="-122"/>
-                <a:cs typeface="Calibri" pitchFamily="34" charset="-120"/>
-              </a:rPr>
-              <a:t>Train with codec compression, packet loss, and 8kHz narrowband telephony — the real conditions vishing calls arrive on.</a:t>
+                <a:latin typeface="Calibri"/>
+              </a:rPr>
+              <a:t>We measured the official baseline per codec: G.711 costs little (6.3%), but GSM hits 10.7% and uncontrolled PSTN transcoding 16.7%. Compression severity, not bandwidth, is what hurts.</a:t>
             </a:r>
             <a:endParaRPr lang="en-US" sz="1200" dirty="0"/>
           </a:p>

--- a/slides/anti_vishing_proposal.pptx
+++ b/slides/anti_vishing_proposal.pptx
@@ -1510,10 +1510,9 @@
           <a:lstStyle/>
           <a:p>
             <a:r>
-              <a:rPr lang="en-US" dirty="0"/>
-              <a:t>This is the single most important design decision in the deck. Traditional detectors overfit to known vocoders; SSL foundation models generalize better across generators and even across languages without language-specific tuning. Everything downstream -- architecture, evaluation protocol -- follows from this bet.</a:t>
-            </a:r>
-            <a:endParaRPr lang="en-US" dirty="0"/>
+              <a:rPr sz="1200"/>
+              <a:t>This is the single most important design decision in the deck. Traditional detectors overfit to known vocoders; SSL foundation models generalize better across generators without language-specific tuning. Everything downstream -- architecture, evaluation protocol -- follows from this bet.</a:t>
+            </a:r>
           </a:p>
         </p:txBody>
       </p:sp>
@@ -1864,13 +1863,7 @@
         <p:txBody>
           <a:bodyPr/>
           <a:lstStyle/>
-          <a:p>
-            <a:r>
-              <a:rPr lang="en-US" dirty="0"/>
-              <a:t>Evaluation must prove generalization, not just accuracy: EER/min t-DCF on held-out splits, leave-one-generator-out for cross-generator robustness, and a stretch cross-lingual check. The latency chart on the right shows our engineering target -- ~200ms per chunk split across the pipeline stages from slide 5-6, which is what makes real-time integration feasible.</a:t>
-            </a:r>
-            <a:endParaRPr lang="en-US" dirty="0"/>
-          </a:p>
+          <a:p/>
         </p:txBody>
       </p:sp>
       <p:sp>
@@ -2588,6 +2581,45 @@
           </a:p>
         </p:txBody>
       </p:sp>
+      <p:sp>
+        <p:nvSpPr>
+          <p:cNvPr id="9" name="TextBox 8"/>
+          <p:cNvSpPr txBox="1"/>
+          <p:nvPr/>
+        </p:nvSpPr>
+        <p:spPr>
+          <a:xfrm>
+            <a:off x="640080" y="5367528"/>
+            <a:ext cx="7315200" cy="292608"/>
+          </a:xfrm>
+          <a:prstGeom prst="rect">
+            <a:avLst/>
+          </a:prstGeom>
+          <a:noFill/>
+        </p:spPr>
+        <p:txBody>
+          <a:bodyPr wrap="square" lIns="0" rIns="0" tIns="0" bIns="0">
+            <a:spAutoFit/>
+          </a:bodyPr>
+          <a:lstStyle/>
+          <a:p>
+            <a:pPr algn="l">
+              <a:spcAft>
+                <a:spcPts val="0"/>
+              </a:spcAft>
+            </a:pPr>
+            <a:r>
+              <a:rPr sz="1200" b="0">
+                <a:solidFill>
+                  <a:srgbClr val="8792AC"/>
+                </a:solidFill>
+                <a:latin typeface="Calibri"/>
+              </a:rPr>
+              <a:t>Mert Biricik  ·  Ameer Hamza  ·  Khalid Ibrahimi  ·  Ward Zahran</a:t>
+            </a:r>
+          </a:p>
+        </p:txBody>
+      </p:sp>
     </p:spTree>
   </p:cSld>
   <p:clrMapOvr>
@@ -2942,15 +2974,13 @@
               <a:buNone/>
             </a:pPr>
             <a:r>
-              <a:rPr lang="en-US" sz="1150" dirty="0">
+              <a:rPr sz="1150">
                 <a:solidFill>
                   <a:srgbClr val="44506B"/>
                 </a:solidFill>
-                <a:latin typeface="Calibri" pitchFamily="34" charset="0"/>
-                <a:ea typeface="Calibri" pitchFamily="34" charset="-122"/>
-                <a:cs typeface="Calibri" pitchFamily="34" charset="-120"/>
-              </a:rPr>
-              <a:t>Entire vocoder / TTS families held out of training to directly test cross-generator generalization.</a:t>
+                <a:latin typeface="Calibri"/>
+              </a:rPr>
+              <a:t>Whole vocoder and TTS families are kept out of training, so cross-generator performance is measured directly.</a:t>
             </a:r>
             <a:endParaRPr lang="en-US" sz="1150" dirty="0"/>
           </a:p>
@@ -3031,15 +3061,13 @@
               <a:buNone/>
             </a:pPr>
             <a:r>
-              <a:rPr lang="en-US" sz="1400" b="1" dirty="0">
+              <a:rPr sz="1400" b="1">
                 <a:solidFill>
                   <a:srgbClr val="1B1F3B"/>
                 </a:solidFill>
-                <a:latin typeface="Calibri" pitchFamily="34" charset="0"/>
-                <a:ea typeface="Calibri" pitchFamily="34" charset="-122"/>
-                <a:cs typeface="Calibri" pitchFamily="34" charset="-120"/>
-              </a:rPr>
-              <a:t>Cross-lingual robustness (stretch)</a:t>
+                <a:latin typeface="Calibri"/>
+              </a:rPr>
+              <a:t>Reported with and without silence</a:t>
             </a:r>
             <a:endParaRPr lang="en-US" sz="1400" dirty="0"/>
           </a:p>
@@ -3073,15 +3101,13 @@
               <a:buNone/>
             </a:pPr>
             <a:r>
-              <a:rPr lang="en-US" sz="1150" dirty="0">
+              <a:rPr sz="1150">
                 <a:solidFill>
                   <a:srgbClr val="44506B"/>
                 </a:solidFill>
-                <a:latin typeface="Calibri" pitchFamily="34" charset="0"/>
-                <a:ea typeface="Calibri" pitchFamily="34" charset="-122"/>
-                <a:cs typeface="Calibri" pitchFamily="34" charset="-120"/>
-              </a:rPr>
-              <a:t>Spot-check performance on non-English speech with no language-specific fine-tuning.</a:t>
+                <a:latin typeface="Calibri"/>
+              </a:rPr>
+              <a:t>The corpus ships a VAD-trimmed subset of 16,926 trials. Every EER is reported twice, so no number of ours leans on the silence artifact.</a:t>
             </a:r>
             <a:endParaRPr lang="en-US" sz="1150" dirty="0"/>
           </a:p>
@@ -4384,15 +4410,13 @@
               <a:buChar char="●"/>
             </a:pPr>
             <a:r>
-              <a:rPr lang="en-US" sz="1250" dirty="0">
+              <a:rPr sz="1250">
                 <a:solidFill>
                   <a:srgbClr val="44506B"/>
                 </a:solidFill>
-                <a:latin typeface="Calibri" pitchFamily="34" charset="0"/>
-                <a:ea typeface="Calibri" pitchFamily="34" charset="-122"/>
-                <a:cs typeface="Calibri" pitchFamily="34" charset="-120"/>
-              </a:rPr>
-              <a:t>2-day scope limits training data breadth vs. production-scale coverage</a:t>
+                <a:latin typeface="Calibri"/>
+              </a:rPr>
+              <a:t>A short sprint limits how much training data we can cover compared with production scale.</a:t>
             </a:r>
             <a:endParaRPr lang="en-US" sz="1250" dirty="0"/>
           </a:p>
@@ -4427,15 +4451,13 @@
               <a:buChar char="●"/>
             </a:pPr>
             <a:r>
-              <a:rPr lang="en-US" sz="1250" dirty="0">
+              <a:rPr sz="1250">
                 <a:solidFill>
                   <a:srgbClr val="44506B"/>
                 </a:solidFill>
-                <a:latin typeface="Calibri" pitchFamily="34" charset="0"/>
-                <a:ea typeface="Calibri" pitchFamily="34" charset="-122"/>
-                <a:cs typeface="Calibri" pitchFamily="34" charset="-120"/>
-              </a:rPr>
-              <a:t>Foundation-model backbones raise compute cost per stream vs. lightweight CNNs</a:t>
+                <a:latin typeface="Calibri"/>
+              </a:rPr>
+              <a:t>Foundation-model backbones cost more compute per stream than a small CNN.</a:t>
             </a:r>
             <a:endParaRPr lang="en-US" sz="1250" dirty="0"/>
           </a:p>
@@ -4470,15 +4492,13 @@
               <a:buChar char="●"/>
             </a:pPr>
             <a:r>
-              <a:rPr lang="en-US" sz="1250" dirty="0">
+              <a:rPr sz="1250">
                 <a:solidFill>
                   <a:srgbClr val="44506B"/>
                 </a:solidFill>
-                <a:latin typeface="Calibri" pitchFamily="34" charset="0"/>
-                <a:ea typeface="Calibri" pitchFamily="34" charset="-122"/>
-                <a:cs typeface="Calibri" pitchFamily="34" charset="-120"/>
-              </a:rPr>
-              <a:t>No dataset fully replicates live, adversarial vishing call conditions</a:t>
+                <a:latin typeface="Calibri"/>
+              </a:rPr>
+              <a:t>No dataset fully reproduces a live, adversarial vishing call.</a:t>
             </a:r>
             <a:endParaRPr lang="en-US" sz="1250" dirty="0"/>
           </a:p>
@@ -5231,15 +5251,13 @@
               <a:buNone/>
             </a:pPr>
             <a:r>
-              <a:rPr lang="en-US" sz="1300" dirty="0">
+              <a:rPr sz="1300">
                 <a:solidFill>
                   <a:srgbClr val="44506B"/>
                 </a:solidFill>
-                <a:latin typeface="Calibri" pitchFamily="34" charset="0"/>
-                <a:ea typeface="Calibri" pitchFamily="34" charset="-122"/>
-                <a:cs typeface="Calibri" pitchFamily="34" charset="-120"/>
-              </a:rPr>
-              <a:t>Modern TTS and voice-conversion models synthesize realistic speech from a few minutes of source audio, lowering the bar for impersonation attacks.</a:t>
+                <a:latin typeface="Calibri"/>
+              </a:rPr>
+              <a:t>Modern TTS and voice-conversion models build a convincing copy of a voice from a few minutes of public audio, so impersonation no longer takes skill.</a:t>
             </a:r>
             <a:endParaRPr lang="en-US" sz="1300" dirty="0"/>
           </a:p>
@@ -5360,15 +5378,13 @@
               <a:buNone/>
             </a:pPr>
             <a:r>
-              <a:rPr lang="en-US" sz="1300" dirty="0">
+              <a:rPr sz="1300">
                 <a:solidFill>
                   <a:srgbClr val="44506B"/>
                 </a:solidFill>
-                <a:latin typeface="Calibri" pitchFamily="34" charset="0"/>
-                <a:ea typeface="Calibri" pitchFamily="34" charset="-122"/>
-                <a:cs typeface="Calibri" pitchFamily="34" charset="-120"/>
-              </a:rPr>
-              <a:t>Detection methods trained on known synthesis methods fail to generalize across diverse, unseen generative models (Li &amp; Chen, 2024).</a:t>
+                <a:latin typeface="Calibri"/>
+              </a:rPr>
+              <a:t>Detectors trained on known synthesis methods do not carry over to generators they have not seen (Li &amp; Chen, 2024).</a:t>
             </a:r>
             <a:endParaRPr lang="en-US" sz="1300" dirty="0"/>
           </a:p>
@@ -5493,7 +5509,7 @@
                 </a:solidFill>
                 <a:latin typeface="Calibri"/>
               </a:rPr>
-              <a:t>A cloned voice asking for an urgent transfer reaches the victim directly, with nothing behind it — a single miss is costly.</a:t>
+              <a:t>A cloned voice asking for an urgent transfer reaches the victim directly, with nothing behind it, a single miss is costly.</a:t>
             </a:r>
             <a:endParaRPr lang="en-US" sz="1300" dirty="0"/>
           </a:p>
@@ -7801,15 +7817,13 @@
               <a:buNone/>
             </a:pPr>
             <a:r>
-              <a:rPr lang="en-US" sz="1300" dirty="0">
+              <a:rPr sz="1300">
                 <a:solidFill>
                   <a:srgbClr val="44506B"/>
                 </a:solidFill>
-                <a:latin typeface="Calibri" pitchFamily="34" charset="0"/>
-                <a:ea typeface="Calibri" pitchFamily="34" charset="-122"/>
-                <a:cs typeface="Calibri" pitchFamily="34" charset="-120"/>
-              </a:rPr>
-              <a:t>Develop and test a robust, generalized deep learning model for Presentation Attack Detection against modern audio deepfake and synthetic voice-spoofing techniques — improving voice authentication security while reducing multi-layer phishing risk.</a:t>
+                <a:latin typeface="Calibri"/>
+              </a:rPr>
+              <a:t>Develop and test a robust, generalized deep learning model for Presentation Attack Detection against modern audio deepfake and synthetic voice-spoofing techniques, improving voice authentication security while reducing multi-layer phishing risk.</a:t>
             </a:r>
             <a:endParaRPr lang="en-US" sz="1300" dirty="0"/>
           </a:p>
@@ -7870,15 +7884,13 @@
               <a:buNone/>
             </a:pPr>
             <a:r>
-              <a:rPr lang="en-US" sz="1300" i="1" dirty="0">
+              <a:rPr sz="1300" i="1">
                 <a:solidFill>
                   <a:srgbClr val="1E2761"/>
                 </a:solidFill>
-                <a:latin typeface="Calibri" pitchFamily="34" charset="0"/>
-                <a:ea typeface="Calibri" pitchFamily="34" charset="-122"/>
-                <a:cs typeface="Calibri" pitchFamily="34" charset="-120"/>
-              </a:rPr>
-              <a:t>Success = accuracy that holds up on generators it has never seen — not just the ones it trained on.</a:t>
+                <a:latin typeface="Calibri"/>
+              </a:rPr>
+              <a:t>Success means accuracy that holds up on generators it has never seen, not just the ones it trained on.</a:t>
             </a:r>
             <a:endParaRPr lang="en-US" sz="1300" dirty="0"/>
           </a:p>
@@ -8622,15 +8634,13 @@
               <a:buNone/>
             </a:pPr>
             <a:r>
-              <a:rPr lang="en-US" sz="1350" dirty="0">
+              <a:rPr sz="1350">
                 <a:solidFill>
                   <a:srgbClr val="44506B"/>
                 </a:solidFill>
-                <a:latin typeface="Calibri" pitchFamily="34" charset="0"/>
-                <a:ea typeface="Calibri" pitchFamily="34" charset="-122"/>
-                <a:cs typeface="Calibri" pitchFamily="34" charset="-120"/>
-              </a:rPr>
-              <a:t>Systematic benchmarking across generators shows traditional detectors overfit to the synthesis methods they trained on — while large pretrained speech foundation models generalize far better, including across languages they were never fine-tuned on.</a:t>
+                <a:latin typeface="Calibri"/>
+              </a:rPr>
+              <a:t>Benchmarks across many generators keep showing the same thing. A detector trained from scratch learns the synthesis methods it saw. A large pretrained speech model holds up better, because it learned what real speech is before it ever saw a fake.</a:t>
             </a:r>
             <a:endParaRPr lang="en-US" sz="1350" dirty="0"/>
           </a:p>
@@ -8864,15 +8874,13 @@
               <a:buChar char="✗"/>
             </a:pPr>
             <a:r>
-              <a:rPr lang="en-US" sz="1250" dirty="0">
+              <a:rPr sz="1250">
                 <a:solidFill>
                   <a:srgbClr val="44506B"/>
                 </a:solidFill>
-                <a:latin typeface="Calibri" pitchFamily="34" charset="0"/>
-                <a:ea typeface="Calibri" pitchFamily="34" charset="-122"/>
-                <a:cs typeface="Calibri" pitchFamily="34" charset="-120"/>
-              </a:rPr>
-              <a:t>Little transfer across languages or channel conditions</a:t>
+                <a:latin typeface="Calibri"/>
+              </a:rPr>
+              <a:t>Little transfer to a new corpus or channel</a:t>
             </a:r>
             <a:endParaRPr lang="en-US" sz="1250" dirty="0"/>
           </a:p>
@@ -9058,15 +9066,13 @@
               <a:buChar char="✓"/>
             </a:pPr>
             <a:r>
-              <a:rPr lang="en-US" sz="1250" dirty="0">
+              <a:rPr sz="1250">
                 <a:solidFill>
                   <a:srgbClr val="CADCFC"/>
                 </a:solidFill>
-                <a:latin typeface="Calibri" pitchFamily="34" charset="0"/>
-                <a:ea typeface="Calibri" pitchFamily="34" charset="-122"/>
-                <a:cs typeface="Calibri" pitchFamily="34" charset="-120"/>
-              </a:rPr>
-              <a:t>Robust cross-lingual performance despite English-only fine-tuning</a:t>
+                <a:latin typeface="Calibri"/>
+              </a:rPr>
+              <a:t>Holds up under attack: 11.6% EER where a CNN detector goes to 61.81%</a:t>
             </a:r>
             <a:endParaRPr lang="en-US" sz="1250" dirty="0"/>
           </a:p>
@@ -9418,15 +9424,13 @@
               <a:buNone/>
             </a:pPr>
             <a:r>
-              <a:rPr lang="en-US" sz="1050" dirty="0">
+              <a:rPr sz="1050">
                 <a:solidFill>
                   <a:srgbClr val="44506B"/>
                 </a:solidFill>
-                <a:latin typeface="Calibri" pitchFamily="34" charset="0"/>
-                <a:ea typeface="Calibri" pitchFamily="34" charset="-122"/>
-                <a:cs typeface="Calibri" pitchFamily="34" charset="-120"/>
-              </a:rPr>
-              <a:t>Live call audio, chunked into overlapping 1–2s windows</a:t>
+                <a:latin typeface="Calibri"/>
+              </a:rPr>
+              <a:t>Live call audio, chunked into overlapping 1-2s windows</a:t>
             </a:r>
             <a:endParaRPr lang="en-US" sz="1050" dirty="0"/>
           </a:p>
@@ -10025,15 +10029,13 @@
               <a:buNone/>
             </a:pPr>
             <a:r>
-              <a:rPr lang="en-US" sz="1250" dirty="0">
+              <a:rPr sz="1250">
                 <a:solidFill>
                   <a:srgbClr val="1B1F3B"/>
                 </a:solidFill>
-                <a:latin typeface="Calibri" pitchFamily="34" charset="0"/>
-                <a:ea typeface="Calibri" pitchFamily="34" charset="-122"/>
-                <a:cs typeface="Calibri" pitchFamily="34" charset="-120"/>
-              </a:rPr>
-              <a:t>Decision layer: trust score is thresholded for real-time block/allow, and passed upstream as a signal into the multi-layer phishing-defense stack (see next).</a:t>
+                <a:latin typeface="Calibri"/>
+              </a:rPr>
+              <a:t>The trust score is thresholded for a real-time block or allow, then passed on as one signal into the multi-layer defense on the next slide.</a:t>
             </a:r>
             <a:endParaRPr lang="en-US" sz="1250" dirty="0"/>
           </a:p>
@@ -10366,15 +10368,13 @@
               <a:buNone/>
             </a:pPr>
             <a:r>
-              <a:rPr lang="en-US" sz="1200" dirty="0">
+              <a:rPr sz="1200">
                 <a:solidFill>
                   <a:srgbClr val="44506B"/>
                 </a:solidFill>
-                <a:latin typeface="Calibri" pitchFamily="34" charset="0"/>
-                <a:ea typeface="Calibri" pitchFamily="34" charset="-122"/>
-                <a:cs typeface="Calibri" pitchFamily="34" charset="-120"/>
-              </a:rPr>
-              <a:t>Sliding 1–2s windows with overlap; running trust score updates instead of waiting for a full call.</a:t>
+                <a:latin typeface="Calibri"/>
+              </a:rPr>
+              <a:t>Overlapping 1 to 2 second windows, with the trust score updating as the call runs rather than at the end.</a:t>
             </a:r>
             <a:endParaRPr lang="en-US" sz="1200" dirty="0"/>
           </a:p>
@@ -11122,15 +11122,13 @@
               <a:buNone/>
             </a:pPr>
             <a:r>
-              <a:rPr lang="en-US" sz="1500" b="1" dirty="0">
+              <a:rPr sz="1500" b="1">
                 <a:solidFill>
                   <a:srgbClr val="FFFFFF"/>
                 </a:solidFill>
-                <a:latin typeface="Calibri" pitchFamily="34" charset="0"/>
-                <a:ea typeface="Calibri" pitchFamily="34" charset="-122"/>
-                <a:cs typeface="Calibri" pitchFamily="34" charset="-120"/>
-              </a:rPr>
-              <a:t>Layer 1 — Voice PAD</a:t>
+                <a:latin typeface="Calibri"/>
+              </a:rPr>
+              <a:t>Layer 1: Voice PAD</a:t>
             </a:r>
             <a:endParaRPr lang="en-US" sz="1500" dirty="0"/>
           </a:p>
@@ -11277,15 +11275,13 @@
               <a:buNone/>
             </a:pPr>
             <a:r>
-              <a:rPr lang="en-US" sz="1500" b="1" dirty="0">
+              <a:rPr sz="1500" b="1">
                 <a:solidFill>
                   <a:srgbClr val="FFFFFF"/>
                 </a:solidFill>
-                <a:latin typeface="Calibri" pitchFamily="34" charset="0"/>
-                <a:ea typeface="Calibri" pitchFamily="34" charset="-122"/>
-                <a:cs typeface="Calibri" pitchFamily="34" charset="-120"/>
-              </a:rPr>
-              <a:t>Layer 2 — Behavioral &amp; Context</a:t>
+                <a:latin typeface="Calibri"/>
+              </a:rPr>
+              <a:t>Layer 2: Behavioral &amp; Context</a:t>
             </a:r>
             <a:endParaRPr lang="en-US" sz="1500" dirty="0"/>
           </a:p>
@@ -11432,15 +11428,13 @@
               <a:buNone/>
             </a:pPr>
             <a:r>
-              <a:rPr lang="en-US" sz="1500" b="1" dirty="0">
+              <a:rPr sz="1500" b="1">
                 <a:solidFill>
                   <a:srgbClr val="FFFFFF"/>
                 </a:solidFill>
-                <a:latin typeface="Calibri" pitchFamily="34" charset="0"/>
-                <a:ea typeface="Calibri" pitchFamily="34" charset="-122"/>
-                <a:cs typeface="Calibri" pitchFamily="34" charset="-120"/>
-              </a:rPr>
-              <a:t>Layer 3 — Fusion &amp; Adaptive Decision</a:t>
+                <a:latin typeface="Calibri"/>
+              </a:rPr>
+              <a:t>Layer 3: Fusion &amp; Adaptive Decision</a:t>
             </a:r>
             <a:endParaRPr lang="en-US" sz="1500" dirty="0"/>
           </a:p>

--- a/slides/anti_vishing_proposal.pptx
+++ b/slides/anti_vishing_proposal.pptx
@@ -1511,7 +1511,34 @@
           <a:p>
             <a:r>
               <a:rPr sz="1200"/>
-              <a:t>This is the single most important design decision in the deck. Traditional detectors overfit to known vocoders; SSL foundation models generalize better across generators without language-specific tuning. Everything downstream -- architecture, evaluation protocol -- follows from this bet.</a:t>
+              <a:t>This is the single most important design decision in the deck, and it now needs a caveat.</a:t>
+            </a:r>
+          </a:p>
+          <a:p/>
+          <a:p>
+            <a:r>
+              <a:rPr sz="1200"/>
+              <a:t>The claim: detectors trained from scratch overfit to the vocoders they saw. Foundation models generalise better. The source is SONAR, which is reading [1] from the brief, so say the name.</a:t>
+            </a:r>
+          </a:p>
+          <a:p>
+            <a:r>
+              <a:rPr sz="1200"/>
+              <a:t>Numbers if asked: on In-the-Wild, trained on Wavefake, Wav2Vec2BERT reaches 7.676% EER where AASIST is 27.277%, RawNet2 46.792% and LFCC-LCNN 99.2%, which is worse than guessing.</a:t>
+            </a:r>
+          </a:p>
+          <a:p/>
+          <a:p>
+            <a:r>
+              <a:rPr sz="1200"/>
+              <a:t>Now the caveat, and volunteer it rather than waiting to be caught. Delgado et al., ICASSP 2026, cloned voices with ElevenLabs, Play.ht and OpenAI Voice Engine and presented them into a real call-centre path at 8 kHz. There, a 3.55M-parameter logmel-ResNet matched WavLM Large, and beat it on real-world injection, 89.4% versus 88.2% detection at 1% false alarm.</a:t>
+            </a:r>
+          </a:p>
+          <a:p/>
+          <a:p>
+            <a:r>
+              <a:rPr sz="1200"/>
+              <a:t>Both results are true and they are about different axes. SONAR measures generalisation across generators. Delgado measures the real telephony path. Our deployment is the second one, so we treat the foundation-model choice as a hypothesis to test, not a settled bet. That is why on-device triage sits next to the heavy backbone in the systems slide.</a:t>
             </a:r>
           </a:p>
         </p:txBody>
@@ -1863,7 +1890,83 @@
         <p:txBody>
           <a:bodyPr/>
           <a:lstStyle/>
+          <a:p>
+            <a:r>
+              <a:rPr sz="1200"/>
+              <a:t>Evaluation has to prove generalization, not accuracy. Three things we track.</a:t>
+            </a:r>
+          </a:p>
           <a:p/>
+          <a:p>
+            <a:r>
+              <a:rPr sz="1200"/>
+              <a:t>EER and min t-DCF on held-out splits. Standard PAD metrics, not raw accuracy.</a:t>
+            </a:r>
+          </a:p>
+          <a:p/>
+          <a:p>
+            <a:r>
+              <a:rPr sz="1200"/>
+              <a:t>False alarms per call-minute, because a streaming detector is judged per call, not per window. Do</a:t>
+            </a:r>
+          </a:p>
+          <a:p>
+            <a:r>
+              <a:rPr sz="1200"/>
+              <a:t>the arithmetic out loud if asked: 5% per-window error, 2-second windows, 30 windows in a minute,</a:t>
+            </a:r>
+          </a:p>
+          <a:p>
+            <a:r>
+              <a:rPr sz="1200"/>
+              <a:t>one minus 0.95 to the 30th is 79%. Four calls in five would raise a false alarm. That is why</a:t>
+            </a:r>
+          </a:p>
+          <a:p>
+            <a:r>
+              <a:rPr sz="1200"/>
+              <a:t>per-window error is the wrong number to put on a slide.</a:t>
+            </a:r>
+          </a:p>
+          <a:p/>
+          <a:p>
+            <a:r>
+              <a:rPr sz="1200"/>
+              <a:t>Leave-one-generator-out. Whole vocoder and TTS families kept out of training, so cross-generator</a:t>
+            </a:r>
+          </a:p>
+          <a:p>
+            <a:r>
+              <a:rPr sz="1200"/>
+              <a:t>robustness is measured rather than assumed.</a:t>
+            </a:r>
+          </a:p>
+          <a:p/>
+          <a:p>
+            <a:r>
+              <a:rPr sz="1200"/>
+              <a:t>Every EER reported twice, with and without silence. ASVspoof 2021 ships a VAD-trimmed subset of</a:t>
+            </a:r>
+          </a:p>
+          <a:p>
+            <a:r>
+              <a:rPr sz="1200"/>
+              <a:t>16,926 trials, so this costs us nothing, and after slide 4 any expert in the room will ask for it.</a:t>
+            </a:r>
+          </a:p>
+          <a:p/>
+          <a:p>
+            <a:r>
+              <a:rPr sz="1200"/>
+              <a:t>The chart is where the time goes per 2-second chunk, not a promise. The alarm is read by a person,</a:t>
+            </a:r>
+          </a:p>
+          <a:p>
+            <a:r>
+              <a:rPr sz="1200"/>
+              <a:t>so the real budget is seconds. Per chunk we only have to keep up with the stream.</a:t>
+            </a:r>
+          </a:p>
         </p:txBody>
       </p:sp>
       <p:sp>
@@ -1947,10 +2050,80 @@
           <a:lstStyle/>
           <a:p>
             <a:r>
-              <a:rPr lang="en-US" dirty="0"/>
-              <a:t>Shows the panel this is a realistic two-day plan, not hand-waving. Day 1 gets a working generalization-tested baseline; Day 2 is where it becomes real-time and gets wired into the multi-layer story, leaving real time to rehearse before this exact presentation.</a:t>
-            </a:r>
-            <a:endParaRPr lang="en-US" dirty="0"/>
+              <a:rPr sz="1200"/>
+              <a:t>Keep this short. It exists so the panel knows the timeline is real.</a:t>
+            </a:r>
+          </a:p>
+          <a:p/>
+          <a:p>
+            <a:r>
+              <a:rPr sz="1200"/>
+              <a:t>The 2-day sprint is this deck: survey the generalization failure, fix the evaluation protocol,</a:t>
+            </a:r>
+          </a:p>
+          <a:p>
+            <a:r>
+              <a:rPr sz="1200"/>
+              <a:t>commit to an architecture. We are not claiming to have built a system in two days.</a:t>
+            </a:r>
+          </a:p>
+          <a:p/>
+          <a:p>
+            <a:r>
+              <a:rPr sz="1200"/>
+              <a:t>Weeks 2 to 4, baseline. Reproduce the published clean-condition EER. We can already validate our</a:t>
+            </a:r>
+          </a:p>
+          <a:p>
+            <a:r>
+              <a:rPr sz="1200"/>
+              <a:t>evaluation code against the official baseline score files that ship with the challenge keys, so if</a:t>
+            </a:r>
+          </a:p>
+          <a:p>
+            <a:r>
+              <a:rPr sz="1200"/>
+              <a:t>our number does not match, the bug is ours and we find it in week 3 rather than week 10.</a:t>
+            </a:r>
+          </a:p>
+          <a:p/>
+          <a:p>
+            <a:r>
+              <a:rPr sz="1200"/>
+              <a:t>Weeks 5 to 9 are the core. Degraded-channel and silence augmentation, the foundation-model</a:t>
+            </a:r>
+          </a:p>
+          <a:p>
+            <a:r>
+              <a:rPr sz="1200"/>
+              <a:t>front-end, leave-one-generator-out. This is where the gap closes or it does not.</a:t>
+            </a:r>
+          </a:p>
+          <a:p/>
+          <a:p>
+            <a:r>
+              <a:rPr sz="1200"/>
+              <a:t>Weeks 10 to 12, streaming inference, compression, latency on the device, then the report.</a:t>
+            </a:r>
+          </a:p>
+          <a:p/>
+          <a:p>
+            <a:r>
+              <a:rPr sz="1200"/>
+              <a:t>Say the risk out loud: weeks 5 to 9 are where we expect to slip. Building an augmentation pipeline</a:t>
+            </a:r>
+          </a:p>
+          <a:p>
+            <a:r>
+              <a:rPr sz="1200"/>
+              <a:t>and chasing generalization both historically overrun. Compute is one 16 GB laptop GPU at roughly</a:t>
+            </a:r>
+          </a:p>
+          <a:p>
+            <a:r>
+              <a:rPr sz="1200"/>
+              <a:t>1.5 to 3 hours per training run, which serialises the experiments.</a:t>
+            </a:r>
           </a:p>
         </p:txBody>
       </p:sp>
@@ -4416,7 +4589,7 @@
                 </a:solidFill>
                 <a:latin typeface="Calibri"/>
               </a:rPr>
-              <a:t>A short sprint limits how much training data we can cover compared with production scale.</a:t>
+              <a:t>Telephony PAD is not new ground. ASVspoof 5 and Delgado et al. (ICASSP 2026) already cover 2023-24 generators at 8 kHz. Our scope is the open-source 2024-26 models they do not include.</a:t>
             </a:r>
             <a:endParaRPr lang="en-US" sz="1250" dirty="0"/>
           </a:p>
@@ -9197,6 +9370,48 @@
           </a:p>
         </p:txBody>
       </p:sp>
+      <p:sp>
+        <p:nvSpPr>
+          <p:cNvPr id="19" name="TextBox 18"/>
+          <p:cNvSpPr txBox="1"/>
+          <p:nvPr/>
+        </p:nvSpPr>
+        <p:spPr>
+          <a:xfrm>
+            <a:off x="548640" y="6025896"/>
+            <a:ext cx="11091672" cy="502920"/>
+          </a:xfrm>
+          <a:prstGeom prst="rect">
+            <a:avLst/>
+          </a:prstGeom>
+          <a:noFill/>
+        </p:spPr>
+        <p:txBody>
+          <a:bodyPr wrap="square" lIns="0" rIns="0" tIns="0" bIns="0">
+            <a:spAutoFit/>
+          </a:bodyPr>
+          <a:lstStyle/>
+          <a:p>
+            <a:pPr>
+              <a:lnSpc>
+                <a:spcPct val="125000"/>
+              </a:lnSpc>
+              <a:spcAft>
+                <a:spcPts val="0"/>
+              </a:spcAft>
+            </a:pPr>
+            <a:r>
+              <a:rPr sz="1100" i="1">
+                <a:solidFill>
+                  <a:srgbClr val="8792AC"/>
+                </a:solidFill>
+                <a:latin typeface="Calibri"/>
+              </a:rPr>
+              <a:t>Comparison from SONAR (Li, Chen &amp; Wei, 2024). The caveat we have to carry: at 8 kHz over a real call-centre path, a 3.55M-parameter model matched WavLM Large (Delgado et al., ICASSP 2026). Which holds for us is an open question we intend to measure, not assume.</a:t>
+            </a:r>
+          </a:p>
+        </p:txBody>
+      </p:sp>
     </p:spTree>
   </p:cSld>
   <p:clrMapOvr>
@@ -10680,7 +10895,7 @@
                 </a:solidFill>
                 <a:latin typeface="Calibri"/>
               </a:rPr>
-              <a:t>We measured the official baseline per codec: G.711 costs little (6.3%), but GSM hits 10.7% and uncontrolled PSTN transcoding 16.7%. Compression severity, not bandwidth, is what hurts.</a:t>
+              <a:t>We measured the official baseline ourselves: PSTN transcoding costs 16.7% EER where clean audio costs 5.8%. Codec augmentation is the known fix. Published wav2vec2 goes from 19.09% to 0.56% on PSTN with RawBoost.</a:t>
             </a:r>
             <a:endParaRPr lang="en-US" sz="1200" dirty="0"/>
           </a:p>
